--- a/DistilBERTGNN_Network_Extension.pptx
+++ b/DistilBERTGNN_Network_Extension.pptx
@@ -32,9 +32,11 @@
     <p:sldId id="280" r:id="rId26"/>
     <p:sldId id="281" r:id="rId27"/>
     <p:sldId id="282" r:id="rId28"/>
+    <p:sldId id="283" r:id="rId29"/>
+    <p:sldId id="284" r:id="rId30"/>
   </p:sldIdLst>
   <p:notesMasterIdLst>
-    <p:notesMasterId r:id="rId29"/>
+    <p:notesMasterId r:id="rId31"/>
   </p:notesMasterIdLst>
   <p:sldSz cx="12192000" cy="6858000"/>
   <p:notesSz cx="6858000" cy="12192000"/>
@@ -133,7 +135,7 @@
   <p:extLst>
     <p:ext uri="{521415D9-36F7-43E2-AB2F-B90AF26B5E84}">
       <p14:sectionLst xmlns:p14="http://schemas.microsoft.com/office/powerpoint/2010/main">
-        <p14:section name="Introduction" id="{566b2f3f-b2e1-5481-fbd7-9242528cc4b1}">
+        <p14:section name="Introduction" id="{048308be-d9fc-aa23-13fa-97f7b8e5518a}">
           <p14:sldIdLst>
             <p14:sldId id="256"/>
             <p14:sldId id="257"/>
@@ -141,7 +143,7 @@
             <p14:sldId id="259"/>
           </p14:sldIdLst>
         </p14:section>
-        <p14:section name="Methodology" id="{566deda9-f436-0e68-3ab5-4cb77a631fdb}">
+        <p14:section name="Methodology" id="{b87bf765-8bd8-d4c6-bb38-5376adf3f49f}">
           <p14:sldIdLst>
             <p14:sldId id="260"/>
             <p14:sldId id="261"/>
@@ -151,14 +153,14 @@
             <p14:sldId id="265"/>
           </p14:sldIdLst>
         </p14:section>
-        <p14:section name="Results" id="{1d449a06-e1b8-c266-0a57-c7fb716753df}">
+        <p14:section name="Results" id="{3894fe19-ac02-eaa4-0051-2cd217a321ce}">
           <p14:sldIdLst>
             <p14:sldId id="266"/>
             <p14:sldId id="267"/>
             <p14:sldId id="268"/>
           </p14:sldIdLst>
         </p14:section>
-        <p14:section name="Extension" id="{c3983a36-b0dd-2129-0b2c-f72c3dbe0188}">
+        <p14:section name="Extension" id="{c9d29185-7cbd-a00b-4f5f-79be5eddd89a}">
           <p14:sldIdLst>
             <p14:sldId id="269"/>
             <p14:sldId id="270"/>
@@ -169,15 +171,17 @@
             <p14:sldId id="275"/>
             <p14:sldId id="276"/>
             <p14:sldId id="277"/>
+            <p14:sldId id="278"/>
+            <p14:sldId id="279"/>
           </p14:sldIdLst>
         </p14:section>
-        <p14:section name="Closing" id="{896e3a93-70ed-d6cf-2fc8-c84c70dc6392}">
+        <p14:section name="Closing" id="{9e14231a-0257-0bfd-f3fb-2637566714c7}">
           <p14:sldIdLst>
-            <p14:sldId id="278"/>
-            <p14:sldId id="279"/>
             <p14:sldId id="280"/>
             <p14:sldId id="281"/>
             <p14:sldId id="282"/>
+            <p14:sldId id="283"/>
+            <p14:sldId id="284"/>
           </p14:sldIdLst>
         </p14:section>
       </p14:sectionLst>
@@ -3003,6 +3007,182 @@
             <a:fld id="{F7021451-1387-4CA6-816F-3879F97B5CBC}" type="slidenum">
               <a:rPr lang="en-US"/>
               <a:t>27</a:t>
+            </a:fld>
+            <a:endParaRPr lang="en-US"/>
+          </a:p>
+        </p:txBody>
+      </p:sp>
+    </p:spTree>
+    <p:extLst>
+      <p:ext uri="{BB962C8B-B14F-4D97-AF65-F5344CB8AC3E}">
+        <p14:creationId xmlns:p14="http://schemas.microsoft.com/office/powerpoint/2010/main" val="1024086991"/>
+      </p:ext>
+    </p:extLst>
+  </p:cSld>
+  <p:clrMapOvr>
+    <a:masterClrMapping/>
+  </p:clrMapOvr>
+</p:notes>
+</file>
+
+<file path=ppt/notesSlides/notesSlide28.xml><?xml version="1.0" encoding="utf-8"?>
+<p:notes xmlns:a="http://schemas.openxmlformats.org/drawingml/2006/main" xmlns:r="http://schemas.openxmlformats.org/officeDocument/2006/relationships" xmlns:p="http://schemas.openxmlformats.org/presentationml/2006/main">
+  <p:cSld>
+    <p:spTree>
+      <p:nvGrpSpPr>
+        <p:cNvPr id="1" name=""/>
+        <p:cNvGrpSpPr/>
+        <p:nvPr/>
+      </p:nvGrpSpPr>
+      <p:grpSpPr>
+        <a:xfrm>
+          <a:off x="0" y="0"/>
+          <a:ext cx="0" cy="0"/>
+          <a:chOff x="0" y="0"/>
+          <a:chExt cx="0" cy="0"/>
+        </a:xfrm>
+      </p:grpSpPr>
+      <p:sp>
+        <p:nvSpPr>
+          <p:cNvPr id="2" name="Slide Image Placeholder 1"/>
+          <p:cNvSpPr>
+            <a:spLocks noGrp="1" noRot="1" noChangeAspect="1"/>
+          </p:cNvSpPr>
+          <p:nvPr>
+            <p:ph type="sldImg"/>
+          </p:nvPr>
+        </p:nvSpPr>
+        <p:spPr/>
+      </p:sp>
+      <p:sp>
+        <p:nvSpPr>
+          <p:cNvPr id="3" name="Notes Placeholder 2"/>
+          <p:cNvSpPr>
+            <a:spLocks noGrp="1"/>
+          </p:cNvSpPr>
+          <p:nvPr>
+            <p:ph type="body" idx="1"/>
+          </p:nvPr>
+        </p:nvSpPr>
+        <p:spPr/>
+        <p:txBody>
+          <a:bodyPr/>
+          <a:lstStyle/>
+          <a:p>
+            <a:r>
+              <a:rPr lang="en-US" dirty="0"/>
+              <a:t/>
+            </a:r>
+            <a:endParaRPr lang="en-US" dirty="0"/>
+          </a:p>
+        </p:txBody>
+      </p:sp>
+      <p:sp>
+        <p:nvSpPr>
+          <p:cNvPr id="4" name="Slide Number Placeholder 3"/>
+          <p:cNvSpPr>
+            <a:spLocks noGrp="1"/>
+          </p:cNvSpPr>
+          <p:nvPr>
+            <p:ph type="sldNum" sz="quarter" idx="10"/>
+          </p:nvPr>
+        </p:nvSpPr>
+        <p:spPr/>
+        <p:txBody>
+          <a:bodyPr/>
+          <a:lstStyle/>
+          <a:p>
+            <a:fld id="{F7021451-1387-4CA6-816F-3879F97B5CBC}" type="slidenum">
+              <a:rPr lang="en-US"/>
+              <a:t>28</a:t>
+            </a:fld>
+            <a:endParaRPr lang="en-US"/>
+          </a:p>
+        </p:txBody>
+      </p:sp>
+    </p:spTree>
+    <p:extLst>
+      <p:ext uri="{BB962C8B-B14F-4D97-AF65-F5344CB8AC3E}">
+        <p14:creationId xmlns:p14="http://schemas.microsoft.com/office/powerpoint/2010/main" val="1024086991"/>
+      </p:ext>
+    </p:extLst>
+  </p:cSld>
+  <p:clrMapOvr>
+    <a:masterClrMapping/>
+  </p:clrMapOvr>
+</p:notes>
+</file>
+
+<file path=ppt/notesSlides/notesSlide29.xml><?xml version="1.0" encoding="utf-8"?>
+<p:notes xmlns:a="http://schemas.openxmlformats.org/drawingml/2006/main" xmlns:r="http://schemas.openxmlformats.org/officeDocument/2006/relationships" xmlns:p="http://schemas.openxmlformats.org/presentationml/2006/main">
+  <p:cSld>
+    <p:spTree>
+      <p:nvGrpSpPr>
+        <p:cNvPr id="1" name=""/>
+        <p:cNvGrpSpPr/>
+        <p:nvPr/>
+      </p:nvGrpSpPr>
+      <p:grpSpPr>
+        <a:xfrm>
+          <a:off x="0" y="0"/>
+          <a:ext cx="0" cy="0"/>
+          <a:chOff x="0" y="0"/>
+          <a:chExt cx="0" cy="0"/>
+        </a:xfrm>
+      </p:grpSpPr>
+      <p:sp>
+        <p:nvSpPr>
+          <p:cNvPr id="2" name="Slide Image Placeholder 1"/>
+          <p:cNvSpPr>
+            <a:spLocks noGrp="1" noRot="1" noChangeAspect="1"/>
+          </p:cNvSpPr>
+          <p:nvPr>
+            <p:ph type="sldImg"/>
+          </p:nvPr>
+        </p:nvSpPr>
+        <p:spPr/>
+      </p:sp>
+      <p:sp>
+        <p:nvSpPr>
+          <p:cNvPr id="3" name="Notes Placeholder 2"/>
+          <p:cNvSpPr>
+            <a:spLocks noGrp="1"/>
+          </p:cNvSpPr>
+          <p:nvPr>
+            <p:ph type="body" idx="1"/>
+          </p:nvPr>
+        </p:nvSpPr>
+        <p:spPr/>
+        <p:txBody>
+          <a:bodyPr/>
+          <a:lstStyle/>
+          <a:p>
+            <a:r>
+              <a:rPr lang="en-US" dirty="0"/>
+              <a:t/>
+            </a:r>
+            <a:endParaRPr lang="en-US" dirty="0"/>
+          </a:p>
+        </p:txBody>
+      </p:sp>
+      <p:sp>
+        <p:nvSpPr>
+          <p:cNvPr id="4" name="Slide Number Placeholder 3"/>
+          <p:cNvSpPr>
+            <a:spLocks noGrp="1"/>
+          </p:cNvSpPr>
+          <p:nvPr>
+            <p:ph type="sldNum" sz="quarter" idx="10"/>
+          </p:nvPr>
+        </p:nvSpPr>
+        <p:spPr/>
+        <p:txBody>
+          <a:bodyPr/>
+          <a:lstStyle/>
+          <a:p>
+            <a:fld id="{F7021451-1387-4CA6-816F-3879F97B5CBC}" type="slidenum">
+              <a:rPr lang="en-US"/>
+              <a:t>29</a:t>
             </a:fld>
             <a:endParaRPr lang="en-US"/>
           </a:p>
@@ -14399,8 +14579,8 @@
         </p:nvSpPr>
         <p:spPr>
           <a:xfrm>
-            <a:off x="822960" y="411480"/>
-            <a:ext cx="2834640" cy="594360"/>
+            <a:off x="822960" y="457200"/>
+            <a:ext cx="2743200" cy="594360"/>
           </a:xfrm>
           <a:prstGeom prst="rect">
             <a:avLst/>
@@ -14424,7 +14604,7 @@
                 <a:ea typeface="Arial" pitchFamily="34" charset="-122"/>
                 <a:cs typeface="Arial" pitchFamily="34" charset="-120"/>
               </a:rPr>
-              <a:t>THE LIVE </a:t>
+              <a:t>NETWORK </a:t>
             </a:r>
             <a:endParaRPr lang="en-US" sz="3000" dirty="0"/>
           </a:p>
@@ -14438,8 +14618,8 @@
         </p:nvSpPr>
         <p:spPr>
           <a:xfrm>
-            <a:off x="3337560" y="484632"/>
-            <a:ext cx="3204972" cy="457200"/>
+            <a:off x="3429000" y="530352"/>
+            <a:ext cx="2889504" cy="457200"/>
           </a:xfrm>
           <a:prstGeom prst="rect">
             <a:avLst/>
@@ -14458,8 +14638,8 @@
         </p:nvSpPr>
         <p:spPr>
           <a:xfrm>
-            <a:off x="3383280" y="411480"/>
-            <a:ext cx="3204972" cy="594360"/>
+            <a:off x="3474720" y="457200"/>
+            <a:ext cx="2889504" cy="594360"/>
           </a:xfrm>
           <a:prstGeom prst="rect">
             <a:avLst/>
@@ -14483,7 +14663,7 @@
                 <a:ea typeface="Arial" pitchFamily="34" charset="-122"/>
                 <a:cs typeface="Arial" pitchFamily="34" charset="-120"/>
               </a:rPr>
-              <a:t>DASHBOARD</a:t>
+              <a:t>MEASURES</a:t>
             </a:r>
             <a:endParaRPr lang="en-US" sz="3000" dirty="0"/>
           </a:p>
@@ -14497,7 +14677,7 @@
         </p:nvSpPr>
         <p:spPr>
           <a:xfrm>
-            <a:off x="822960" y="1024128"/>
+            <a:off x="822960" y="1078992"/>
             <a:ext cx="10515600" cy="292608"/>
           </a:xfrm>
           <a:prstGeom prst="rect">
@@ -14514,7 +14694,7 @@
               <a:buNone/>
             </a:pPr>
             <a:r>
-              <a:rPr lang="en-US" sz="1150" i="1" dirty="0">
+              <a:rPr lang="en-US" sz="1200" i="1" dirty="0">
                 <a:solidFill>
                   <a:srgbClr val="6B6B6B"/>
                 </a:solidFill>
@@ -14522,46 +14702,2708 @@
                 <a:ea typeface="Calibri" pitchFamily="34" charset="-122"/>
                 <a:cs typeface="Calibri" pitchFamily="34" charset="-120"/>
               </a:rPr>
-              <a:t>Streamlit, running on the real data — five linked views (localhost:8501).</a:t>
-            </a:r>
-            <a:endParaRPr lang="en-US" sz="1150" dirty="0"/>
-          </a:p>
-        </p:txBody>
-      </p:sp>
-      <p:pic>
-        <p:nvPicPr>
-          <p:cNvPr id="6" name="Image 0" descr="D:/Chrona/real_analysis_outputs/dashboard/tab1_metrics.png">    </p:cNvPr>
-          <p:cNvPicPr>
-            <a:picLocks noChangeAspect="1"/>
-          </p:cNvPicPr>
-          <p:nvPr/>
-        </p:nvPicPr>
-        <p:blipFill>
-          <a:blip r:embed="rId1"/>
-          <a:stretch>
-            <a:fillRect/>
-          </a:stretch>
-        </p:blipFill>
-        <p:spPr>
-          <a:xfrm>
-            <a:off x="822960" y="1371600"/>
-            <a:ext cx="3310128" cy="2068830"/>
-          </a:xfrm>
-          <a:prstGeom prst="rect">
-            <a:avLst/>
-          </a:prstGeom>
-        </p:spPr>
-      </p:pic>
-      <p:sp>
-        <p:nvSpPr>
-          <p:cNvPr id="7" name="Text 4"/>
-          <p:cNvSpPr txBox="1"/>
-          <p:nvPr/>
-        </p:nvSpPr>
-        <p:spPr>
-          <a:xfrm>
-            <a:off x="822960" y="3477006"/>
-            <a:ext cx="3310128" cy="274320"/>
+              <a:t>Classical SNA measures, computed with NetworkX on the real message graph.</a:t>
+            </a:r>
+            <a:endParaRPr lang="en-US" sz="1200" dirty="0"/>
+          </a:p>
+        </p:txBody>
+      </p:sp>
+      <p:graphicFrame>
+        <p:nvGraphicFramePr>
+          <p:cNvPr id="22" name="Table 0"/>
+          <p:cNvGraphicFramePr>
+            <a:graphicFrameLocks noGrp="1"/>
+          </p:cNvGraphicFramePr>
+          <p:nvPr>
+            <p:extLst>
+              <p:ext uri="{D42A27DB-BD31-4B8C-83A1-F6EECF244321}">
+                <p14:modId xmlns:p14="http://schemas.microsoft.com/office/powerpoint/2010/main" val="1579011935"/>
+              </p:ext>
+            </p:extLst>
+          </p:nvPr>
+        </p:nvGraphicFramePr>
+        <p:xfrm>
+          <a:off x="822960" y="1463040"/>
+          <a:ext cx="10515600" cy="914400"/>
+        </p:xfrm>
+        <a:graphic>
+          <a:graphicData uri="http://schemas.openxmlformats.org/drawingml/2006/table">
+            <a:tbl>
+              <a:tblPr/>
+              <a:tblGrid>
+                <a:gridCol w="2286000"/>
+                <a:gridCol w="1097280"/>
+                <a:gridCol w="1737360"/>
+                <a:gridCol w="5394960"/>
+              </a:tblGrid>
+              <a:tr h="329184">
+                <a:tc>
+                  <a:txBody>
+                    <a:bodyPr/>
+                    <a:lstStyle/>
+                    <a:p>
+                      <a:pPr algn="ctr" indent="0" marL="0">
+                        <a:buNone/>
+                      </a:pPr>
+                      <a:r>
+                        <a:rPr lang="en-US" sz="1150" b="1" dirty="0">
+                          <a:solidFill>
+                            <a:srgbClr val="FFFFFF"/>
+                          </a:solidFill>
+                          <a:latin typeface="Calibri" pitchFamily="34" charset="0"/>
+                          <a:ea typeface="Calibri" pitchFamily="34" charset="-122"/>
+                          <a:cs typeface="Calibri" pitchFamily="34" charset="-120"/>
+                        </a:rPr>
+                        <a:t>Measure</a:t>
+                      </a:r>
+                      <a:endParaRPr lang="en-US" sz="1150" dirty="0">
+                        <a:latin typeface="Calibri" charset="0"/>
+                        <a:ea typeface="Calibri" charset="0"/>
+                        <a:cs typeface="Calibri" charset="0"/>
+                      </a:endParaRPr>
+                    </a:p>
+                  </a:txBody>
+                  <a:tcPr marL="91440" marR="91440" marT="45720" marB="45720" anchor="ctr">
+                    <a:lnL w="6350" cap="flat" cmpd="sng" algn="ctr">
+                      <a:solidFill>
+                        <a:srgbClr val="E1E1DA"/>
+                      </a:solidFill>
+                      <a:prstDash val="solid"/>
+                      <a:round/>
+                      <a:headEnd type="none" w="med" len="med"/>
+                      <a:tailEnd type="none" w="med" len="med"/>
+                    </a:lnL>
+                    <a:lnR w="6350" cap="flat" cmpd="sng" algn="ctr">
+                      <a:solidFill>
+                        <a:srgbClr val="E1E1DA"/>
+                      </a:solidFill>
+                      <a:prstDash val="solid"/>
+                      <a:round/>
+                      <a:headEnd type="none" w="med" len="med"/>
+                      <a:tailEnd type="none" w="med" len="med"/>
+                    </a:lnR>
+                    <a:lnT w="6350" cap="flat" cmpd="sng" algn="ctr">
+                      <a:solidFill>
+                        <a:srgbClr val="E1E1DA"/>
+                      </a:solidFill>
+                      <a:prstDash val="solid"/>
+                      <a:round/>
+                      <a:headEnd type="none" w="med" len="med"/>
+                      <a:tailEnd type="none" w="med" len="med"/>
+                    </a:lnT>
+                    <a:lnB w="6350" cap="flat" cmpd="sng" algn="ctr">
+                      <a:solidFill>
+                        <a:srgbClr val="E1E1DA"/>
+                      </a:solidFill>
+                      <a:prstDash val="solid"/>
+                      <a:round/>
+                      <a:headEnd type="none" w="med" len="med"/>
+                      <a:tailEnd type="none" w="med" len="med"/>
+                    </a:lnB>
+                    <a:solidFill>
+                      <a:srgbClr val="161616"/>
+                    </a:solidFill>
+                  </a:tcPr>
+                </a:tc>
+                <a:tc>
+                  <a:txBody>
+                    <a:bodyPr/>
+                    <a:lstStyle/>
+                    <a:p>
+                      <a:pPr algn="ctr" indent="0" marL="0">
+                        <a:buNone/>
+                      </a:pPr>
+                      <a:r>
+                        <a:rPr lang="en-US" sz="1150" b="1" dirty="0">
+                          <a:solidFill>
+                            <a:srgbClr val="FFFFFF"/>
+                          </a:solidFill>
+                          <a:latin typeface="Calibri" pitchFamily="34" charset="0"/>
+                          <a:ea typeface="Calibri" pitchFamily="34" charset="-122"/>
+                          <a:cs typeface="Calibri" pitchFamily="34" charset="-120"/>
+                        </a:rPr>
+                        <a:t>Block 5</a:t>
+                      </a:r>
+                      <a:endParaRPr lang="en-US" sz="1150" dirty="0">
+                        <a:latin typeface="Calibri" charset="0"/>
+                        <a:ea typeface="Calibri" charset="0"/>
+                        <a:cs typeface="Calibri" charset="0"/>
+                      </a:endParaRPr>
+                    </a:p>
+                  </a:txBody>
+                  <a:tcPr marL="91440" marR="91440" marT="45720" marB="45720" anchor="ctr">
+                    <a:lnL w="6350" cap="flat" cmpd="sng" algn="ctr">
+                      <a:solidFill>
+                        <a:srgbClr val="E1E1DA"/>
+                      </a:solidFill>
+                      <a:prstDash val="solid"/>
+                      <a:round/>
+                      <a:headEnd type="none" w="med" len="med"/>
+                      <a:tailEnd type="none" w="med" len="med"/>
+                    </a:lnL>
+                    <a:lnR w="6350" cap="flat" cmpd="sng" algn="ctr">
+                      <a:solidFill>
+                        <a:srgbClr val="E1E1DA"/>
+                      </a:solidFill>
+                      <a:prstDash val="solid"/>
+                      <a:round/>
+                      <a:headEnd type="none" w="med" len="med"/>
+                      <a:tailEnd type="none" w="med" len="med"/>
+                    </a:lnR>
+                    <a:lnT w="6350" cap="flat" cmpd="sng" algn="ctr">
+                      <a:solidFill>
+                        <a:srgbClr val="E1E1DA"/>
+                      </a:solidFill>
+                      <a:prstDash val="solid"/>
+                      <a:round/>
+                      <a:headEnd type="none" w="med" len="med"/>
+                      <a:tailEnd type="none" w="med" len="med"/>
+                    </a:lnT>
+                    <a:lnB w="6350" cap="flat" cmpd="sng" algn="ctr">
+                      <a:solidFill>
+                        <a:srgbClr val="E1E1DA"/>
+                      </a:solidFill>
+                      <a:prstDash val="solid"/>
+                      <a:round/>
+                      <a:headEnd type="none" w="med" len="med"/>
+                      <a:tailEnd type="none" w="med" len="med"/>
+                    </a:lnB>
+                    <a:solidFill>
+                      <a:srgbClr val="161616"/>
+                    </a:solidFill>
+                  </a:tcPr>
+                </a:tc>
+                <a:tc>
+                  <a:txBody>
+                    <a:bodyPr/>
+                    <a:lstStyle/>
+                    <a:p>
+                      <a:pPr algn="ctr" indent="0" marL="0">
+                        <a:buNone/>
+                      </a:pPr>
+                      <a:r>
+                        <a:rPr lang="en-US" sz="1150" b="1" dirty="0">
+                          <a:solidFill>
+                            <a:srgbClr val="FFFFFF"/>
+                          </a:solidFill>
+                          <a:latin typeface="Calibri" pitchFamily="34" charset="0"/>
+                          <a:ea typeface="Calibri" pitchFamily="34" charset="-122"/>
+                          <a:cs typeface="Calibri" pitchFamily="34" charset="-120"/>
+                        </a:rPr>
+                        <a:t>Mean · 22 blocks</a:t>
+                      </a:r>
+                      <a:endParaRPr lang="en-US" sz="1150" dirty="0">
+                        <a:latin typeface="Calibri" charset="0"/>
+                        <a:ea typeface="Calibri" charset="0"/>
+                        <a:cs typeface="Calibri" charset="0"/>
+                      </a:endParaRPr>
+                    </a:p>
+                  </a:txBody>
+                  <a:tcPr marL="91440" marR="91440" marT="45720" marB="45720" anchor="ctr">
+                    <a:lnL w="6350" cap="flat" cmpd="sng" algn="ctr">
+                      <a:solidFill>
+                        <a:srgbClr val="E1E1DA"/>
+                      </a:solidFill>
+                      <a:prstDash val="solid"/>
+                      <a:round/>
+                      <a:headEnd type="none" w="med" len="med"/>
+                      <a:tailEnd type="none" w="med" len="med"/>
+                    </a:lnL>
+                    <a:lnR w="6350" cap="flat" cmpd="sng" algn="ctr">
+                      <a:solidFill>
+                        <a:srgbClr val="E1E1DA"/>
+                      </a:solidFill>
+                      <a:prstDash val="solid"/>
+                      <a:round/>
+                      <a:headEnd type="none" w="med" len="med"/>
+                      <a:tailEnd type="none" w="med" len="med"/>
+                    </a:lnR>
+                    <a:lnT w="6350" cap="flat" cmpd="sng" algn="ctr">
+                      <a:solidFill>
+                        <a:srgbClr val="E1E1DA"/>
+                      </a:solidFill>
+                      <a:prstDash val="solid"/>
+                      <a:round/>
+                      <a:headEnd type="none" w="med" len="med"/>
+                      <a:tailEnd type="none" w="med" len="med"/>
+                    </a:lnT>
+                    <a:lnB w="6350" cap="flat" cmpd="sng" algn="ctr">
+                      <a:solidFill>
+                        <a:srgbClr val="E1E1DA"/>
+                      </a:solidFill>
+                      <a:prstDash val="solid"/>
+                      <a:round/>
+                      <a:headEnd type="none" w="med" len="med"/>
+                      <a:tailEnd type="none" w="med" len="med"/>
+                    </a:lnB>
+                    <a:solidFill>
+                      <a:srgbClr val="161616"/>
+                    </a:solidFill>
+                  </a:tcPr>
+                </a:tc>
+                <a:tc>
+                  <a:txBody>
+                    <a:bodyPr/>
+                    <a:lstStyle/>
+                    <a:p>
+                      <a:pPr algn="ctr" indent="0" marL="0">
+                        <a:buNone/>
+                      </a:pPr>
+                      <a:r>
+                        <a:rPr lang="en-US" sz="1150" b="1" dirty="0">
+                          <a:solidFill>
+                            <a:srgbClr val="FFFFFF"/>
+                          </a:solidFill>
+                          <a:latin typeface="Calibri" pitchFamily="34" charset="0"/>
+                          <a:ea typeface="Calibri" pitchFamily="34" charset="-122"/>
+                          <a:cs typeface="Calibri" pitchFamily="34" charset="-120"/>
+                        </a:rPr>
+                        <a:t>What it tells us</a:t>
+                      </a:r>
+                      <a:endParaRPr lang="en-US" sz="1150" dirty="0">
+                        <a:latin typeface="Calibri" charset="0"/>
+                        <a:ea typeface="Calibri" charset="0"/>
+                        <a:cs typeface="Calibri" charset="0"/>
+                      </a:endParaRPr>
+                    </a:p>
+                  </a:txBody>
+                  <a:tcPr marL="91440" marR="91440" marT="45720" marB="45720" anchor="ctr">
+                    <a:lnL w="6350" cap="flat" cmpd="sng" algn="ctr">
+                      <a:solidFill>
+                        <a:srgbClr val="E1E1DA"/>
+                      </a:solidFill>
+                      <a:prstDash val="solid"/>
+                      <a:round/>
+                      <a:headEnd type="none" w="med" len="med"/>
+                      <a:tailEnd type="none" w="med" len="med"/>
+                    </a:lnL>
+                    <a:lnR w="6350" cap="flat" cmpd="sng" algn="ctr">
+                      <a:solidFill>
+                        <a:srgbClr val="E1E1DA"/>
+                      </a:solidFill>
+                      <a:prstDash val="solid"/>
+                      <a:round/>
+                      <a:headEnd type="none" w="med" len="med"/>
+                      <a:tailEnd type="none" w="med" len="med"/>
+                    </a:lnR>
+                    <a:lnT w="6350" cap="flat" cmpd="sng" algn="ctr">
+                      <a:solidFill>
+                        <a:srgbClr val="E1E1DA"/>
+                      </a:solidFill>
+                      <a:prstDash val="solid"/>
+                      <a:round/>
+                      <a:headEnd type="none" w="med" len="med"/>
+                      <a:tailEnd type="none" w="med" len="med"/>
+                    </a:lnT>
+                    <a:lnB w="6350" cap="flat" cmpd="sng" algn="ctr">
+                      <a:solidFill>
+                        <a:srgbClr val="E1E1DA"/>
+                      </a:solidFill>
+                      <a:prstDash val="solid"/>
+                      <a:round/>
+                      <a:headEnd type="none" w="med" len="med"/>
+                      <a:tailEnd type="none" w="med" len="med"/>
+                    </a:lnB>
+                    <a:solidFill>
+                      <a:srgbClr val="161616"/>
+                    </a:solidFill>
+                  </a:tcPr>
+                </a:tc>
+              </a:tr>
+              <a:tr h="329184">
+                <a:tc>
+                  <a:txBody>
+                    <a:bodyPr/>
+                    <a:lstStyle/>
+                    <a:p>
+                      <a:pPr algn="l" indent="0" marL="0">
+                        <a:buNone/>
+                      </a:pPr>
+                      <a:r>
+                        <a:rPr lang="en-US" sz="1150" dirty="0">
+                          <a:solidFill>
+                            <a:srgbClr val="161616"/>
+                          </a:solidFill>
+                          <a:latin typeface="Calibri" pitchFamily="34" charset="0"/>
+                          <a:ea typeface="Calibri" pitchFamily="34" charset="-122"/>
+                          <a:cs typeface="Calibri" pitchFamily="34" charset="-120"/>
+                        </a:rPr>
+                        <a:t>Density</a:t>
+                      </a:r>
+                      <a:endParaRPr lang="en-US" sz="1150" dirty="0">
+                        <a:latin typeface="Calibri" charset="0"/>
+                        <a:ea typeface="Calibri" charset="0"/>
+                        <a:cs typeface="Calibri" charset="0"/>
+                      </a:endParaRPr>
+                    </a:p>
+                  </a:txBody>
+                  <a:tcPr marL="91440" marR="91440" marT="45720" marB="45720" anchor="ctr">
+                    <a:lnL w="6350" cap="flat" cmpd="sng" algn="ctr">
+                      <a:solidFill>
+                        <a:srgbClr val="E1E1DA"/>
+                      </a:solidFill>
+                      <a:prstDash val="solid"/>
+                      <a:round/>
+                      <a:headEnd type="none" w="med" len="med"/>
+                      <a:tailEnd type="none" w="med" len="med"/>
+                    </a:lnL>
+                    <a:lnR w="6350" cap="flat" cmpd="sng" algn="ctr">
+                      <a:solidFill>
+                        <a:srgbClr val="E1E1DA"/>
+                      </a:solidFill>
+                      <a:prstDash val="solid"/>
+                      <a:round/>
+                      <a:headEnd type="none" w="med" len="med"/>
+                      <a:tailEnd type="none" w="med" len="med"/>
+                    </a:lnR>
+                    <a:lnT w="6350" cap="flat" cmpd="sng" algn="ctr">
+                      <a:solidFill>
+                        <a:srgbClr val="E1E1DA"/>
+                      </a:solidFill>
+                      <a:prstDash val="solid"/>
+                      <a:round/>
+                      <a:headEnd type="none" w="med" len="med"/>
+                      <a:tailEnd type="none" w="med" len="med"/>
+                    </a:lnT>
+                    <a:lnB w="6350" cap="flat" cmpd="sng" algn="ctr">
+                      <a:solidFill>
+                        <a:srgbClr val="E1E1DA"/>
+                      </a:solidFill>
+                      <a:prstDash val="solid"/>
+                      <a:round/>
+                      <a:headEnd type="none" w="med" len="med"/>
+                      <a:tailEnd type="none" w="med" len="med"/>
+                    </a:lnB>
+                  </a:tcPr>
+                </a:tc>
+                <a:tc>
+                  <a:txBody>
+                    <a:bodyPr/>
+                    <a:lstStyle/>
+                    <a:p>
+                      <a:pPr algn="l" indent="0" marL="0">
+                        <a:buNone/>
+                      </a:pPr>
+                      <a:r>
+                        <a:rPr lang="en-US" sz="1150" dirty="0">
+                          <a:solidFill>
+                            <a:srgbClr val="161616"/>
+                          </a:solidFill>
+                          <a:latin typeface="Calibri" pitchFamily="34" charset="0"/>
+                          <a:ea typeface="Calibri" pitchFamily="34" charset="-122"/>
+                          <a:cs typeface="Calibri" pitchFamily="34" charset="-120"/>
+                        </a:rPr>
+                        <a:t>0.095</a:t>
+                      </a:r>
+                      <a:endParaRPr lang="en-US" sz="1150" dirty="0">
+                        <a:latin typeface="Calibri" charset="0"/>
+                        <a:ea typeface="Calibri" charset="0"/>
+                        <a:cs typeface="Calibri" charset="0"/>
+                      </a:endParaRPr>
+                    </a:p>
+                  </a:txBody>
+                  <a:tcPr marL="91440" marR="91440" marT="45720" marB="45720" anchor="ctr">
+                    <a:lnL w="6350" cap="flat" cmpd="sng" algn="ctr">
+                      <a:solidFill>
+                        <a:srgbClr val="E1E1DA"/>
+                      </a:solidFill>
+                      <a:prstDash val="solid"/>
+                      <a:round/>
+                      <a:headEnd type="none" w="med" len="med"/>
+                      <a:tailEnd type="none" w="med" len="med"/>
+                    </a:lnL>
+                    <a:lnR w="6350" cap="flat" cmpd="sng" algn="ctr">
+                      <a:solidFill>
+                        <a:srgbClr val="E1E1DA"/>
+                      </a:solidFill>
+                      <a:prstDash val="solid"/>
+                      <a:round/>
+                      <a:headEnd type="none" w="med" len="med"/>
+                      <a:tailEnd type="none" w="med" len="med"/>
+                    </a:lnR>
+                    <a:lnT w="6350" cap="flat" cmpd="sng" algn="ctr">
+                      <a:solidFill>
+                        <a:srgbClr val="E1E1DA"/>
+                      </a:solidFill>
+                      <a:prstDash val="solid"/>
+                      <a:round/>
+                      <a:headEnd type="none" w="med" len="med"/>
+                      <a:tailEnd type="none" w="med" len="med"/>
+                    </a:lnT>
+                    <a:lnB w="6350" cap="flat" cmpd="sng" algn="ctr">
+                      <a:solidFill>
+                        <a:srgbClr val="E1E1DA"/>
+                      </a:solidFill>
+                      <a:prstDash val="solid"/>
+                      <a:round/>
+                      <a:headEnd type="none" w="med" len="med"/>
+                      <a:tailEnd type="none" w="med" len="med"/>
+                    </a:lnB>
+                  </a:tcPr>
+                </a:tc>
+                <a:tc>
+                  <a:txBody>
+                    <a:bodyPr/>
+                    <a:lstStyle/>
+                    <a:p>
+                      <a:pPr algn="l" indent="0" marL="0">
+                        <a:buNone/>
+                      </a:pPr>
+                      <a:r>
+                        <a:rPr lang="en-US" sz="1150" dirty="0">
+                          <a:solidFill>
+                            <a:srgbClr val="161616"/>
+                          </a:solidFill>
+                          <a:latin typeface="Calibri" pitchFamily="34" charset="0"/>
+                          <a:ea typeface="Calibri" pitchFamily="34" charset="-122"/>
+                          <a:cs typeface="Calibri" pitchFamily="34" charset="-120"/>
+                        </a:rPr>
+                        <a:t>0.072</a:t>
+                      </a:r>
+                      <a:endParaRPr lang="en-US" sz="1150" dirty="0">
+                        <a:latin typeface="Calibri" charset="0"/>
+                        <a:ea typeface="Calibri" charset="0"/>
+                        <a:cs typeface="Calibri" charset="0"/>
+                      </a:endParaRPr>
+                    </a:p>
+                  </a:txBody>
+                  <a:tcPr marL="91440" marR="91440" marT="45720" marB="45720" anchor="ctr">
+                    <a:lnL w="6350" cap="flat" cmpd="sng" algn="ctr">
+                      <a:solidFill>
+                        <a:srgbClr val="E1E1DA"/>
+                      </a:solidFill>
+                      <a:prstDash val="solid"/>
+                      <a:round/>
+                      <a:headEnd type="none" w="med" len="med"/>
+                      <a:tailEnd type="none" w="med" len="med"/>
+                    </a:lnL>
+                    <a:lnR w="6350" cap="flat" cmpd="sng" algn="ctr">
+                      <a:solidFill>
+                        <a:srgbClr val="E1E1DA"/>
+                      </a:solidFill>
+                      <a:prstDash val="solid"/>
+                      <a:round/>
+                      <a:headEnd type="none" w="med" len="med"/>
+                      <a:tailEnd type="none" w="med" len="med"/>
+                    </a:lnR>
+                    <a:lnT w="6350" cap="flat" cmpd="sng" algn="ctr">
+                      <a:solidFill>
+                        <a:srgbClr val="E1E1DA"/>
+                      </a:solidFill>
+                      <a:prstDash val="solid"/>
+                      <a:round/>
+                      <a:headEnd type="none" w="med" len="med"/>
+                      <a:tailEnd type="none" w="med" len="med"/>
+                    </a:lnT>
+                    <a:lnB w="6350" cap="flat" cmpd="sng" algn="ctr">
+                      <a:solidFill>
+                        <a:srgbClr val="E1E1DA"/>
+                      </a:solidFill>
+                      <a:prstDash val="solid"/>
+                      <a:round/>
+                      <a:headEnd type="none" w="med" len="med"/>
+                      <a:tailEnd type="none" w="med" len="med"/>
+                    </a:lnB>
+                  </a:tcPr>
+                </a:tc>
+                <a:tc>
+                  <a:txBody>
+                    <a:bodyPr/>
+                    <a:lstStyle/>
+                    <a:p>
+                      <a:pPr algn="l" indent="0" marL="0">
+                        <a:buNone/>
+                      </a:pPr>
+                      <a:r>
+                        <a:rPr lang="en-US" sz="1150" dirty="0">
+                          <a:solidFill>
+                            <a:srgbClr val="161616"/>
+                          </a:solidFill>
+                          <a:latin typeface="Calibri" pitchFamily="34" charset="0"/>
+                          <a:ea typeface="Calibri" pitchFamily="34" charset="-122"/>
+                          <a:cs typeface="Calibri" pitchFamily="34" charset="-120"/>
+                        </a:rPr>
+                        <a:t>Sparse — most tweet pairs unrelated</a:t>
+                      </a:r>
+                      <a:endParaRPr lang="en-US" sz="1150" dirty="0">
+                        <a:latin typeface="Calibri" charset="0"/>
+                        <a:ea typeface="Calibri" charset="0"/>
+                        <a:cs typeface="Calibri" charset="0"/>
+                      </a:endParaRPr>
+                    </a:p>
+                  </a:txBody>
+                  <a:tcPr marL="91440" marR="91440" marT="45720" marB="45720" anchor="ctr">
+                    <a:lnL w="6350" cap="flat" cmpd="sng" algn="ctr">
+                      <a:solidFill>
+                        <a:srgbClr val="E1E1DA"/>
+                      </a:solidFill>
+                      <a:prstDash val="solid"/>
+                      <a:round/>
+                      <a:headEnd type="none" w="med" len="med"/>
+                      <a:tailEnd type="none" w="med" len="med"/>
+                    </a:lnL>
+                    <a:lnR w="6350" cap="flat" cmpd="sng" algn="ctr">
+                      <a:solidFill>
+                        <a:srgbClr val="E1E1DA"/>
+                      </a:solidFill>
+                      <a:prstDash val="solid"/>
+                      <a:round/>
+                      <a:headEnd type="none" w="med" len="med"/>
+                      <a:tailEnd type="none" w="med" len="med"/>
+                    </a:lnR>
+                    <a:lnT w="6350" cap="flat" cmpd="sng" algn="ctr">
+                      <a:solidFill>
+                        <a:srgbClr val="E1E1DA"/>
+                      </a:solidFill>
+                      <a:prstDash val="solid"/>
+                      <a:round/>
+                      <a:headEnd type="none" w="med" len="med"/>
+                      <a:tailEnd type="none" w="med" len="med"/>
+                    </a:lnT>
+                    <a:lnB w="6350" cap="flat" cmpd="sng" algn="ctr">
+                      <a:solidFill>
+                        <a:srgbClr val="E1E1DA"/>
+                      </a:solidFill>
+                      <a:prstDash val="solid"/>
+                      <a:round/>
+                      <a:headEnd type="none" w="med" len="med"/>
+                      <a:tailEnd type="none" w="med" len="med"/>
+                    </a:lnB>
+                  </a:tcPr>
+                </a:tc>
+              </a:tr>
+              <a:tr h="329184">
+                <a:tc>
+                  <a:txBody>
+                    <a:bodyPr/>
+                    <a:lstStyle/>
+                    <a:p>
+                      <a:pPr algn="l" indent="0" marL="0">
+                        <a:buNone/>
+                      </a:pPr>
+                      <a:r>
+                        <a:rPr lang="en-US" sz="1150" dirty="0">
+                          <a:solidFill>
+                            <a:srgbClr val="161616"/>
+                          </a:solidFill>
+                          <a:latin typeface="Calibri" pitchFamily="34" charset="0"/>
+                          <a:ea typeface="Calibri" pitchFamily="34" charset="-122"/>
+                          <a:cs typeface="Calibri" pitchFamily="34" charset="-120"/>
+                        </a:rPr>
+                        <a:t>Avg degree</a:t>
+                      </a:r>
+                      <a:endParaRPr lang="en-US" sz="1150" dirty="0">
+                        <a:latin typeface="Calibri" charset="0"/>
+                        <a:ea typeface="Calibri" charset="0"/>
+                        <a:cs typeface="Calibri" charset="0"/>
+                      </a:endParaRPr>
+                    </a:p>
+                  </a:txBody>
+                  <a:tcPr marL="91440" marR="91440" marT="45720" marB="45720" anchor="ctr">
+                    <a:lnL w="6350" cap="flat" cmpd="sng" algn="ctr">
+                      <a:solidFill>
+                        <a:srgbClr val="E1E1DA"/>
+                      </a:solidFill>
+                      <a:prstDash val="solid"/>
+                      <a:round/>
+                      <a:headEnd type="none" w="med" len="med"/>
+                      <a:tailEnd type="none" w="med" len="med"/>
+                    </a:lnL>
+                    <a:lnR w="6350" cap="flat" cmpd="sng" algn="ctr">
+                      <a:solidFill>
+                        <a:srgbClr val="E1E1DA"/>
+                      </a:solidFill>
+                      <a:prstDash val="solid"/>
+                      <a:round/>
+                      <a:headEnd type="none" w="med" len="med"/>
+                      <a:tailEnd type="none" w="med" len="med"/>
+                    </a:lnR>
+                    <a:lnT w="6350" cap="flat" cmpd="sng" algn="ctr">
+                      <a:solidFill>
+                        <a:srgbClr val="E1E1DA"/>
+                      </a:solidFill>
+                      <a:prstDash val="solid"/>
+                      <a:round/>
+                      <a:headEnd type="none" w="med" len="med"/>
+                      <a:tailEnd type="none" w="med" len="med"/>
+                    </a:lnT>
+                    <a:lnB w="6350" cap="flat" cmpd="sng" algn="ctr">
+                      <a:solidFill>
+                        <a:srgbClr val="E1E1DA"/>
+                      </a:solidFill>
+                      <a:prstDash val="solid"/>
+                      <a:round/>
+                      <a:headEnd type="none" w="med" len="med"/>
+                      <a:tailEnd type="none" w="med" len="med"/>
+                    </a:lnB>
+                  </a:tcPr>
+                </a:tc>
+                <a:tc>
+                  <a:txBody>
+                    <a:bodyPr/>
+                    <a:lstStyle/>
+                    <a:p>
+                      <a:pPr algn="l" indent="0" marL="0">
+                        <a:buNone/>
+                      </a:pPr>
+                      <a:r>
+                        <a:rPr lang="en-US" sz="1150" dirty="0">
+                          <a:solidFill>
+                            <a:srgbClr val="161616"/>
+                          </a:solidFill>
+                          <a:latin typeface="Calibri" pitchFamily="34" charset="0"/>
+                          <a:ea typeface="Calibri" pitchFamily="34" charset="-122"/>
+                          <a:cs typeface="Calibri" pitchFamily="34" charset="-120"/>
+                        </a:rPr>
+                        <a:t>9.4</a:t>
+                      </a:r>
+                      <a:endParaRPr lang="en-US" sz="1150" dirty="0">
+                        <a:latin typeface="Calibri" charset="0"/>
+                        <a:ea typeface="Calibri" charset="0"/>
+                        <a:cs typeface="Calibri" charset="0"/>
+                      </a:endParaRPr>
+                    </a:p>
+                  </a:txBody>
+                  <a:tcPr marL="91440" marR="91440" marT="45720" marB="45720" anchor="ctr">
+                    <a:lnL w="6350" cap="flat" cmpd="sng" algn="ctr">
+                      <a:solidFill>
+                        <a:srgbClr val="E1E1DA"/>
+                      </a:solidFill>
+                      <a:prstDash val="solid"/>
+                      <a:round/>
+                      <a:headEnd type="none" w="med" len="med"/>
+                      <a:tailEnd type="none" w="med" len="med"/>
+                    </a:lnL>
+                    <a:lnR w="6350" cap="flat" cmpd="sng" algn="ctr">
+                      <a:solidFill>
+                        <a:srgbClr val="E1E1DA"/>
+                      </a:solidFill>
+                      <a:prstDash val="solid"/>
+                      <a:round/>
+                      <a:headEnd type="none" w="med" len="med"/>
+                      <a:tailEnd type="none" w="med" len="med"/>
+                    </a:lnR>
+                    <a:lnT w="6350" cap="flat" cmpd="sng" algn="ctr">
+                      <a:solidFill>
+                        <a:srgbClr val="E1E1DA"/>
+                      </a:solidFill>
+                      <a:prstDash val="solid"/>
+                      <a:round/>
+                      <a:headEnd type="none" w="med" len="med"/>
+                      <a:tailEnd type="none" w="med" len="med"/>
+                    </a:lnT>
+                    <a:lnB w="6350" cap="flat" cmpd="sng" algn="ctr">
+                      <a:solidFill>
+                        <a:srgbClr val="E1E1DA"/>
+                      </a:solidFill>
+                      <a:prstDash val="solid"/>
+                      <a:round/>
+                      <a:headEnd type="none" w="med" len="med"/>
+                      <a:tailEnd type="none" w="med" len="med"/>
+                    </a:lnB>
+                  </a:tcPr>
+                </a:tc>
+                <a:tc>
+                  <a:txBody>
+                    <a:bodyPr/>
+                    <a:lstStyle/>
+                    <a:p>
+                      <a:pPr algn="l" indent="0" marL="0">
+                        <a:buNone/>
+                      </a:pPr>
+                      <a:r>
+                        <a:rPr lang="en-US" sz="1150" dirty="0">
+                          <a:solidFill>
+                            <a:srgbClr val="161616"/>
+                          </a:solidFill>
+                          <a:latin typeface="Calibri" pitchFamily="34" charset="0"/>
+                          <a:ea typeface="Calibri" pitchFamily="34" charset="-122"/>
+                          <a:cs typeface="Calibri" pitchFamily="34" charset="-120"/>
+                        </a:rPr>
+                        <a:t>8.0</a:t>
+                      </a:r>
+                      <a:endParaRPr lang="en-US" sz="1150" dirty="0">
+                        <a:latin typeface="Calibri" charset="0"/>
+                        <a:ea typeface="Calibri" charset="0"/>
+                        <a:cs typeface="Calibri" charset="0"/>
+                      </a:endParaRPr>
+                    </a:p>
+                  </a:txBody>
+                  <a:tcPr marL="91440" marR="91440" marT="45720" marB="45720" anchor="ctr">
+                    <a:lnL w="6350" cap="flat" cmpd="sng" algn="ctr">
+                      <a:solidFill>
+                        <a:srgbClr val="E1E1DA"/>
+                      </a:solidFill>
+                      <a:prstDash val="solid"/>
+                      <a:round/>
+                      <a:headEnd type="none" w="med" len="med"/>
+                      <a:tailEnd type="none" w="med" len="med"/>
+                    </a:lnL>
+                    <a:lnR w="6350" cap="flat" cmpd="sng" algn="ctr">
+                      <a:solidFill>
+                        <a:srgbClr val="E1E1DA"/>
+                      </a:solidFill>
+                      <a:prstDash val="solid"/>
+                      <a:round/>
+                      <a:headEnd type="none" w="med" len="med"/>
+                      <a:tailEnd type="none" w="med" len="med"/>
+                    </a:lnR>
+                    <a:lnT w="6350" cap="flat" cmpd="sng" algn="ctr">
+                      <a:solidFill>
+                        <a:srgbClr val="E1E1DA"/>
+                      </a:solidFill>
+                      <a:prstDash val="solid"/>
+                      <a:round/>
+                      <a:headEnd type="none" w="med" len="med"/>
+                      <a:tailEnd type="none" w="med" len="med"/>
+                    </a:lnT>
+                    <a:lnB w="6350" cap="flat" cmpd="sng" algn="ctr">
+                      <a:solidFill>
+                        <a:srgbClr val="E1E1DA"/>
+                      </a:solidFill>
+                      <a:prstDash val="solid"/>
+                      <a:round/>
+                      <a:headEnd type="none" w="med" len="med"/>
+                      <a:tailEnd type="none" w="med" len="med"/>
+                    </a:lnB>
+                  </a:tcPr>
+                </a:tc>
+                <a:tc>
+                  <a:txBody>
+                    <a:bodyPr/>
+                    <a:lstStyle/>
+                    <a:p>
+                      <a:pPr algn="l" indent="0" marL="0">
+                        <a:buNone/>
+                      </a:pPr>
+                      <a:r>
+                        <a:rPr lang="en-US" sz="1150" dirty="0">
+                          <a:solidFill>
+                            <a:srgbClr val="161616"/>
+                          </a:solidFill>
+                          <a:latin typeface="Calibri" pitchFamily="34" charset="0"/>
+                          <a:ea typeface="Calibri" pitchFamily="34" charset="-122"/>
+                          <a:cs typeface="Calibri" pitchFamily="34" charset="-120"/>
+                        </a:rPr>
+                        <a:t>A tweet links to ~8 others</a:t>
+                      </a:r>
+                      <a:endParaRPr lang="en-US" sz="1150" dirty="0">
+                        <a:latin typeface="Calibri" charset="0"/>
+                        <a:ea typeface="Calibri" charset="0"/>
+                        <a:cs typeface="Calibri" charset="0"/>
+                      </a:endParaRPr>
+                    </a:p>
+                  </a:txBody>
+                  <a:tcPr marL="91440" marR="91440" marT="45720" marB="45720" anchor="ctr">
+                    <a:lnL w="6350" cap="flat" cmpd="sng" algn="ctr">
+                      <a:solidFill>
+                        <a:srgbClr val="E1E1DA"/>
+                      </a:solidFill>
+                      <a:prstDash val="solid"/>
+                      <a:round/>
+                      <a:headEnd type="none" w="med" len="med"/>
+                      <a:tailEnd type="none" w="med" len="med"/>
+                    </a:lnL>
+                    <a:lnR w="6350" cap="flat" cmpd="sng" algn="ctr">
+                      <a:solidFill>
+                        <a:srgbClr val="E1E1DA"/>
+                      </a:solidFill>
+                      <a:prstDash val="solid"/>
+                      <a:round/>
+                      <a:headEnd type="none" w="med" len="med"/>
+                      <a:tailEnd type="none" w="med" len="med"/>
+                    </a:lnR>
+                    <a:lnT w="6350" cap="flat" cmpd="sng" algn="ctr">
+                      <a:solidFill>
+                        <a:srgbClr val="E1E1DA"/>
+                      </a:solidFill>
+                      <a:prstDash val="solid"/>
+                      <a:round/>
+                      <a:headEnd type="none" w="med" len="med"/>
+                      <a:tailEnd type="none" w="med" len="med"/>
+                    </a:lnT>
+                    <a:lnB w="6350" cap="flat" cmpd="sng" algn="ctr">
+                      <a:solidFill>
+                        <a:srgbClr val="E1E1DA"/>
+                      </a:solidFill>
+                      <a:prstDash val="solid"/>
+                      <a:round/>
+                      <a:headEnd type="none" w="med" len="med"/>
+                      <a:tailEnd type="none" w="med" len="med"/>
+                    </a:lnB>
+                  </a:tcPr>
+                </a:tc>
+              </a:tr>
+              <a:tr h="329184">
+                <a:tc>
+                  <a:txBody>
+                    <a:bodyPr/>
+                    <a:lstStyle/>
+                    <a:p>
+                      <a:pPr algn="l" indent="0" marL="0">
+                        <a:buNone/>
+                      </a:pPr>
+                      <a:r>
+                        <a:rPr lang="en-US" sz="1150" dirty="0">
+                          <a:solidFill>
+                            <a:srgbClr val="161616"/>
+                          </a:solidFill>
+                          <a:latin typeface="Calibri" pitchFamily="34" charset="0"/>
+                          <a:ea typeface="Calibri" pitchFamily="34" charset="-122"/>
+                          <a:cs typeface="Calibri" pitchFamily="34" charset="-120"/>
+                        </a:rPr>
+                        <a:t>Avg clustering coeff.</a:t>
+                      </a:r>
+                      <a:endParaRPr lang="en-US" sz="1150" dirty="0">
+                        <a:latin typeface="Calibri" charset="0"/>
+                        <a:ea typeface="Calibri" charset="0"/>
+                        <a:cs typeface="Calibri" charset="0"/>
+                      </a:endParaRPr>
+                    </a:p>
+                  </a:txBody>
+                  <a:tcPr marL="91440" marR="91440" marT="45720" marB="45720" anchor="ctr">
+                    <a:lnL w="6350" cap="flat" cmpd="sng" algn="ctr">
+                      <a:solidFill>
+                        <a:srgbClr val="E1E1DA"/>
+                      </a:solidFill>
+                      <a:prstDash val="solid"/>
+                      <a:round/>
+                      <a:headEnd type="none" w="med" len="med"/>
+                      <a:tailEnd type="none" w="med" len="med"/>
+                    </a:lnL>
+                    <a:lnR w="6350" cap="flat" cmpd="sng" algn="ctr">
+                      <a:solidFill>
+                        <a:srgbClr val="E1E1DA"/>
+                      </a:solidFill>
+                      <a:prstDash val="solid"/>
+                      <a:round/>
+                      <a:headEnd type="none" w="med" len="med"/>
+                      <a:tailEnd type="none" w="med" len="med"/>
+                    </a:lnR>
+                    <a:lnT w="6350" cap="flat" cmpd="sng" algn="ctr">
+                      <a:solidFill>
+                        <a:srgbClr val="E1E1DA"/>
+                      </a:solidFill>
+                      <a:prstDash val="solid"/>
+                      <a:round/>
+                      <a:headEnd type="none" w="med" len="med"/>
+                      <a:tailEnd type="none" w="med" len="med"/>
+                    </a:lnT>
+                    <a:lnB w="6350" cap="flat" cmpd="sng" algn="ctr">
+                      <a:solidFill>
+                        <a:srgbClr val="E1E1DA"/>
+                      </a:solidFill>
+                      <a:prstDash val="solid"/>
+                      <a:round/>
+                      <a:headEnd type="none" w="med" len="med"/>
+                      <a:tailEnd type="none" w="med" len="med"/>
+                    </a:lnB>
+                  </a:tcPr>
+                </a:tc>
+                <a:tc>
+                  <a:txBody>
+                    <a:bodyPr/>
+                    <a:lstStyle/>
+                    <a:p>
+                      <a:pPr algn="l" indent="0" marL="0">
+                        <a:buNone/>
+                      </a:pPr>
+                      <a:r>
+                        <a:rPr lang="en-US" sz="1150" dirty="0">
+                          <a:solidFill>
+                            <a:srgbClr val="161616"/>
+                          </a:solidFill>
+                          <a:latin typeface="Calibri" pitchFamily="34" charset="0"/>
+                          <a:ea typeface="Calibri" pitchFamily="34" charset="-122"/>
+                          <a:cs typeface="Calibri" pitchFamily="34" charset="-120"/>
+                        </a:rPr>
+                        <a:t>0.75</a:t>
+                      </a:r>
+                      <a:endParaRPr lang="en-US" sz="1150" dirty="0">
+                        <a:latin typeface="Calibri" charset="0"/>
+                        <a:ea typeface="Calibri" charset="0"/>
+                        <a:cs typeface="Calibri" charset="0"/>
+                      </a:endParaRPr>
+                    </a:p>
+                  </a:txBody>
+                  <a:tcPr marL="91440" marR="91440" marT="45720" marB="45720" anchor="ctr">
+                    <a:lnL w="6350" cap="flat" cmpd="sng" algn="ctr">
+                      <a:solidFill>
+                        <a:srgbClr val="E1E1DA"/>
+                      </a:solidFill>
+                      <a:prstDash val="solid"/>
+                      <a:round/>
+                      <a:headEnd type="none" w="med" len="med"/>
+                      <a:tailEnd type="none" w="med" len="med"/>
+                    </a:lnL>
+                    <a:lnR w="6350" cap="flat" cmpd="sng" algn="ctr">
+                      <a:solidFill>
+                        <a:srgbClr val="E1E1DA"/>
+                      </a:solidFill>
+                      <a:prstDash val="solid"/>
+                      <a:round/>
+                      <a:headEnd type="none" w="med" len="med"/>
+                      <a:tailEnd type="none" w="med" len="med"/>
+                    </a:lnR>
+                    <a:lnT w="6350" cap="flat" cmpd="sng" algn="ctr">
+                      <a:solidFill>
+                        <a:srgbClr val="E1E1DA"/>
+                      </a:solidFill>
+                      <a:prstDash val="solid"/>
+                      <a:round/>
+                      <a:headEnd type="none" w="med" len="med"/>
+                      <a:tailEnd type="none" w="med" len="med"/>
+                    </a:lnT>
+                    <a:lnB w="6350" cap="flat" cmpd="sng" algn="ctr">
+                      <a:solidFill>
+                        <a:srgbClr val="E1E1DA"/>
+                      </a:solidFill>
+                      <a:prstDash val="solid"/>
+                      <a:round/>
+                      <a:headEnd type="none" w="med" len="med"/>
+                      <a:tailEnd type="none" w="med" len="med"/>
+                    </a:lnB>
+                  </a:tcPr>
+                </a:tc>
+                <a:tc>
+                  <a:txBody>
+                    <a:bodyPr/>
+                    <a:lstStyle/>
+                    <a:p>
+                      <a:pPr algn="l" indent="0" marL="0">
+                        <a:buNone/>
+                      </a:pPr>
+                      <a:r>
+                        <a:rPr lang="en-US" sz="1150" dirty="0">
+                          <a:solidFill>
+                            <a:srgbClr val="161616"/>
+                          </a:solidFill>
+                          <a:latin typeface="Calibri" pitchFamily="34" charset="0"/>
+                          <a:ea typeface="Calibri" pitchFamily="34" charset="-122"/>
+                          <a:cs typeface="Calibri" pitchFamily="34" charset="-120"/>
+                        </a:rPr>
+                        <a:t>0.56</a:t>
+                      </a:r>
+                      <a:endParaRPr lang="en-US" sz="1150" dirty="0">
+                        <a:latin typeface="Calibri" charset="0"/>
+                        <a:ea typeface="Calibri" charset="0"/>
+                        <a:cs typeface="Calibri" charset="0"/>
+                      </a:endParaRPr>
+                    </a:p>
+                  </a:txBody>
+                  <a:tcPr marL="91440" marR="91440" marT="45720" marB="45720" anchor="ctr">
+                    <a:lnL w="6350" cap="flat" cmpd="sng" algn="ctr">
+                      <a:solidFill>
+                        <a:srgbClr val="E1E1DA"/>
+                      </a:solidFill>
+                      <a:prstDash val="solid"/>
+                      <a:round/>
+                      <a:headEnd type="none" w="med" len="med"/>
+                      <a:tailEnd type="none" w="med" len="med"/>
+                    </a:lnL>
+                    <a:lnR w="6350" cap="flat" cmpd="sng" algn="ctr">
+                      <a:solidFill>
+                        <a:srgbClr val="E1E1DA"/>
+                      </a:solidFill>
+                      <a:prstDash val="solid"/>
+                      <a:round/>
+                      <a:headEnd type="none" w="med" len="med"/>
+                      <a:tailEnd type="none" w="med" len="med"/>
+                    </a:lnR>
+                    <a:lnT w="6350" cap="flat" cmpd="sng" algn="ctr">
+                      <a:solidFill>
+                        <a:srgbClr val="E1E1DA"/>
+                      </a:solidFill>
+                      <a:prstDash val="solid"/>
+                      <a:round/>
+                      <a:headEnd type="none" w="med" len="med"/>
+                      <a:tailEnd type="none" w="med" len="med"/>
+                    </a:lnT>
+                    <a:lnB w="6350" cap="flat" cmpd="sng" algn="ctr">
+                      <a:solidFill>
+                        <a:srgbClr val="E1E1DA"/>
+                      </a:solidFill>
+                      <a:prstDash val="solid"/>
+                      <a:round/>
+                      <a:headEnd type="none" w="med" len="med"/>
+                      <a:tailEnd type="none" w="med" len="med"/>
+                    </a:lnB>
+                  </a:tcPr>
+                </a:tc>
+                <a:tc>
+                  <a:txBody>
+                    <a:bodyPr/>
+                    <a:lstStyle/>
+                    <a:p>
+                      <a:pPr algn="l" indent="0" marL="0">
+                        <a:buNone/>
+                      </a:pPr>
+                      <a:r>
+                        <a:rPr lang="en-US" sz="1150" dirty="0">
+                          <a:solidFill>
+                            <a:srgbClr val="161616"/>
+                          </a:solidFill>
+                          <a:latin typeface="Calibri" pitchFamily="34" charset="0"/>
+                          <a:ea typeface="Calibri" pitchFamily="34" charset="-122"/>
+                          <a:cs typeface="Calibri" pitchFamily="34" charset="-120"/>
+                        </a:rPr>
+                        <a:t>Neighbours of a tweet also connect (triangles)</a:t>
+                      </a:r>
+                      <a:endParaRPr lang="en-US" sz="1150" dirty="0">
+                        <a:latin typeface="Calibri" charset="0"/>
+                        <a:ea typeface="Calibri" charset="0"/>
+                        <a:cs typeface="Calibri" charset="0"/>
+                      </a:endParaRPr>
+                    </a:p>
+                  </a:txBody>
+                  <a:tcPr marL="91440" marR="91440" marT="45720" marB="45720" anchor="ctr">
+                    <a:lnL w="6350" cap="flat" cmpd="sng" algn="ctr">
+                      <a:solidFill>
+                        <a:srgbClr val="E1E1DA"/>
+                      </a:solidFill>
+                      <a:prstDash val="solid"/>
+                      <a:round/>
+                      <a:headEnd type="none" w="med" len="med"/>
+                      <a:tailEnd type="none" w="med" len="med"/>
+                    </a:lnL>
+                    <a:lnR w="6350" cap="flat" cmpd="sng" algn="ctr">
+                      <a:solidFill>
+                        <a:srgbClr val="E1E1DA"/>
+                      </a:solidFill>
+                      <a:prstDash val="solid"/>
+                      <a:round/>
+                      <a:headEnd type="none" w="med" len="med"/>
+                      <a:tailEnd type="none" w="med" len="med"/>
+                    </a:lnR>
+                    <a:lnT w="6350" cap="flat" cmpd="sng" algn="ctr">
+                      <a:solidFill>
+                        <a:srgbClr val="E1E1DA"/>
+                      </a:solidFill>
+                      <a:prstDash val="solid"/>
+                      <a:round/>
+                      <a:headEnd type="none" w="med" len="med"/>
+                      <a:tailEnd type="none" w="med" len="med"/>
+                    </a:lnT>
+                    <a:lnB w="6350" cap="flat" cmpd="sng" algn="ctr">
+                      <a:solidFill>
+                        <a:srgbClr val="E1E1DA"/>
+                      </a:solidFill>
+                      <a:prstDash val="solid"/>
+                      <a:round/>
+                      <a:headEnd type="none" w="med" len="med"/>
+                      <a:tailEnd type="none" w="med" len="med"/>
+                    </a:lnB>
+                  </a:tcPr>
+                </a:tc>
+              </a:tr>
+              <a:tr h="329184">
+                <a:tc>
+                  <a:txBody>
+                    <a:bodyPr/>
+                    <a:lstStyle/>
+                    <a:p>
+                      <a:pPr algn="l" indent="0" marL="0">
+                        <a:buNone/>
+                      </a:pPr>
+                      <a:r>
+                        <a:rPr lang="en-US" sz="1150" dirty="0">
+                          <a:solidFill>
+                            <a:srgbClr val="161616"/>
+                          </a:solidFill>
+                          <a:latin typeface="Calibri" pitchFamily="34" charset="0"/>
+                          <a:ea typeface="Calibri" pitchFamily="34" charset="-122"/>
+                          <a:cs typeface="Calibri" pitchFamily="34" charset="-120"/>
+                        </a:rPr>
+                        <a:t>Transitivity</a:t>
+                      </a:r>
+                      <a:endParaRPr lang="en-US" sz="1150" dirty="0">
+                        <a:latin typeface="Calibri" charset="0"/>
+                        <a:ea typeface="Calibri" charset="0"/>
+                        <a:cs typeface="Calibri" charset="0"/>
+                      </a:endParaRPr>
+                    </a:p>
+                  </a:txBody>
+                  <a:tcPr marL="91440" marR="91440" marT="45720" marB="45720" anchor="ctr">
+                    <a:lnL w="6350" cap="flat" cmpd="sng" algn="ctr">
+                      <a:solidFill>
+                        <a:srgbClr val="E1E1DA"/>
+                      </a:solidFill>
+                      <a:prstDash val="solid"/>
+                      <a:round/>
+                      <a:headEnd type="none" w="med" len="med"/>
+                      <a:tailEnd type="none" w="med" len="med"/>
+                    </a:lnL>
+                    <a:lnR w="6350" cap="flat" cmpd="sng" algn="ctr">
+                      <a:solidFill>
+                        <a:srgbClr val="E1E1DA"/>
+                      </a:solidFill>
+                      <a:prstDash val="solid"/>
+                      <a:round/>
+                      <a:headEnd type="none" w="med" len="med"/>
+                      <a:tailEnd type="none" w="med" len="med"/>
+                    </a:lnR>
+                    <a:lnT w="6350" cap="flat" cmpd="sng" algn="ctr">
+                      <a:solidFill>
+                        <a:srgbClr val="E1E1DA"/>
+                      </a:solidFill>
+                      <a:prstDash val="solid"/>
+                      <a:round/>
+                      <a:headEnd type="none" w="med" len="med"/>
+                      <a:tailEnd type="none" w="med" len="med"/>
+                    </a:lnT>
+                    <a:lnB w="6350" cap="flat" cmpd="sng" algn="ctr">
+                      <a:solidFill>
+                        <a:srgbClr val="E1E1DA"/>
+                      </a:solidFill>
+                      <a:prstDash val="solid"/>
+                      <a:round/>
+                      <a:headEnd type="none" w="med" len="med"/>
+                      <a:tailEnd type="none" w="med" len="med"/>
+                    </a:lnB>
+                  </a:tcPr>
+                </a:tc>
+                <a:tc>
+                  <a:txBody>
+                    <a:bodyPr/>
+                    <a:lstStyle/>
+                    <a:p>
+                      <a:pPr algn="l" indent="0" marL="0">
+                        <a:buNone/>
+                      </a:pPr>
+                      <a:r>
+                        <a:rPr lang="en-US" sz="1150" dirty="0">
+                          <a:solidFill>
+                            <a:srgbClr val="161616"/>
+                          </a:solidFill>
+                          <a:latin typeface="Calibri" pitchFamily="34" charset="0"/>
+                          <a:ea typeface="Calibri" pitchFamily="34" charset="-122"/>
+                          <a:cs typeface="Calibri" pitchFamily="34" charset="-120"/>
+                        </a:rPr>
+                        <a:t>0.83</a:t>
+                      </a:r>
+                      <a:endParaRPr lang="en-US" sz="1150" dirty="0">
+                        <a:latin typeface="Calibri" charset="0"/>
+                        <a:ea typeface="Calibri" charset="0"/>
+                        <a:cs typeface="Calibri" charset="0"/>
+                      </a:endParaRPr>
+                    </a:p>
+                  </a:txBody>
+                  <a:tcPr marL="91440" marR="91440" marT="45720" marB="45720" anchor="ctr">
+                    <a:lnL w="6350" cap="flat" cmpd="sng" algn="ctr">
+                      <a:solidFill>
+                        <a:srgbClr val="E1E1DA"/>
+                      </a:solidFill>
+                      <a:prstDash val="solid"/>
+                      <a:round/>
+                      <a:headEnd type="none" w="med" len="med"/>
+                      <a:tailEnd type="none" w="med" len="med"/>
+                    </a:lnL>
+                    <a:lnR w="6350" cap="flat" cmpd="sng" algn="ctr">
+                      <a:solidFill>
+                        <a:srgbClr val="E1E1DA"/>
+                      </a:solidFill>
+                      <a:prstDash val="solid"/>
+                      <a:round/>
+                      <a:headEnd type="none" w="med" len="med"/>
+                      <a:tailEnd type="none" w="med" len="med"/>
+                    </a:lnR>
+                    <a:lnT w="6350" cap="flat" cmpd="sng" algn="ctr">
+                      <a:solidFill>
+                        <a:srgbClr val="E1E1DA"/>
+                      </a:solidFill>
+                      <a:prstDash val="solid"/>
+                      <a:round/>
+                      <a:headEnd type="none" w="med" len="med"/>
+                      <a:tailEnd type="none" w="med" len="med"/>
+                    </a:lnT>
+                    <a:lnB w="6350" cap="flat" cmpd="sng" algn="ctr">
+                      <a:solidFill>
+                        <a:srgbClr val="E1E1DA"/>
+                      </a:solidFill>
+                      <a:prstDash val="solid"/>
+                      <a:round/>
+                      <a:headEnd type="none" w="med" len="med"/>
+                      <a:tailEnd type="none" w="med" len="med"/>
+                    </a:lnB>
+                  </a:tcPr>
+                </a:tc>
+                <a:tc>
+                  <a:txBody>
+                    <a:bodyPr/>
+                    <a:lstStyle/>
+                    <a:p>
+                      <a:pPr algn="l" indent="0" marL="0">
+                        <a:buNone/>
+                      </a:pPr>
+                      <a:r>
+                        <a:rPr lang="en-US" sz="1150" dirty="0">
+                          <a:solidFill>
+                            <a:srgbClr val="161616"/>
+                          </a:solidFill>
+                          <a:latin typeface="Calibri" pitchFamily="34" charset="0"/>
+                          <a:ea typeface="Calibri" pitchFamily="34" charset="-122"/>
+                          <a:cs typeface="Calibri" pitchFamily="34" charset="-120"/>
+                        </a:rPr>
+                        <a:t>0.88</a:t>
+                      </a:r>
+                      <a:endParaRPr lang="en-US" sz="1150" dirty="0">
+                        <a:latin typeface="Calibri" charset="0"/>
+                        <a:ea typeface="Calibri" charset="0"/>
+                        <a:cs typeface="Calibri" charset="0"/>
+                      </a:endParaRPr>
+                    </a:p>
+                  </a:txBody>
+                  <a:tcPr marL="91440" marR="91440" marT="45720" marB="45720" anchor="ctr">
+                    <a:lnL w="6350" cap="flat" cmpd="sng" algn="ctr">
+                      <a:solidFill>
+                        <a:srgbClr val="E1E1DA"/>
+                      </a:solidFill>
+                      <a:prstDash val="solid"/>
+                      <a:round/>
+                      <a:headEnd type="none" w="med" len="med"/>
+                      <a:tailEnd type="none" w="med" len="med"/>
+                    </a:lnL>
+                    <a:lnR w="6350" cap="flat" cmpd="sng" algn="ctr">
+                      <a:solidFill>
+                        <a:srgbClr val="E1E1DA"/>
+                      </a:solidFill>
+                      <a:prstDash val="solid"/>
+                      <a:round/>
+                      <a:headEnd type="none" w="med" len="med"/>
+                      <a:tailEnd type="none" w="med" len="med"/>
+                    </a:lnR>
+                    <a:lnT w="6350" cap="flat" cmpd="sng" algn="ctr">
+                      <a:solidFill>
+                        <a:srgbClr val="E1E1DA"/>
+                      </a:solidFill>
+                      <a:prstDash val="solid"/>
+                      <a:round/>
+                      <a:headEnd type="none" w="med" len="med"/>
+                      <a:tailEnd type="none" w="med" len="med"/>
+                    </a:lnT>
+                    <a:lnB w="6350" cap="flat" cmpd="sng" algn="ctr">
+                      <a:solidFill>
+                        <a:srgbClr val="E1E1DA"/>
+                      </a:solidFill>
+                      <a:prstDash val="solid"/>
+                      <a:round/>
+                      <a:headEnd type="none" w="med" len="med"/>
+                      <a:tailEnd type="none" w="med" len="med"/>
+                    </a:lnB>
+                  </a:tcPr>
+                </a:tc>
+                <a:tc>
+                  <a:txBody>
+                    <a:bodyPr/>
+                    <a:lstStyle/>
+                    <a:p>
+                      <a:pPr algn="l" indent="0" marL="0">
+                        <a:buNone/>
+                      </a:pPr>
+                      <a:r>
+                        <a:rPr lang="en-US" sz="1150" dirty="0">
+                          <a:solidFill>
+                            <a:srgbClr val="161616"/>
+                          </a:solidFill>
+                          <a:latin typeface="Calibri" pitchFamily="34" charset="0"/>
+                          <a:ea typeface="Calibri" pitchFamily="34" charset="-122"/>
+                          <a:cs typeface="Calibri" pitchFamily="34" charset="-120"/>
+                        </a:rPr>
+                        <a:t>Strong — shared-attribute ties are transitive</a:t>
+                      </a:r>
+                      <a:endParaRPr lang="en-US" sz="1150" dirty="0">
+                        <a:latin typeface="Calibri" charset="0"/>
+                        <a:ea typeface="Calibri" charset="0"/>
+                        <a:cs typeface="Calibri" charset="0"/>
+                      </a:endParaRPr>
+                    </a:p>
+                  </a:txBody>
+                  <a:tcPr marL="91440" marR="91440" marT="45720" marB="45720" anchor="ctr">
+                    <a:lnL w="6350" cap="flat" cmpd="sng" algn="ctr">
+                      <a:solidFill>
+                        <a:srgbClr val="E1E1DA"/>
+                      </a:solidFill>
+                      <a:prstDash val="solid"/>
+                      <a:round/>
+                      <a:headEnd type="none" w="med" len="med"/>
+                      <a:tailEnd type="none" w="med" len="med"/>
+                    </a:lnL>
+                    <a:lnR w="6350" cap="flat" cmpd="sng" algn="ctr">
+                      <a:solidFill>
+                        <a:srgbClr val="E1E1DA"/>
+                      </a:solidFill>
+                      <a:prstDash val="solid"/>
+                      <a:round/>
+                      <a:headEnd type="none" w="med" len="med"/>
+                      <a:tailEnd type="none" w="med" len="med"/>
+                    </a:lnR>
+                    <a:lnT w="6350" cap="flat" cmpd="sng" algn="ctr">
+                      <a:solidFill>
+                        <a:srgbClr val="E1E1DA"/>
+                      </a:solidFill>
+                      <a:prstDash val="solid"/>
+                      <a:round/>
+                      <a:headEnd type="none" w="med" len="med"/>
+                      <a:tailEnd type="none" w="med" len="med"/>
+                    </a:lnT>
+                    <a:lnB w="6350" cap="flat" cmpd="sng" algn="ctr">
+                      <a:solidFill>
+                        <a:srgbClr val="E1E1DA"/>
+                      </a:solidFill>
+                      <a:prstDash val="solid"/>
+                      <a:round/>
+                      <a:headEnd type="none" w="med" len="med"/>
+                      <a:tailEnd type="none" w="med" len="med"/>
+                    </a:lnB>
+                  </a:tcPr>
+                </a:tc>
+              </a:tr>
+              <a:tr h="329184">
+                <a:tc>
+                  <a:txBody>
+                    <a:bodyPr/>
+                    <a:lstStyle/>
+                    <a:p>
+                      <a:pPr algn="l" indent="0" marL="0">
+                        <a:buNone/>
+                      </a:pPr>
+                      <a:r>
+                        <a:rPr lang="en-US" sz="1150" dirty="0">
+                          <a:solidFill>
+                            <a:srgbClr val="161616"/>
+                          </a:solidFill>
+                          <a:latin typeface="Calibri" pitchFamily="34" charset="0"/>
+                          <a:ea typeface="Calibri" pitchFamily="34" charset="-122"/>
+                          <a:cs typeface="Calibri" pitchFamily="34" charset="-120"/>
+                        </a:rPr>
+                        <a:t>Degree assortativity</a:t>
+                      </a:r>
+                      <a:endParaRPr lang="en-US" sz="1150" dirty="0">
+                        <a:latin typeface="Calibri" charset="0"/>
+                        <a:ea typeface="Calibri" charset="0"/>
+                        <a:cs typeface="Calibri" charset="0"/>
+                      </a:endParaRPr>
+                    </a:p>
+                  </a:txBody>
+                  <a:tcPr marL="91440" marR="91440" marT="45720" marB="45720" anchor="ctr">
+                    <a:lnL w="6350" cap="flat" cmpd="sng" algn="ctr">
+                      <a:solidFill>
+                        <a:srgbClr val="E1E1DA"/>
+                      </a:solidFill>
+                      <a:prstDash val="solid"/>
+                      <a:round/>
+                      <a:headEnd type="none" w="med" len="med"/>
+                      <a:tailEnd type="none" w="med" len="med"/>
+                    </a:lnL>
+                    <a:lnR w="6350" cap="flat" cmpd="sng" algn="ctr">
+                      <a:solidFill>
+                        <a:srgbClr val="E1E1DA"/>
+                      </a:solidFill>
+                      <a:prstDash val="solid"/>
+                      <a:round/>
+                      <a:headEnd type="none" w="med" len="med"/>
+                      <a:tailEnd type="none" w="med" len="med"/>
+                    </a:lnR>
+                    <a:lnT w="6350" cap="flat" cmpd="sng" algn="ctr">
+                      <a:solidFill>
+                        <a:srgbClr val="E1E1DA"/>
+                      </a:solidFill>
+                      <a:prstDash val="solid"/>
+                      <a:round/>
+                      <a:headEnd type="none" w="med" len="med"/>
+                      <a:tailEnd type="none" w="med" len="med"/>
+                    </a:lnT>
+                    <a:lnB w="6350" cap="flat" cmpd="sng" algn="ctr">
+                      <a:solidFill>
+                        <a:srgbClr val="E1E1DA"/>
+                      </a:solidFill>
+                      <a:prstDash val="solid"/>
+                      <a:round/>
+                      <a:headEnd type="none" w="med" len="med"/>
+                      <a:tailEnd type="none" w="med" len="med"/>
+                    </a:lnB>
+                  </a:tcPr>
+                </a:tc>
+                <a:tc>
+                  <a:txBody>
+                    <a:bodyPr/>
+                    <a:lstStyle/>
+                    <a:p>
+                      <a:pPr algn="l" indent="0" marL="0">
+                        <a:buNone/>
+                      </a:pPr>
+                      <a:r>
+                        <a:rPr lang="en-US" sz="1150" dirty="0">
+                          <a:solidFill>
+                            <a:srgbClr val="161616"/>
+                          </a:solidFill>
+                          <a:latin typeface="Calibri" pitchFamily="34" charset="0"/>
+                          <a:ea typeface="Calibri" pitchFamily="34" charset="-122"/>
+                          <a:cs typeface="Calibri" pitchFamily="34" charset="-120"/>
+                        </a:rPr>
+                        <a:t>+0.42</a:t>
+                      </a:r>
+                      <a:endParaRPr lang="en-US" sz="1150" dirty="0">
+                        <a:latin typeface="Calibri" charset="0"/>
+                        <a:ea typeface="Calibri" charset="0"/>
+                        <a:cs typeface="Calibri" charset="0"/>
+                      </a:endParaRPr>
+                    </a:p>
+                  </a:txBody>
+                  <a:tcPr marL="91440" marR="91440" marT="45720" marB="45720" anchor="ctr">
+                    <a:lnL w="6350" cap="flat" cmpd="sng" algn="ctr">
+                      <a:solidFill>
+                        <a:srgbClr val="E1E1DA"/>
+                      </a:solidFill>
+                      <a:prstDash val="solid"/>
+                      <a:round/>
+                      <a:headEnd type="none" w="med" len="med"/>
+                      <a:tailEnd type="none" w="med" len="med"/>
+                    </a:lnL>
+                    <a:lnR w="6350" cap="flat" cmpd="sng" algn="ctr">
+                      <a:solidFill>
+                        <a:srgbClr val="E1E1DA"/>
+                      </a:solidFill>
+                      <a:prstDash val="solid"/>
+                      <a:round/>
+                      <a:headEnd type="none" w="med" len="med"/>
+                      <a:tailEnd type="none" w="med" len="med"/>
+                    </a:lnR>
+                    <a:lnT w="6350" cap="flat" cmpd="sng" algn="ctr">
+                      <a:solidFill>
+                        <a:srgbClr val="E1E1DA"/>
+                      </a:solidFill>
+                      <a:prstDash val="solid"/>
+                      <a:round/>
+                      <a:headEnd type="none" w="med" len="med"/>
+                      <a:tailEnd type="none" w="med" len="med"/>
+                    </a:lnT>
+                    <a:lnB w="6350" cap="flat" cmpd="sng" algn="ctr">
+                      <a:solidFill>
+                        <a:srgbClr val="E1E1DA"/>
+                      </a:solidFill>
+                      <a:prstDash val="solid"/>
+                      <a:round/>
+                      <a:headEnd type="none" w="med" len="med"/>
+                      <a:tailEnd type="none" w="med" len="med"/>
+                    </a:lnB>
+                  </a:tcPr>
+                </a:tc>
+                <a:tc>
+                  <a:txBody>
+                    <a:bodyPr/>
+                    <a:lstStyle/>
+                    <a:p>
+                      <a:pPr algn="l" indent="0" marL="0">
+                        <a:buNone/>
+                      </a:pPr>
+                      <a:r>
+                        <a:rPr lang="en-US" sz="1150" dirty="0">
+                          <a:solidFill>
+                            <a:srgbClr val="161616"/>
+                          </a:solidFill>
+                          <a:latin typeface="Calibri" pitchFamily="34" charset="0"/>
+                          <a:ea typeface="Calibri" pitchFamily="34" charset="-122"/>
+                          <a:cs typeface="Calibri" pitchFamily="34" charset="-120"/>
+                        </a:rPr>
+                        <a:t>+0.65</a:t>
+                      </a:r>
+                      <a:endParaRPr lang="en-US" sz="1150" dirty="0">
+                        <a:latin typeface="Calibri" charset="0"/>
+                        <a:ea typeface="Calibri" charset="0"/>
+                        <a:cs typeface="Calibri" charset="0"/>
+                      </a:endParaRPr>
+                    </a:p>
+                  </a:txBody>
+                  <a:tcPr marL="91440" marR="91440" marT="45720" marB="45720" anchor="ctr">
+                    <a:lnL w="6350" cap="flat" cmpd="sng" algn="ctr">
+                      <a:solidFill>
+                        <a:srgbClr val="E1E1DA"/>
+                      </a:solidFill>
+                      <a:prstDash val="solid"/>
+                      <a:round/>
+                      <a:headEnd type="none" w="med" len="med"/>
+                      <a:tailEnd type="none" w="med" len="med"/>
+                    </a:lnL>
+                    <a:lnR w="6350" cap="flat" cmpd="sng" algn="ctr">
+                      <a:solidFill>
+                        <a:srgbClr val="E1E1DA"/>
+                      </a:solidFill>
+                      <a:prstDash val="solid"/>
+                      <a:round/>
+                      <a:headEnd type="none" w="med" len="med"/>
+                      <a:tailEnd type="none" w="med" len="med"/>
+                    </a:lnR>
+                    <a:lnT w="6350" cap="flat" cmpd="sng" algn="ctr">
+                      <a:solidFill>
+                        <a:srgbClr val="E1E1DA"/>
+                      </a:solidFill>
+                      <a:prstDash val="solid"/>
+                      <a:round/>
+                      <a:headEnd type="none" w="med" len="med"/>
+                      <a:tailEnd type="none" w="med" len="med"/>
+                    </a:lnT>
+                    <a:lnB w="6350" cap="flat" cmpd="sng" algn="ctr">
+                      <a:solidFill>
+                        <a:srgbClr val="E1E1DA"/>
+                      </a:solidFill>
+                      <a:prstDash val="solid"/>
+                      <a:round/>
+                      <a:headEnd type="none" w="med" len="med"/>
+                      <a:tailEnd type="none" w="med" len="med"/>
+                    </a:lnB>
+                  </a:tcPr>
+                </a:tc>
+                <a:tc>
+                  <a:txBody>
+                    <a:bodyPr/>
+                    <a:lstStyle/>
+                    <a:p>
+                      <a:pPr algn="l" indent="0" marL="0">
+                        <a:buNone/>
+                      </a:pPr>
+                      <a:r>
+                        <a:rPr lang="en-US" sz="1150" dirty="0">
+                          <a:solidFill>
+                            <a:srgbClr val="161616"/>
+                          </a:solidFill>
+                          <a:latin typeface="Calibri" pitchFamily="34" charset="0"/>
+                          <a:ea typeface="Calibri" pitchFamily="34" charset="-122"/>
+                          <a:cs typeface="Calibri" pitchFamily="34" charset="-120"/>
+                        </a:rPr>
+                        <a:t>Positive — hubs connect to hubs</a:t>
+                      </a:r>
+                      <a:endParaRPr lang="en-US" sz="1150" dirty="0">
+                        <a:latin typeface="Calibri" charset="0"/>
+                        <a:ea typeface="Calibri" charset="0"/>
+                        <a:cs typeface="Calibri" charset="0"/>
+                      </a:endParaRPr>
+                    </a:p>
+                  </a:txBody>
+                  <a:tcPr marL="91440" marR="91440" marT="45720" marB="45720" anchor="ctr">
+                    <a:lnL w="6350" cap="flat" cmpd="sng" algn="ctr">
+                      <a:solidFill>
+                        <a:srgbClr val="E1E1DA"/>
+                      </a:solidFill>
+                      <a:prstDash val="solid"/>
+                      <a:round/>
+                      <a:headEnd type="none" w="med" len="med"/>
+                      <a:tailEnd type="none" w="med" len="med"/>
+                    </a:lnL>
+                    <a:lnR w="6350" cap="flat" cmpd="sng" algn="ctr">
+                      <a:solidFill>
+                        <a:srgbClr val="E1E1DA"/>
+                      </a:solidFill>
+                      <a:prstDash val="solid"/>
+                      <a:round/>
+                      <a:headEnd type="none" w="med" len="med"/>
+                      <a:tailEnd type="none" w="med" len="med"/>
+                    </a:lnR>
+                    <a:lnT w="6350" cap="flat" cmpd="sng" algn="ctr">
+                      <a:solidFill>
+                        <a:srgbClr val="E1E1DA"/>
+                      </a:solidFill>
+                      <a:prstDash val="solid"/>
+                      <a:round/>
+                      <a:headEnd type="none" w="med" len="med"/>
+                      <a:tailEnd type="none" w="med" len="med"/>
+                    </a:lnT>
+                    <a:lnB w="6350" cap="flat" cmpd="sng" algn="ctr">
+                      <a:solidFill>
+                        <a:srgbClr val="E1E1DA"/>
+                      </a:solidFill>
+                      <a:prstDash val="solid"/>
+                      <a:round/>
+                      <a:headEnd type="none" w="med" len="med"/>
+                      <a:tailEnd type="none" w="med" len="med"/>
+                    </a:lnB>
+                  </a:tcPr>
+                </a:tc>
+              </a:tr>
+              <a:tr h="329184">
+                <a:tc>
+                  <a:txBody>
+                    <a:bodyPr/>
+                    <a:lstStyle/>
+                    <a:p>
+                      <a:pPr algn="l" indent="0" marL="0">
+                        <a:buNone/>
+                      </a:pPr>
+                      <a:r>
+                        <a:rPr lang="en-US" sz="1150" dirty="0">
+                          <a:solidFill>
+                            <a:srgbClr val="161616"/>
+                          </a:solidFill>
+                          <a:latin typeface="Calibri" pitchFamily="34" charset="0"/>
+                          <a:ea typeface="Calibri" pitchFamily="34" charset="-122"/>
+                          <a:cs typeface="Calibri" pitchFamily="34" charset="-120"/>
+                        </a:rPr>
+                        <a:t>Avg path length</a:t>
+                      </a:r>
+                      <a:endParaRPr lang="en-US" sz="1150" dirty="0">
+                        <a:latin typeface="Calibri" charset="0"/>
+                        <a:ea typeface="Calibri" charset="0"/>
+                        <a:cs typeface="Calibri" charset="0"/>
+                      </a:endParaRPr>
+                    </a:p>
+                  </a:txBody>
+                  <a:tcPr marL="91440" marR="91440" marT="45720" marB="45720" anchor="ctr">
+                    <a:lnL w="6350" cap="flat" cmpd="sng" algn="ctr">
+                      <a:solidFill>
+                        <a:srgbClr val="E1E1DA"/>
+                      </a:solidFill>
+                      <a:prstDash val="solid"/>
+                      <a:round/>
+                      <a:headEnd type="none" w="med" len="med"/>
+                      <a:tailEnd type="none" w="med" len="med"/>
+                    </a:lnL>
+                    <a:lnR w="6350" cap="flat" cmpd="sng" algn="ctr">
+                      <a:solidFill>
+                        <a:srgbClr val="E1E1DA"/>
+                      </a:solidFill>
+                      <a:prstDash val="solid"/>
+                      <a:round/>
+                      <a:headEnd type="none" w="med" len="med"/>
+                      <a:tailEnd type="none" w="med" len="med"/>
+                    </a:lnR>
+                    <a:lnT w="6350" cap="flat" cmpd="sng" algn="ctr">
+                      <a:solidFill>
+                        <a:srgbClr val="E1E1DA"/>
+                      </a:solidFill>
+                      <a:prstDash val="solid"/>
+                      <a:round/>
+                      <a:headEnd type="none" w="med" len="med"/>
+                      <a:tailEnd type="none" w="med" len="med"/>
+                    </a:lnT>
+                    <a:lnB w="6350" cap="flat" cmpd="sng" algn="ctr">
+                      <a:solidFill>
+                        <a:srgbClr val="E1E1DA"/>
+                      </a:solidFill>
+                      <a:prstDash val="solid"/>
+                      <a:round/>
+                      <a:headEnd type="none" w="med" len="med"/>
+                      <a:tailEnd type="none" w="med" len="med"/>
+                    </a:lnB>
+                  </a:tcPr>
+                </a:tc>
+                <a:tc>
+                  <a:txBody>
+                    <a:bodyPr/>
+                    <a:lstStyle/>
+                    <a:p>
+                      <a:pPr algn="l" indent="0" marL="0">
+                        <a:buNone/>
+                      </a:pPr>
+                      <a:r>
+                        <a:rPr lang="en-US" sz="1150" dirty="0">
+                          <a:solidFill>
+                            <a:srgbClr val="161616"/>
+                          </a:solidFill>
+                          <a:latin typeface="Calibri" pitchFamily="34" charset="0"/>
+                          <a:ea typeface="Calibri" pitchFamily="34" charset="-122"/>
+                          <a:cs typeface="Calibri" pitchFamily="34" charset="-120"/>
+                        </a:rPr>
+                        <a:t>2.94</a:t>
+                      </a:r>
+                      <a:endParaRPr lang="en-US" sz="1150" dirty="0">
+                        <a:latin typeface="Calibri" charset="0"/>
+                        <a:ea typeface="Calibri" charset="0"/>
+                        <a:cs typeface="Calibri" charset="0"/>
+                      </a:endParaRPr>
+                    </a:p>
+                  </a:txBody>
+                  <a:tcPr marL="91440" marR="91440" marT="45720" marB="45720" anchor="ctr">
+                    <a:lnL w="6350" cap="flat" cmpd="sng" algn="ctr">
+                      <a:solidFill>
+                        <a:srgbClr val="E1E1DA"/>
+                      </a:solidFill>
+                      <a:prstDash val="solid"/>
+                      <a:round/>
+                      <a:headEnd type="none" w="med" len="med"/>
+                      <a:tailEnd type="none" w="med" len="med"/>
+                    </a:lnL>
+                    <a:lnR w="6350" cap="flat" cmpd="sng" algn="ctr">
+                      <a:solidFill>
+                        <a:srgbClr val="E1E1DA"/>
+                      </a:solidFill>
+                      <a:prstDash val="solid"/>
+                      <a:round/>
+                      <a:headEnd type="none" w="med" len="med"/>
+                      <a:tailEnd type="none" w="med" len="med"/>
+                    </a:lnR>
+                    <a:lnT w="6350" cap="flat" cmpd="sng" algn="ctr">
+                      <a:solidFill>
+                        <a:srgbClr val="E1E1DA"/>
+                      </a:solidFill>
+                      <a:prstDash val="solid"/>
+                      <a:round/>
+                      <a:headEnd type="none" w="med" len="med"/>
+                      <a:tailEnd type="none" w="med" len="med"/>
+                    </a:lnT>
+                    <a:lnB w="6350" cap="flat" cmpd="sng" algn="ctr">
+                      <a:solidFill>
+                        <a:srgbClr val="E1E1DA"/>
+                      </a:solidFill>
+                      <a:prstDash val="solid"/>
+                      <a:round/>
+                      <a:headEnd type="none" w="med" len="med"/>
+                      <a:tailEnd type="none" w="med" len="med"/>
+                    </a:lnB>
+                  </a:tcPr>
+                </a:tc>
+                <a:tc>
+                  <a:txBody>
+                    <a:bodyPr/>
+                    <a:lstStyle/>
+                    <a:p>
+                      <a:pPr algn="l" indent="0" marL="0">
+                        <a:buNone/>
+                      </a:pPr>
+                      <a:r>
+                        <a:rPr lang="en-US" sz="1150" dirty="0">
+                          <a:solidFill>
+                            <a:srgbClr val="161616"/>
+                          </a:solidFill>
+                          <a:latin typeface="Calibri" pitchFamily="34" charset="0"/>
+                          <a:ea typeface="Calibri" pitchFamily="34" charset="-122"/>
+                          <a:cs typeface="Calibri" pitchFamily="34" charset="-120"/>
+                        </a:rPr>
+                        <a:t>2.26</a:t>
+                      </a:r>
+                      <a:endParaRPr lang="en-US" sz="1150" dirty="0">
+                        <a:latin typeface="Calibri" charset="0"/>
+                        <a:ea typeface="Calibri" charset="0"/>
+                        <a:cs typeface="Calibri" charset="0"/>
+                      </a:endParaRPr>
+                    </a:p>
+                  </a:txBody>
+                  <a:tcPr marL="91440" marR="91440" marT="45720" marB="45720" anchor="ctr">
+                    <a:lnL w="6350" cap="flat" cmpd="sng" algn="ctr">
+                      <a:solidFill>
+                        <a:srgbClr val="E1E1DA"/>
+                      </a:solidFill>
+                      <a:prstDash val="solid"/>
+                      <a:round/>
+                      <a:headEnd type="none" w="med" len="med"/>
+                      <a:tailEnd type="none" w="med" len="med"/>
+                    </a:lnL>
+                    <a:lnR w="6350" cap="flat" cmpd="sng" algn="ctr">
+                      <a:solidFill>
+                        <a:srgbClr val="E1E1DA"/>
+                      </a:solidFill>
+                      <a:prstDash val="solid"/>
+                      <a:round/>
+                      <a:headEnd type="none" w="med" len="med"/>
+                      <a:tailEnd type="none" w="med" len="med"/>
+                    </a:lnR>
+                    <a:lnT w="6350" cap="flat" cmpd="sng" algn="ctr">
+                      <a:solidFill>
+                        <a:srgbClr val="E1E1DA"/>
+                      </a:solidFill>
+                      <a:prstDash val="solid"/>
+                      <a:round/>
+                      <a:headEnd type="none" w="med" len="med"/>
+                      <a:tailEnd type="none" w="med" len="med"/>
+                    </a:lnT>
+                    <a:lnB w="6350" cap="flat" cmpd="sng" algn="ctr">
+                      <a:solidFill>
+                        <a:srgbClr val="E1E1DA"/>
+                      </a:solidFill>
+                      <a:prstDash val="solid"/>
+                      <a:round/>
+                      <a:headEnd type="none" w="med" len="med"/>
+                      <a:tailEnd type="none" w="med" len="med"/>
+                    </a:lnB>
+                  </a:tcPr>
+                </a:tc>
+                <a:tc>
+                  <a:txBody>
+                    <a:bodyPr/>
+                    <a:lstStyle/>
+                    <a:p>
+                      <a:pPr algn="l" indent="0" marL="0">
+                        <a:buNone/>
+                      </a:pPr>
+                      <a:r>
+                        <a:rPr lang="en-US" sz="1150" dirty="0">
+                          <a:solidFill>
+                            <a:srgbClr val="161616"/>
+                          </a:solidFill>
+                          <a:latin typeface="Calibri" pitchFamily="34" charset="0"/>
+                          <a:ea typeface="Calibri" pitchFamily="34" charset="-122"/>
+                          <a:cs typeface="Calibri" pitchFamily="34" charset="-120"/>
+                        </a:rPr>
+                        <a:t>Short — any tweet reachable in ~3 hops</a:t>
+                      </a:r>
+                      <a:endParaRPr lang="en-US" sz="1150" dirty="0">
+                        <a:latin typeface="Calibri" charset="0"/>
+                        <a:ea typeface="Calibri" charset="0"/>
+                        <a:cs typeface="Calibri" charset="0"/>
+                      </a:endParaRPr>
+                    </a:p>
+                  </a:txBody>
+                  <a:tcPr marL="91440" marR="91440" marT="45720" marB="45720" anchor="ctr">
+                    <a:lnL w="6350" cap="flat" cmpd="sng" algn="ctr">
+                      <a:solidFill>
+                        <a:srgbClr val="E1E1DA"/>
+                      </a:solidFill>
+                      <a:prstDash val="solid"/>
+                      <a:round/>
+                      <a:headEnd type="none" w="med" len="med"/>
+                      <a:tailEnd type="none" w="med" len="med"/>
+                    </a:lnL>
+                    <a:lnR w="6350" cap="flat" cmpd="sng" algn="ctr">
+                      <a:solidFill>
+                        <a:srgbClr val="E1E1DA"/>
+                      </a:solidFill>
+                      <a:prstDash val="solid"/>
+                      <a:round/>
+                      <a:headEnd type="none" w="med" len="med"/>
+                      <a:tailEnd type="none" w="med" len="med"/>
+                    </a:lnR>
+                    <a:lnT w="6350" cap="flat" cmpd="sng" algn="ctr">
+                      <a:solidFill>
+                        <a:srgbClr val="E1E1DA"/>
+                      </a:solidFill>
+                      <a:prstDash val="solid"/>
+                      <a:round/>
+                      <a:headEnd type="none" w="med" len="med"/>
+                      <a:tailEnd type="none" w="med" len="med"/>
+                    </a:lnT>
+                    <a:lnB w="6350" cap="flat" cmpd="sng" algn="ctr">
+                      <a:solidFill>
+                        <a:srgbClr val="E1E1DA"/>
+                      </a:solidFill>
+                      <a:prstDash val="solid"/>
+                      <a:round/>
+                      <a:headEnd type="none" w="med" len="med"/>
+                      <a:tailEnd type="none" w="med" len="med"/>
+                    </a:lnB>
+                  </a:tcPr>
+                </a:tc>
+              </a:tr>
+              <a:tr h="329184">
+                <a:tc>
+                  <a:txBody>
+                    <a:bodyPr/>
+                    <a:lstStyle/>
+                    <a:p>
+                      <a:pPr algn="l" indent="0" marL="0">
+                        <a:buNone/>
+                      </a:pPr>
+                      <a:r>
+                        <a:rPr lang="en-US" sz="1150" dirty="0">
+                          <a:solidFill>
+                            <a:srgbClr val="161616"/>
+                          </a:solidFill>
+                          <a:latin typeface="Calibri" pitchFamily="34" charset="0"/>
+                          <a:ea typeface="Calibri" pitchFamily="34" charset="-122"/>
+                          <a:cs typeface="Calibri" pitchFamily="34" charset="-120"/>
+                        </a:rPr>
+                        <a:t>Diameter</a:t>
+                      </a:r>
+                      <a:endParaRPr lang="en-US" sz="1150" dirty="0">
+                        <a:latin typeface="Calibri" charset="0"/>
+                        <a:ea typeface="Calibri" charset="0"/>
+                        <a:cs typeface="Calibri" charset="0"/>
+                      </a:endParaRPr>
+                    </a:p>
+                  </a:txBody>
+                  <a:tcPr marL="91440" marR="91440" marT="45720" marB="45720" anchor="ctr">
+                    <a:lnL w="6350" cap="flat" cmpd="sng" algn="ctr">
+                      <a:solidFill>
+                        <a:srgbClr val="E1E1DA"/>
+                      </a:solidFill>
+                      <a:prstDash val="solid"/>
+                      <a:round/>
+                      <a:headEnd type="none" w="med" len="med"/>
+                      <a:tailEnd type="none" w="med" len="med"/>
+                    </a:lnL>
+                    <a:lnR w="6350" cap="flat" cmpd="sng" algn="ctr">
+                      <a:solidFill>
+                        <a:srgbClr val="E1E1DA"/>
+                      </a:solidFill>
+                      <a:prstDash val="solid"/>
+                      <a:round/>
+                      <a:headEnd type="none" w="med" len="med"/>
+                      <a:tailEnd type="none" w="med" len="med"/>
+                    </a:lnR>
+                    <a:lnT w="6350" cap="flat" cmpd="sng" algn="ctr">
+                      <a:solidFill>
+                        <a:srgbClr val="E1E1DA"/>
+                      </a:solidFill>
+                      <a:prstDash val="solid"/>
+                      <a:round/>
+                      <a:headEnd type="none" w="med" len="med"/>
+                      <a:tailEnd type="none" w="med" len="med"/>
+                    </a:lnT>
+                    <a:lnB w="6350" cap="flat" cmpd="sng" algn="ctr">
+                      <a:solidFill>
+                        <a:srgbClr val="E1E1DA"/>
+                      </a:solidFill>
+                      <a:prstDash val="solid"/>
+                      <a:round/>
+                      <a:headEnd type="none" w="med" len="med"/>
+                      <a:tailEnd type="none" w="med" len="med"/>
+                    </a:lnB>
+                  </a:tcPr>
+                </a:tc>
+                <a:tc>
+                  <a:txBody>
+                    <a:bodyPr/>
+                    <a:lstStyle/>
+                    <a:p>
+                      <a:pPr algn="l" indent="0" marL="0">
+                        <a:buNone/>
+                      </a:pPr>
+                      <a:r>
+                        <a:rPr lang="en-US" sz="1150" dirty="0">
+                          <a:solidFill>
+                            <a:srgbClr val="161616"/>
+                          </a:solidFill>
+                          <a:latin typeface="Calibri" pitchFamily="34" charset="0"/>
+                          <a:ea typeface="Calibri" pitchFamily="34" charset="-122"/>
+                          <a:cs typeface="Calibri" pitchFamily="34" charset="-120"/>
+                        </a:rPr>
+                        <a:t>7</a:t>
+                      </a:r>
+                      <a:endParaRPr lang="en-US" sz="1150" dirty="0">
+                        <a:latin typeface="Calibri" charset="0"/>
+                        <a:ea typeface="Calibri" charset="0"/>
+                        <a:cs typeface="Calibri" charset="0"/>
+                      </a:endParaRPr>
+                    </a:p>
+                  </a:txBody>
+                  <a:tcPr marL="91440" marR="91440" marT="45720" marB="45720" anchor="ctr">
+                    <a:lnL w="6350" cap="flat" cmpd="sng" algn="ctr">
+                      <a:solidFill>
+                        <a:srgbClr val="E1E1DA"/>
+                      </a:solidFill>
+                      <a:prstDash val="solid"/>
+                      <a:round/>
+                      <a:headEnd type="none" w="med" len="med"/>
+                      <a:tailEnd type="none" w="med" len="med"/>
+                    </a:lnL>
+                    <a:lnR w="6350" cap="flat" cmpd="sng" algn="ctr">
+                      <a:solidFill>
+                        <a:srgbClr val="E1E1DA"/>
+                      </a:solidFill>
+                      <a:prstDash val="solid"/>
+                      <a:round/>
+                      <a:headEnd type="none" w="med" len="med"/>
+                      <a:tailEnd type="none" w="med" len="med"/>
+                    </a:lnR>
+                    <a:lnT w="6350" cap="flat" cmpd="sng" algn="ctr">
+                      <a:solidFill>
+                        <a:srgbClr val="E1E1DA"/>
+                      </a:solidFill>
+                      <a:prstDash val="solid"/>
+                      <a:round/>
+                      <a:headEnd type="none" w="med" len="med"/>
+                      <a:tailEnd type="none" w="med" len="med"/>
+                    </a:lnT>
+                    <a:lnB w="6350" cap="flat" cmpd="sng" algn="ctr">
+                      <a:solidFill>
+                        <a:srgbClr val="E1E1DA"/>
+                      </a:solidFill>
+                      <a:prstDash val="solid"/>
+                      <a:round/>
+                      <a:headEnd type="none" w="med" len="med"/>
+                      <a:tailEnd type="none" w="med" len="med"/>
+                    </a:lnB>
+                  </a:tcPr>
+                </a:tc>
+                <a:tc>
+                  <a:txBody>
+                    <a:bodyPr/>
+                    <a:lstStyle/>
+                    <a:p>
+                      <a:pPr algn="l" indent="0" marL="0">
+                        <a:buNone/>
+                      </a:pPr>
+                      <a:r>
+                        <a:rPr lang="en-US" sz="1150" dirty="0">
+                          <a:solidFill>
+                            <a:srgbClr val="161616"/>
+                          </a:solidFill>
+                          <a:latin typeface="Calibri" pitchFamily="34" charset="0"/>
+                          <a:ea typeface="Calibri" pitchFamily="34" charset="-122"/>
+                          <a:cs typeface="Calibri" pitchFamily="34" charset="-120"/>
+                        </a:rPr>
+                        <a:t>5.2</a:t>
+                      </a:r>
+                      <a:endParaRPr lang="en-US" sz="1150" dirty="0">
+                        <a:latin typeface="Calibri" charset="0"/>
+                        <a:ea typeface="Calibri" charset="0"/>
+                        <a:cs typeface="Calibri" charset="0"/>
+                      </a:endParaRPr>
+                    </a:p>
+                  </a:txBody>
+                  <a:tcPr marL="91440" marR="91440" marT="45720" marB="45720" anchor="ctr">
+                    <a:lnL w="6350" cap="flat" cmpd="sng" algn="ctr">
+                      <a:solidFill>
+                        <a:srgbClr val="E1E1DA"/>
+                      </a:solidFill>
+                      <a:prstDash val="solid"/>
+                      <a:round/>
+                      <a:headEnd type="none" w="med" len="med"/>
+                      <a:tailEnd type="none" w="med" len="med"/>
+                    </a:lnL>
+                    <a:lnR w="6350" cap="flat" cmpd="sng" algn="ctr">
+                      <a:solidFill>
+                        <a:srgbClr val="E1E1DA"/>
+                      </a:solidFill>
+                      <a:prstDash val="solid"/>
+                      <a:round/>
+                      <a:headEnd type="none" w="med" len="med"/>
+                      <a:tailEnd type="none" w="med" len="med"/>
+                    </a:lnR>
+                    <a:lnT w="6350" cap="flat" cmpd="sng" algn="ctr">
+                      <a:solidFill>
+                        <a:srgbClr val="E1E1DA"/>
+                      </a:solidFill>
+                      <a:prstDash val="solid"/>
+                      <a:round/>
+                      <a:headEnd type="none" w="med" len="med"/>
+                      <a:tailEnd type="none" w="med" len="med"/>
+                    </a:lnT>
+                    <a:lnB w="6350" cap="flat" cmpd="sng" algn="ctr">
+                      <a:solidFill>
+                        <a:srgbClr val="E1E1DA"/>
+                      </a:solidFill>
+                      <a:prstDash val="solid"/>
+                      <a:round/>
+                      <a:headEnd type="none" w="med" len="med"/>
+                      <a:tailEnd type="none" w="med" len="med"/>
+                    </a:lnB>
+                  </a:tcPr>
+                </a:tc>
+                <a:tc>
+                  <a:txBody>
+                    <a:bodyPr/>
+                    <a:lstStyle/>
+                    <a:p>
+                      <a:pPr algn="l" indent="0" marL="0">
+                        <a:buNone/>
+                      </a:pPr>
+                      <a:r>
+                        <a:rPr lang="en-US" sz="1150" dirty="0">
+                          <a:solidFill>
+                            <a:srgbClr val="161616"/>
+                          </a:solidFill>
+                          <a:latin typeface="Calibri" pitchFamily="34" charset="0"/>
+                          <a:ea typeface="Calibri" pitchFamily="34" charset="-122"/>
+                          <a:cs typeface="Calibri" pitchFamily="34" charset="-120"/>
+                        </a:rPr>
+                        <a:t>Longest shortest-path in the giant component</a:t>
+                      </a:r>
+                      <a:endParaRPr lang="en-US" sz="1150" dirty="0">
+                        <a:latin typeface="Calibri" charset="0"/>
+                        <a:ea typeface="Calibri" charset="0"/>
+                        <a:cs typeface="Calibri" charset="0"/>
+                      </a:endParaRPr>
+                    </a:p>
+                  </a:txBody>
+                  <a:tcPr marL="91440" marR="91440" marT="45720" marB="45720" anchor="ctr">
+                    <a:lnL w="6350" cap="flat" cmpd="sng" algn="ctr">
+                      <a:solidFill>
+                        <a:srgbClr val="E1E1DA"/>
+                      </a:solidFill>
+                      <a:prstDash val="solid"/>
+                      <a:round/>
+                      <a:headEnd type="none" w="med" len="med"/>
+                      <a:tailEnd type="none" w="med" len="med"/>
+                    </a:lnL>
+                    <a:lnR w="6350" cap="flat" cmpd="sng" algn="ctr">
+                      <a:solidFill>
+                        <a:srgbClr val="E1E1DA"/>
+                      </a:solidFill>
+                      <a:prstDash val="solid"/>
+                      <a:round/>
+                      <a:headEnd type="none" w="med" len="med"/>
+                      <a:tailEnd type="none" w="med" len="med"/>
+                    </a:lnR>
+                    <a:lnT w="6350" cap="flat" cmpd="sng" algn="ctr">
+                      <a:solidFill>
+                        <a:srgbClr val="E1E1DA"/>
+                      </a:solidFill>
+                      <a:prstDash val="solid"/>
+                      <a:round/>
+                      <a:headEnd type="none" w="med" len="med"/>
+                      <a:tailEnd type="none" w="med" len="med"/>
+                    </a:lnT>
+                    <a:lnB w="6350" cap="flat" cmpd="sng" algn="ctr">
+                      <a:solidFill>
+                        <a:srgbClr val="E1E1DA"/>
+                      </a:solidFill>
+                      <a:prstDash val="solid"/>
+                      <a:round/>
+                      <a:headEnd type="none" w="med" len="med"/>
+                      <a:tailEnd type="none" w="med" len="med"/>
+                    </a:lnB>
+                  </a:tcPr>
+                </a:tc>
+              </a:tr>
+              <a:tr h="329184">
+                <a:tc>
+                  <a:txBody>
+                    <a:bodyPr/>
+                    <a:lstStyle/>
+                    <a:p>
+                      <a:pPr algn="l" indent="0" marL="0">
+                        <a:buNone/>
+                      </a:pPr>
+                      <a:r>
+                        <a:rPr lang="en-US" sz="1150" dirty="0">
+                          <a:solidFill>
+                            <a:srgbClr val="161616"/>
+                          </a:solidFill>
+                          <a:latin typeface="Calibri" pitchFamily="34" charset="0"/>
+                          <a:ea typeface="Calibri" pitchFamily="34" charset="-122"/>
+                          <a:cs typeface="Calibri" pitchFamily="34" charset="-120"/>
+                        </a:rPr>
+                        <a:t>Degeneracy (max k-core)</a:t>
+                      </a:r>
+                      <a:endParaRPr lang="en-US" sz="1150" dirty="0">
+                        <a:latin typeface="Calibri" charset="0"/>
+                        <a:ea typeface="Calibri" charset="0"/>
+                        <a:cs typeface="Calibri" charset="0"/>
+                      </a:endParaRPr>
+                    </a:p>
+                  </a:txBody>
+                  <a:tcPr marL="91440" marR="91440" marT="45720" marB="45720" anchor="ctr">
+                    <a:lnL w="6350" cap="flat" cmpd="sng" algn="ctr">
+                      <a:solidFill>
+                        <a:srgbClr val="E1E1DA"/>
+                      </a:solidFill>
+                      <a:prstDash val="solid"/>
+                      <a:round/>
+                      <a:headEnd type="none" w="med" len="med"/>
+                      <a:tailEnd type="none" w="med" len="med"/>
+                    </a:lnL>
+                    <a:lnR w="6350" cap="flat" cmpd="sng" algn="ctr">
+                      <a:solidFill>
+                        <a:srgbClr val="E1E1DA"/>
+                      </a:solidFill>
+                      <a:prstDash val="solid"/>
+                      <a:round/>
+                      <a:headEnd type="none" w="med" len="med"/>
+                      <a:tailEnd type="none" w="med" len="med"/>
+                    </a:lnR>
+                    <a:lnT w="6350" cap="flat" cmpd="sng" algn="ctr">
+                      <a:solidFill>
+                        <a:srgbClr val="E1E1DA"/>
+                      </a:solidFill>
+                      <a:prstDash val="solid"/>
+                      <a:round/>
+                      <a:headEnd type="none" w="med" len="med"/>
+                      <a:tailEnd type="none" w="med" len="med"/>
+                    </a:lnT>
+                    <a:lnB w="6350" cap="flat" cmpd="sng" algn="ctr">
+                      <a:solidFill>
+                        <a:srgbClr val="E1E1DA"/>
+                      </a:solidFill>
+                      <a:prstDash val="solid"/>
+                      <a:round/>
+                      <a:headEnd type="none" w="med" len="med"/>
+                      <a:tailEnd type="none" w="med" len="med"/>
+                    </a:lnB>
+                  </a:tcPr>
+                </a:tc>
+                <a:tc>
+                  <a:txBody>
+                    <a:bodyPr/>
+                    <a:lstStyle/>
+                    <a:p>
+                      <a:pPr algn="l" indent="0" marL="0">
+                        <a:buNone/>
+                      </a:pPr>
+                      <a:r>
+                        <a:rPr lang="en-US" sz="1150" dirty="0">
+                          <a:solidFill>
+                            <a:srgbClr val="161616"/>
+                          </a:solidFill>
+                          <a:latin typeface="Calibri" pitchFamily="34" charset="0"/>
+                          <a:ea typeface="Calibri" pitchFamily="34" charset="-122"/>
+                          <a:cs typeface="Calibri" pitchFamily="34" charset="-120"/>
+                        </a:rPr>
+                        <a:t>14</a:t>
+                      </a:r>
+                      <a:endParaRPr lang="en-US" sz="1150" dirty="0">
+                        <a:latin typeface="Calibri" charset="0"/>
+                        <a:ea typeface="Calibri" charset="0"/>
+                        <a:cs typeface="Calibri" charset="0"/>
+                      </a:endParaRPr>
+                    </a:p>
+                  </a:txBody>
+                  <a:tcPr marL="91440" marR="91440" marT="45720" marB="45720" anchor="ctr">
+                    <a:lnL w="6350" cap="flat" cmpd="sng" algn="ctr">
+                      <a:solidFill>
+                        <a:srgbClr val="E1E1DA"/>
+                      </a:solidFill>
+                      <a:prstDash val="solid"/>
+                      <a:round/>
+                      <a:headEnd type="none" w="med" len="med"/>
+                      <a:tailEnd type="none" w="med" len="med"/>
+                    </a:lnL>
+                    <a:lnR w="6350" cap="flat" cmpd="sng" algn="ctr">
+                      <a:solidFill>
+                        <a:srgbClr val="E1E1DA"/>
+                      </a:solidFill>
+                      <a:prstDash val="solid"/>
+                      <a:round/>
+                      <a:headEnd type="none" w="med" len="med"/>
+                      <a:tailEnd type="none" w="med" len="med"/>
+                    </a:lnR>
+                    <a:lnT w="6350" cap="flat" cmpd="sng" algn="ctr">
+                      <a:solidFill>
+                        <a:srgbClr val="E1E1DA"/>
+                      </a:solidFill>
+                      <a:prstDash val="solid"/>
+                      <a:round/>
+                      <a:headEnd type="none" w="med" len="med"/>
+                      <a:tailEnd type="none" w="med" len="med"/>
+                    </a:lnT>
+                    <a:lnB w="6350" cap="flat" cmpd="sng" algn="ctr">
+                      <a:solidFill>
+                        <a:srgbClr val="E1E1DA"/>
+                      </a:solidFill>
+                      <a:prstDash val="solid"/>
+                      <a:round/>
+                      <a:headEnd type="none" w="med" len="med"/>
+                      <a:tailEnd type="none" w="med" len="med"/>
+                    </a:lnB>
+                  </a:tcPr>
+                </a:tc>
+                <a:tc>
+                  <a:txBody>
+                    <a:bodyPr/>
+                    <a:lstStyle/>
+                    <a:p>
+                      <a:pPr algn="l" indent="0" marL="0">
+                        <a:buNone/>
+                      </a:pPr>
+                      <a:r>
+                        <a:rPr lang="en-US" sz="1150" dirty="0">
+                          <a:solidFill>
+                            <a:srgbClr val="161616"/>
+                          </a:solidFill>
+                          <a:latin typeface="Calibri" pitchFamily="34" charset="0"/>
+                          <a:ea typeface="Calibri" pitchFamily="34" charset="-122"/>
+                          <a:cs typeface="Calibri" pitchFamily="34" charset="-120"/>
+                        </a:rPr>
+                        <a:t>19.7</a:t>
+                      </a:r>
+                      <a:endParaRPr lang="en-US" sz="1150" dirty="0">
+                        <a:latin typeface="Calibri" charset="0"/>
+                        <a:ea typeface="Calibri" charset="0"/>
+                        <a:cs typeface="Calibri" charset="0"/>
+                      </a:endParaRPr>
+                    </a:p>
+                  </a:txBody>
+                  <a:tcPr marL="91440" marR="91440" marT="45720" marB="45720" anchor="ctr">
+                    <a:lnL w="6350" cap="flat" cmpd="sng" algn="ctr">
+                      <a:solidFill>
+                        <a:srgbClr val="E1E1DA"/>
+                      </a:solidFill>
+                      <a:prstDash val="solid"/>
+                      <a:round/>
+                      <a:headEnd type="none" w="med" len="med"/>
+                      <a:tailEnd type="none" w="med" len="med"/>
+                    </a:lnL>
+                    <a:lnR w="6350" cap="flat" cmpd="sng" algn="ctr">
+                      <a:solidFill>
+                        <a:srgbClr val="E1E1DA"/>
+                      </a:solidFill>
+                      <a:prstDash val="solid"/>
+                      <a:round/>
+                      <a:headEnd type="none" w="med" len="med"/>
+                      <a:tailEnd type="none" w="med" len="med"/>
+                    </a:lnR>
+                    <a:lnT w="6350" cap="flat" cmpd="sng" algn="ctr">
+                      <a:solidFill>
+                        <a:srgbClr val="E1E1DA"/>
+                      </a:solidFill>
+                      <a:prstDash val="solid"/>
+                      <a:round/>
+                      <a:headEnd type="none" w="med" len="med"/>
+                      <a:tailEnd type="none" w="med" len="med"/>
+                    </a:lnT>
+                    <a:lnB w="6350" cap="flat" cmpd="sng" algn="ctr">
+                      <a:solidFill>
+                        <a:srgbClr val="E1E1DA"/>
+                      </a:solidFill>
+                      <a:prstDash val="solid"/>
+                      <a:round/>
+                      <a:headEnd type="none" w="med" len="med"/>
+                      <a:tailEnd type="none" w="med" len="med"/>
+                    </a:lnB>
+                  </a:tcPr>
+                </a:tc>
+                <a:tc>
+                  <a:txBody>
+                    <a:bodyPr/>
+                    <a:lstStyle/>
+                    <a:p>
+                      <a:pPr algn="l" indent="0" marL="0">
+                        <a:buNone/>
+                      </a:pPr>
+                      <a:r>
+                        <a:rPr lang="en-US" sz="1150" dirty="0">
+                          <a:solidFill>
+                            <a:srgbClr val="161616"/>
+                          </a:solidFill>
+                          <a:latin typeface="Calibri" pitchFamily="34" charset="0"/>
+                          <a:ea typeface="Calibri" pitchFamily="34" charset="-122"/>
+                          <a:cs typeface="Calibri" pitchFamily="34" charset="-120"/>
+                        </a:rPr>
+                        <a:t>A dense core of mutually-linked tweets</a:t>
+                      </a:r>
+                      <a:endParaRPr lang="en-US" sz="1150" dirty="0">
+                        <a:latin typeface="Calibri" charset="0"/>
+                        <a:ea typeface="Calibri" charset="0"/>
+                        <a:cs typeface="Calibri" charset="0"/>
+                      </a:endParaRPr>
+                    </a:p>
+                  </a:txBody>
+                  <a:tcPr marL="91440" marR="91440" marT="45720" marB="45720" anchor="ctr">
+                    <a:lnL w="6350" cap="flat" cmpd="sng" algn="ctr">
+                      <a:solidFill>
+                        <a:srgbClr val="E1E1DA"/>
+                      </a:solidFill>
+                      <a:prstDash val="solid"/>
+                      <a:round/>
+                      <a:headEnd type="none" w="med" len="med"/>
+                      <a:tailEnd type="none" w="med" len="med"/>
+                    </a:lnL>
+                    <a:lnR w="6350" cap="flat" cmpd="sng" algn="ctr">
+                      <a:solidFill>
+                        <a:srgbClr val="E1E1DA"/>
+                      </a:solidFill>
+                      <a:prstDash val="solid"/>
+                      <a:round/>
+                      <a:headEnd type="none" w="med" len="med"/>
+                      <a:tailEnd type="none" w="med" len="med"/>
+                    </a:lnR>
+                    <a:lnT w="6350" cap="flat" cmpd="sng" algn="ctr">
+                      <a:solidFill>
+                        <a:srgbClr val="E1E1DA"/>
+                      </a:solidFill>
+                      <a:prstDash val="solid"/>
+                      <a:round/>
+                      <a:headEnd type="none" w="med" len="med"/>
+                      <a:tailEnd type="none" w="med" len="med"/>
+                    </a:lnT>
+                    <a:lnB w="6350" cap="flat" cmpd="sng" algn="ctr">
+                      <a:solidFill>
+                        <a:srgbClr val="E1E1DA"/>
+                      </a:solidFill>
+                      <a:prstDash val="solid"/>
+                      <a:round/>
+                      <a:headEnd type="none" w="med" len="med"/>
+                      <a:tailEnd type="none" w="med" len="med"/>
+                    </a:lnB>
+                  </a:tcPr>
+                </a:tc>
+              </a:tr>
+              <a:tr h="329184">
+                <a:tc>
+                  <a:txBody>
+                    <a:bodyPr/>
+                    <a:lstStyle/>
+                    <a:p>
+                      <a:pPr algn="l" indent="0" marL="0">
+                        <a:buNone/>
+                      </a:pPr>
+                      <a:r>
+                        <a:rPr lang="en-US" sz="1150" dirty="0">
+                          <a:solidFill>
+                            <a:srgbClr val="161616"/>
+                          </a:solidFill>
+                          <a:latin typeface="Calibri" pitchFamily="34" charset="0"/>
+                          <a:ea typeface="Calibri" pitchFamily="34" charset="-122"/>
+                          <a:cs typeface="Calibri" pitchFamily="34" charset="-120"/>
+                        </a:rPr>
+                        <a:t>Giant component</a:t>
+                      </a:r>
+                      <a:endParaRPr lang="en-US" sz="1150" dirty="0">
+                        <a:latin typeface="Calibri" charset="0"/>
+                        <a:ea typeface="Calibri" charset="0"/>
+                        <a:cs typeface="Calibri" charset="0"/>
+                      </a:endParaRPr>
+                    </a:p>
+                  </a:txBody>
+                  <a:tcPr marL="91440" marR="91440" marT="45720" marB="45720" anchor="ctr">
+                    <a:lnL w="6350" cap="flat" cmpd="sng" algn="ctr">
+                      <a:solidFill>
+                        <a:srgbClr val="E1E1DA"/>
+                      </a:solidFill>
+                      <a:prstDash val="solid"/>
+                      <a:round/>
+                      <a:headEnd type="none" w="med" len="med"/>
+                      <a:tailEnd type="none" w="med" len="med"/>
+                    </a:lnL>
+                    <a:lnR w="6350" cap="flat" cmpd="sng" algn="ctr">
+                      <a:solidFill>
+                        <a:srgbClr val="E1E1DA"/>
+                      </a:solidFill>
+                      <a:prstDash val="solid"/>
+                      <a:round/>
+                      <a:headEnd type="none" w="med" len="med"/>
+                      <a:tailEnd type="none" w="med" len="med"/>
+                    </a:lnR>
+                    <a:lnT w="6350" cap="flat" cmpd="sng" algn="ctr">
+                      <a:solidFill>
+                        <a:srgbClr val="E1E1DA"/>
+                      </a:solidFill>
+                      <a:prstDash val="solid"/>
+                      <a:round/>
+                      <a:headEnd type="none" w="med" len="med"/>
+                      <a:tailEnd type="none" w="med" len="med"/>
+                    </a:lnT>
+                    <a:lnB w="6350" cap="flat" cmpd="sng" algn="ctr">
+                      <a:solidFill>
+                        <a:srgbClr val="E1E1DA"/>
+                      </a:solidFill>
+                      <a:prstDash val="solid"/>
+                      <a:round/>
+                      <a:headEnd type="none" w="med" len="med"/>
+                      <a:tailEnd type="none" w="med" len="med"/>
+                    </a:lnB>
+                  </a:tcPr>
+                </a:tc>
+                <a:tc>
+                  <a:txBody>
+                    <a:bodyPr/>
+                    <a:lstStyle/>
+                    <a:p>
+                      <a:pPr algn="l" indent="0" marL="0">
+                        <a:buNone/>
+                      </a:pPr>
+                      <a:r>
+                        <a:rPr lang="en-US" sz="1150" dirty="0">
+                          <a:solidFill>
+                            <a:srgbClr val="161616"/>
+                          </a:solidFill>
+                          <a:latin typeface="Calibri" pitchFamily="34" charset="0"/>
+                          <a:ea typeface="Calibri" pitchFamily="34" charset="-122"/>
+                          <a:cs typeface="Calibri" pitchFamily="34" charset="-120"/>
+                        </a:rPr>
+                        <a:t>65%</a:t>
+                      </a:r>
+                      <a:endParaRPr lang="en-US" sz="1150" dirty="0">
+                        <a:latin typeface="Calibri" charset="0"/>
+                        <a:ea typeface="Calibri" charset="0"/>
+                        <a:cs typeface="Calibri" charset="0"/>
+                      </a:endParaRPr>
+                    </a:p>
+                  </a:txBody>
+                  <a:tcPr marL="91440" marR="91440" marT="45720" marB="45720" anchor="ctr">
+                    <a:lnL w="6350" cap="flat" cmpd="sng" algn="ctr">
+                      <a:solidFill>
+                        <a:srgbClr val="E1E1DA"/>
+                      </a:solidFill>
+                      <a:prstDash val="solid"/>
+                      <a:round/>
+                      <a:headEnd type="none" w="med" len="med"/>
+                      <a:tailEnd type="none" w="med" len="med"/>
+                    </a:lnL>
+                    <a:lnR w="6350" cap="flat" cmpd="sng" algn="ctr">
+                      <a:solidFill>
+                        <a:srgbClr val="E1E1DA"/>
+                      </a:solidFill>
+                      <a:prstDash val="solid"/>
+                      <a:round/>
+                      <a:headEnd type="none" w="med" len="med"/>
+                      <a:tailEnd type="none" w="med" len="med"/>
+                    </a:lnR>
+                    <a:lnT w="6350" cap="flat" cmpd="sng" algn="ctr">
+                      <a:solidFill>
+                        <a:srgbClr val="E1E1DA"/>
+                      </a:solidFill>
+                      <a:prstDash val="solid"/>
+                      <a:round/>
+                      <a:headEnd type="none" w="med" len="med"/>
+                      <a:tailEnd type="none" w="med" len="med"/>
+                    </a:lnT>
+                    <a:lnB w="6350" cap="flat" cmpd="sng" algn="ctr">
+                      <a:solidFill>
+                        <a:srgbClr val="E1E1DA"/>
+                      </a:solidFill>
+                      <a:prstDash val="solid"/>
+                      <a:round/>
+                      <a:headEnd type="none" w="med" len="med"/>
+                      <a:tailEnd type="none" w="med" len="med"/>
+                    </a:lnB>
+                  </a:tcPr>
+                </a:tc>
+                <a:tc>
+                  <a:txBody>
+                    <a:bodyPr/>
+                    <a:lstStyle/>
+                    <a:p>
+                      <a:pPr algn="l" indent="0" marL="0">
+                        <a:buNone/>
+                      </a:pPr>
+                      <a:r>
+                        <a:rPr lang="en-US" sz="1150" dirty="0">
+                          <a:solidFill>
+                            <a:srgbClr val="161616"/>
+                          </a:solidFill>
+                          <a:latin typeface="Calibri" pitchFamily="34" charset="0"/>
+                          <a:ea typeface="Calibri" pitchFamily="34" charset="-122"/>
+                          <a:cs typeface="Calibri" pitchFamily="34" charset="-120"/>
+                        </a:rPr>
+                        <a:t>45%</a:t>
+                      </a:r>
+                      <a:endParaRPr lang="en-US" sz="1150" dirty="0">
+                        <a:latin typeface="Calibri" charset="0"/>
+                        <a:ea typeface="Calibri" charset="0"/>
+                        <a:cs typeface="Calibri" charset="0"/>
+                      </a:endParaRPr>
+                    </a:p>
+                  </a:txBody>
+                  <a:tcPr marL="91440" marR="91440" marT="45720" marB="45720" anchor="ctr">
+                    <a:lnL w="6350" cap="flat" cmpd="sng" algn="ctr">
+                      <a:solidFill>
+                        <a:srgbClr val="E1E1DA"/>
+                      </a:solidFill>
+                      <a:prstDash val="solid"/>
+                      <a:round/>
+                      <a:headEnd type="none" w="med" len="med"/>
+                      <a:tailEnd type="none" w="med" len="med"/>
+                    </a:lnL>
+                    <a:lnR w="6350" cap="flat" cmpd="sng" algn="ctr">
+                      <a:solidFill>
+                        <a:srgbClr val="E1E1DA"/>
+                      </a:solidFill>
+                      <a:prstDash val="solid"/>
+                      <a:round/>
+                      <a:headEnd type="none" w="med" len="med"/>
+                      <a:tailEnd type="none" w="med" len="med"/>
+                    </a:lnR>
+                    <a:lnT w="6350" cap="flat" cmpd="sng" algn="ctr">
+                      <a:solidFill>
+                        <a:srgbClr val="E1E1DA"/>
+                      </a:solidFill>
+                      <a:prstDash val="solid"/>
+                      <a:round/>
+                      <a:headEnd type="none" w="med" len="med"/>
+                      <a:tailEnd type="none" w="med" len="med"/>
+                    </a:lnT>
+                    <a:lnB w="6350" cap="flat" cmpd="sng" algn="ctr">
+                      <a:solidFill>
+                        <a:srgbClr val="E1E1DA"/>
+                      </a:solidFill>
+                      <a:prstDash val="solid"/>
+                      <a:round/>
+                      <a:headEnd type="none" w="med" len="med"/>
+                      <a:tailEnd type="none" w="med" len="med"/>
+                    </a:lnB>
+                  </a:tcPr>
+                </a:tc>
+                <a:tc>
+                  <a:txBody>
+                    <a:bodyPr/>
+                    <a:lstStyle/>
+                    <a:p>
+                      <a:pPr algn="l" indent="0" marL="0">
+                        <a:buNone/>
+                      </a:pPr>
+                      <a:r>
+                        <a:rPr lang="en-US" sz="1150" dirty="0">
+                          <a:solidFill>
+                            <a:srgbClr val="161616"/>
+                          </a:solidFill>
+                          <a:latin typeface="Calibri" pitchFamily="34" charset="0"/>
+                          <a:ea typeface="Calibri" pitchFamily="34" charset="-122"/>
+                          <a:cs typeface="Calibri" pitchFamily="34" charset="-120"/>
+                        </a:rPr>
+                        <a:t>Rest = small components / singleton events</a:t>
+                      </a:r>
+                      <a:endParaRPr lang="en-US" sz="1150" dirty="0">
+                        <a:latin typeface="Calibri" charset="0"/>
+                        <a:ea typeface="Calibri" charset="0"/>
+                        <a:cs typeface="Calibri" charset="0"/>
+                      </a:endParaRPr>
+                    </a:p>
+                  </a:txBody>
+                  <a:tcPr marL="91440" marR="91440" marT="45720" marB="45720" anchor="ctr">
+                    <a:lnL w="6350" cap="flat" cmpd="sng" algn="ctr">
+                      <a:solidFill>
+                        <a:srgbClr val="E1E1DA"/>
+                      </a:solidFill>
+                      <a:prstDash val="solid"/>
+                      <a:round/>
+                      <a:headEnd type="none" w="med" len="med"/>
+                      <a:tailEnd type="none" w="med" len="med"/>
+                    </a:lnL>
+                    <a:lnR w="6350" cap="flat" cmpd="sng" algn="ctr">
+                      <a:solidFill>
+                        <a:srgbClr val="E1E1DA"/>
+                      </a:solidFill>
+                      <a:prstDash val="solid"/>
+                      <a:round/>
+                      <a:headEnd type="none" w="med" len="med"/>
+                      <a:tailEnd type="none" w="med" len="med"/>
+                    </a:lnR>
+                    <a:lnT w="6350" cap="flat" cmpd="sng" algn="ctr">
+                      <a:solidFill>
+                        <a:srgbClr val="E1E1DA"/>
+                      </a:solidFill>
+                      <a:prstDash val="solid"/>
+                      <a:round/>
+                      <a:headEnd type="none" w="med" len="med"/>
+                      <a:tailEnd type="none" w="med" len="med"/>
+                    </a:lnT>
+                    <a:lnB w="6350" cap="flat" cmpd="sng" algn="ctr">
+                      <a:solidFill>
+                        <a:srgbClr val="E1E1DA"/>
+                      </a:solidFill>
+                      <a:prstDash val="solid"/>
+                      <a:round/>
+                      <a:headEnd type="none" w="med" len="med"/>
+                      <a:tailEnd type="none" w="med" len="med"/>
+                    </a:lnB>
+                  </a:tcPr>
+                </a:tc>
+              </a:tr>
+            </a:tbl>
+          </a:graphicData>
+        </a:graphic>
+      </p:graphicFrame>
+      <p:sp>
+        <p:nvSpPr>
+          <p:cNvPr id="7" name="Shape 4"/>
+          <p:cNvSpPr/>
+          <p:nvPr/>
+        </p:nvSpPr>
+        <p:spPr>
+          <a:xfrm>
+            <a:off x="822960" y="5440680"/>
+            <a:ext cx="10515600" cy="868680"/>
+          </a:xfrm>
+          <a:prstGeom prst="rect">
+            <a:avLst/>
+          </a:prstGeom>
+          <a:ln w="19050">
+            <a:solidFill>
+              <a:srgbClr val="161616"/>
+            </a:solidFill>
+            <a:prstDash val="dash"/>
+          </a:ln>
+        </p:spPr>
+      </p:sp>
+      <p:sp>
+        <p:nvSpPr>
+          <p:cNvPr id="8" name="Text 5"/>
+          <p:cNvSpPr txBox="1"/>
+          <p:nvPr/>
+        </p:nvSpPr>
+        <p:spPr>
+          <a:xfrm>
+            <a:off x="1051560" y="5504688"/>
+            <a:ext cx="10058400" cy="749808"/>
           </a:xfrm>
           <a:prstGeom prst="rect">
             <a:avLst/>
@@ -14574,73 +17416,30 @@
           <a:lstStyle/>
           <a:p>
             <a:pPr algn="ctr" indent="0" marL="0">
-              <a:buNone/>
-            </a:pPr>
-            <a:r>
-              <a:rPr lang="en-US" sz="950" b="1" dirty="0">
-                <a:solidFill>
-                  <a:srgbClr val="161616"/>
+              <a:lnSpc>
+                <a:spcPct val="112000"/>
+              </a:lnSpc>
+              <a:buNone/>
+            </a:pPr>
+            <a:r>
+              <a:rPr lang="en-US" sz="1200" b="1" dirty="0">
+                <a:solidFill>
+                  <a:srgbClr val="1A9E99"/>
                 </a:solidFill>
                 <a:latin typeface="Calibri" pitchFamily="34" charset="0"/>
                 <a:ea typeface="Calibri" pitchFamily="34" charset="-122"/>
                 <a:cs typeface="Calibri" pitchFamily="34" charset="-120"/>
               </a:rPr>
-              <a:t>1 · Metrics over 22 blocks</a:t>
-            </a:r>
-            <a:endParaRPr lang="en-US" sz="950" dirty="0"/>
-          </a:p>
-        </p:txBody>
-      </p:sp>
-      <p:pic>
-        <p:nvPicPr>
-          <p:cNvPr id="8" name="Image 1" descr="D:/Chrona/real_analysis_outputs/dashboard/tab2_embeddings.png">    </p:cNvPr>
-          <p:cNvPicPr>
-            <a:picLocks noChangeAspect="1"/>
-          </p:cNvPicPr>
-          <p:nvPr/>
-        </p:nvPicPr>
-        <p:blipFill>
-          <a:blip r:embed="rId2"/>
-          <a:stretch>
-            <a:fillRect/>
-          </a:stretch>
-        </p:blipFill>
-        <p:spPr>
-          <a:xfrm>
-            <a:off x="4288536" y="1371600"/>
-            <a:ext cx="3310128" cy="2068830"/>
-          </a:xfrm>
-          <a:prstGeom prst="rect">
-            <a:avLst/>
-          </a:prstGeom>
-        </p:spPr>
-      </p:pic>
-      <p:sp>
-        <p:nvSpPr>
-          <p:cNvPr id="9" name="Text 5"/>
-          <p:cNvSpPr txBox="1"/>
-          <p:nvPr/>
-        </p:nvSpPr>
-        <p:spPr>
-          <a:xfrm>
-            <a:off x="4288536" y="3477006"/>
-            <a:ext cx="3310128" cy="274320"/>
-          </a:xfrm>
-          <a:prstGeom prst="rect">
-            <a:avLst/>
-          </a:prstGeom>
-          <a:noFill/>
-          <a:ln/>
-        </p:spPr>
-        <p:txBody>
-          <a:bodyPr wrap="square" lIns="0" tIns="0" rIns="0" bIns="0" rtlCol="0" anchor="ctr"/>
-          <a:lstStyle/>
-          <a:p>
+              <a:t>Reading it:  </a:t>
+            </a:r>
             <a:pPr algn="ctr" indent="0" marL="0">
-              <a:buNone/>
-            </a:pPr>
-            <a:r>
-              <a:rPr lang="en-US" sz="950" b="1" dirty="0">
+              <a:lnSpc>
+                <a:spcPct val="112000"/>
+              </a:lnSpc>
+              <a:buNone/>
+            </a:pPr>
+            <a:r>
+              <a:rPr lang="en-US" sz="1200" dirty="0">
                 <a:solidFill>
                   <a:srgbClr val="161616"/>
                 </a:solidFill>
@@ -14648,62 +17447,16 @@
                 <a:ea typeface="Calibri" pitchFamily="34" charset="-122"/>
                 <a:cs typeface="Calibri" pitchFamily="34" charset="-120"/>
               </a:rPr>
-              <a:t>2 · 3D DistilBERT embedding space</a:t>
-            </a:r>
-            <a:endParaRPr lang="en-US" sz="950" dirty="0"/>
-          </a:p>
-        </p:txBody>
-      </p:sp>
-      <p:pic>
-        <p:nvPicPr>
-          <p:cNvPr id="10" name="Image 2" descr="D:/Chrona/real_analysis_outputs/dashboard/tab3_topology.png">    </p:cNvPr>
-          <p:cNvPicPr>
-            <a:picLocks noChangeAspect="1"/>
-          </p:cNvPicPr>
-          <p:nvPr/>
-        </p:nvPicPr>
-        <p:blipFill>
-          <a:blip r:embed="rId3"/>
-          <a:stretch>
-            <a:fillRect/>
-          </a:stretch>
-        </p:blipFill>
-        <p:spPr>
-          <a:xfrm>
-            <a:off x="7754112" y="1371600"/>
-            <a:ext cx="3310128" cy="2068830"/>
-          </a:xfrm>
-          <a:prstGeom prst="rect">
-            <a:avLst/>
-          </a:prstGeom>
-        </p:spPr>
-      </p:pic>
-      <p:sp>
-        <p:nvSpPr>
-          <p:cNvPr id="11" name="Text 6"/>
-          <p:cNvSpPr txBox="1"/>
-          <p:nvPr/>
-        </p:nvSpPr>
-        <p:spPr>
-          <a:xfrm>
-            <a:off x="7754112" y="3477006"/>
-            <a:ext cx="3310128" cy="274320"/>
-          </a:xfrm>
-          <a:prstGeom prst="rect">
-            <a:avLst/>
-          </a:prstGeom>
-          <a:noFill/>
-          <a:ln/>
-        </p:spPr>
-        <p:txBody>
-          <a:bodyPr wrap="square" lIns="0" tIns="0" rIns="0" bIns="0" rtlCol="0" anchor="ctr"/>
-          <a:lstStyle/>
-          <a:p>
+              <a:t>high clustering (0.75) + short paths (2.9) = a </a:t>
+            </a:r>
             <a:pPr algn="ctr" indent="0" marL="0">
-              <a:buNone/>
-            </a:pPr>
-            <a:r>
-              <a:rPr lang="en-US" sz="950" b="1" dirty="0">
+              <a:lnSpc>
+                <a:spcPct val="112000"/>
+              </a:lnSpc>
+              <a:buNone/>
+            </a:pPr>
+            <a:r>
+              <a:rPr lang="en-US" sz="1200" b="1" dirty="0">
                 <a:solidFill>
                   <a:srgbClr val="161616"/>
                 </a:solidFill>
@@ -14711,62 +17464,16 @@
                 <a:ea typeface="Calibri" pitchFamily="34" charset="-122"/>
                 <a:cs typeface="Calibri" pitchFamily="34" charset="-120"/>
               </a:rPr>
-              <a:t>3 · Message topology map</a:t>
-            </a:r>
-            <a:endParaRPr lang="en-US" sz="950" dirty="0"/>
-          </a:p>
-        </p:txBody>
-      </p:sp>
-      <p:pic>
-        <p:nvPicPr>
-          <p:cNvPr id="12" name="Image 3" descr="D:/Chrona/real_analysis_outputs/dashboard/tab4_lifecycle.png">    </p:cNvPr>
-          <p:cNvPicPr>
-            <a:picLocks noChangeAspect="1"/>
-          </p:cNvPicPr>
-          <p:nvPr/>
-        </p:nvPicPr>
-        <p:blipFill>
-          <a:blip r:embed="rId4"/>
-          <a:stretch>
-            <a:fillRect/>
-          </a:stretch>
-        </p:blipFill>
-        <p:spPr>
-          <a:xfrm>
-            <a:off x="822960" y="3977640"/>
-            <a:ext cx="3310128" cy="2068830"/>
-          </a:xfrm>
-          <a:prstGeom prst="rect">
-            <a:avLst/>
-          </a:prstGeom>
-        </p:spPr>
-      </p:pic>
-      <p:sp>
-        <p:nvSpPr>
-          <p:cNvPr id="13" name="Text 7"/>
-          <p:cNvSpPr txBox="1"/>
-          <p:nvPr/>
-        </p:nvSpPr>
-        <p:spPr>
-          <a:xfrm>
-            <a:off x="822960" y="6083046"/>
-            <a:ext cx="3310128" cy="274320"/>
-          </a:xfrm>
-          <a:prstGeom prst="rect">
-            <a:avLst/>
-          </a:prstGeom>
-          <a:noFill/>
-          <a:ln/>
-        </p:spPr>
-        <p:txBody>
-          <a:bodyPr wrap="square" lIns="0" tIns="0" rIns="0" bIns="0" rtlCol="0" anchor="ctr"/>
-          <a:lstStyle/>
-          <a:p>
+              <a:t>small-world</a:t>
+            </a:r>
             <a:pPr algn="ctr" indent="0" marL="0">
-              <a:buNone/>
-            </a:pPr>
-            <a:r>
-              <a:rPr lang="en-US" sz="950" b="1" dirty="0">
+              <a:lnSpc>
+                <a:spcPct val="112000"/>
+              </a:lnSpc>
+              <a:buNone/>
+            </a:pPr>
+            <a:r>
+              <a:rPr lang="en-US" sz="1200" dirty="0">
                 <a:solidFill>
                   <a:srgbClr val="161616"/>
                 </a:solidFill>
@@ -14774,62 +17481,16 @@
                 <a:ea typeface="Calibri" pitchFamily="34" charset="-122"/>
                 <a:cs typeface="Calibri" pitchFamily="34" charset="-120"/>
               </a:rPr>
-              <a:t>4 · Event emergence &amp; decay</a:t>
-            </a:r>
-            <a:endParaRPr lang="en-US" sz="950" dirty="0"/>
-          </a:p>
-        </p:txBody>
-      </p:sp>
-      <p:pic>
-        <p:nvPicPr>
-          <p:cNvPr id="14" name="Image 4" descr="D:/Chrona/real_analysis_outputs/dashboard/tab5_nodefilter.png">    </p:cNvPr>
-          <p:cNvPicPr>
-            <a:picLocks noChangeAspect="1"/>
-          </p:cNvPicPr>
-          <p:nvPr/>
-        </p:nvPicPr>
-        <p:blipFill>
-          <a:blip r:embed="rId5"/>
-          <a:stretch>
-            <a:fillRect/>
-          </a:stretch>
-        </p:blipFill>
-        <p:spPr>
-          <a:xfrm>
-            <a:off x="4288536" y="3977640"/>
-            <a:ext cx="3310128" cy="2068830"/>
-          </a:xfrm>
-          <a:prstGeom prst="rect">
-            <a:avLst/>
-          </a:prstGeom>
-        </p:spPr>
-      </p:pic>
-      <p:sp>
-        <p:nvSpPr>
-          <p:cNvPr id="15" name="Text 8"/>
-          <p:cNvSpPr txBox="1"/>
-          <p:nvPr/>
-        </p:nvSpPr>
-        <p:spPr>
-          <a:xfrm>
-            <a:off x="4288536" y="6083046"/>
-            <a:ext cx="3310128" cy="274320"/>
-          </a:xfrm>
-          <a:prstGeom prst="rect">
-            <a:avLst/>
-          </a:prstGeom>
-          <a:noFill/>
-          <a:ln/>
-        </p:spPr>
-        <p:txBody>
-          <a:bodyPr wrap="square" lIns="0" tIns="0" rIns="0" bIns="0" rtlCol="0" anchor="ctr"/>
-          <a:lstStyle/>
-          <a:p>
+              <a:t> network; positive assortativity = </a:t>
+            </a:r>
             <a:pPr algn="ctr" indent="0" marL="0">
-              <a:buNone/>
-            </a:pPr>
-            <a:r>
-              <a:rPr lang="en-US" sz="950" b="1" dirty="0">
+              <a:lnSpc>
+                <a:spcPct val="112000"/>
+              </a:lnSpc>
+              <a:buNone/>
+            </a:pPr>
+            <a:r>
+              <a:rPr lang="en-US" sz="1200" b="1" dirty="0">
                 <a:solidFill>
                   <a:srgbClr val="161616"/>
                 </a:solidFill>
@@ -14837,118 +17498,32 @@
                 <a:ea typeface="Calibri" pitchFamily="34" charset="-122"/>
                 <a:cs typeface="Calibri" pitchFamily="34" charset="-120"/>
               </a:rPr>
-              <a:t>5 · Node-filter &amp; degree inspector</a:t>
-            </a:r>
-            <a:endParaRPr lang="en-US" sz="950" dirty="0"/>
-          </a:p>
-        </p:txBody>
-      </p:sp>
-      <p:sp>
-        <p:nvSpPr>
-          <p:cNvPr id="16" name="Shape 9"/>
-          <p:cNvSpPr/>
-          <p:nvPr/>
-        </p:nvSpPr>
-        <p:spPr>
-          <a:xfrm>
-            <a:off x="7754112" y="3977640"/>
-            <a:ext cx="3310128" cy="2068830"/>
-          </a:xfrm>
-          <a:prstGeom prst="roundRect">
-            <a:avLst>
-              <a:gd name="adj" fmla="val 4420"/>
-            </a:avLst>
-          </a:prstGeom>
-          <a:solidFill>
-            <a:srgbClr val="E9F4AE"/>
-          </a:solidFill>
-          <a:ln/>
-        </p:spPr>
-      </p:sp>
-      <p:sp>
-        <p:nvSpPr>
-          <p:cNvPr id="17" name="Text 10"/>
-          <p:cNvSpPr txBox="1"/>
-          <p:nvPr/>
-        </p:nvSpPr>
-        <p:spPr>
-          <a:xfrm>
-            <a:off x="7955280" y="4142232"/>
-            <a:ext cx="2907792" cy="365760"/>
-          </a:xfrm>
-          <a:prstGeom prst="rect">
-            <a:avLst/>
-          </a:prstGeom>
-          <a:noFill/>
-          <a:ln/>
-        </p:spPr>
-        <p:txBody>
-          <a:bodyPr wrap="square" lIns="0" tIns="0" rIns="0" bIns="0" rtlCol="0" anchor="ctr"/>
-          <a:lstStyle/>
-          <a:p>
-            <a:pPr indent="0" marL="0">
-              <a:buNone/>
-            </a:pPr>
-            <a:r>
-              <a:rPr lang="en-US" sz="1300" b="1" dirty="0">
-                <a:solidFill>
-                  <a:srgbClr val="161616"/>
-                </a:solidFill>
-                <a:latin typeface="Arial" pitchFamily="34" charset="0"/>
-                <a:ea typeface="Arial" pitchFamily="34" charset="-122"/>
-                <a:cs typeface="Arial" pitchFamily="34" charset="-120"/>
-              </a:rPr>
-              <a:t>Every tab is real</a:t>
-            </a:r>
-            <a:endParaRPr lang="en-US" sz="1300" dirty="0"/>
-          </a:p>
-        </p:txBody>
-      </p:sp>
-      <p:sp>
-        <p:nvSpPr>
-          <p:cNvPr id="18" name="Text 11"/>
-          <p:cNvSpPr txBox="1"/>
-          <p:nvPr/>
-        </p:nvSpPr>
-        <p:spPr>
-          <a:xfrm>
-            <a:off x="7955280" y="4544568"/>
-            <a:ext cx="2907792" cy="1383030"/>
-          </a:xfrm>
-          <a:prstGeom prst="rect">
-            <a:avLst/>
-          </a:prstGeom>
-          <a:noFill/>
-          <a:ln/>
-        </p:spPr>
-        <p:txBody>
-          <a:bodyPr wrap="square" lIns="0" tIns="0" rIns="0" bIns="0" rtlCol="0" anchor="ctr"/>
-          <a:lstStyle/>
-          <a:p>
-            <a:pPr indent="0" marL="0">
+              <a:t>hubs link to hubs</a:t>
+            </a:r>
+            <a:pPr algn="ctr" indent="0" marL="0">
               <a:lnSpc>
                 <a:spcPct val="112000"/>
               </a:lnSpc>
               <a:buNone/>
             </a:pPr>
             <a:r>
-              <a:rPr lang="en-US" sz="980" dirty="0">
-                <a:solidFill>
-                  <a:srgbClr val="3A3A3A"/>
+              <a:rPr lang="en-US" sz="1200" dirty="0">
+                <a:solidFill>
+                  <a:srgbClr val="161616"/>
                 </a:solidFill>
                 <a:latin typeface="Calibri" pitchFamily="34" charset="0"/>
                 <a:ea typeface="Calibri" pitchFamily="34" charset="-122"/>
                 <a:cs typeface="Calibri" pitchFamily="34" charset="-120"/>
               </a:rPr>
-              <a:t>real metric curve · real embeddings · real topology · real lifecycle · real degrees. Only the headline KPI tiles are the paper's static reference numbers.</a:t>
-            </a:r>
-            <a:endParaRPr lang="en-US" sz="980" dirty="0"/>
-          </a:p>
-        </p:txBody>
-      </p:sp>
-      <p:sp>
-        <p:nvSpPr>
-          <p:cNvPr id="19" name="Text 12"/>
+              <a:t>; with the heavy-tailed degree, these are the textbook signatures of a real-world social graph (Watts–Strogatz, preferential attachment).</a:t>
+            </a:r>
+            <a:endParaRPr lang="en-US" sz="1200" dirty="0"/>
+          </a:p>
+        </p:txBody>
+      </p:sp>
+      <p:sp>
+        <p:nvSpPr>
+          <p:cNvPr id="9" name="Text 6"/>
           <p:cNvSpPr txBox="1"/>
           <p:nvPr/>
         </p:nvSpPr>
@@ -15018,8 +17593,8 @@
         </p:nvSpPr>
         <p:spPr>
           <a:xfrm>
-            <a:off x="822960" y="502920"/>
-            <a:ext cx="1371600" cy="640080"/>
+            <a:off x="822960" y="457200"/>
+            <a:ext cx="1645920" cy="594360"/>
           </a:xfrm>
           <a:prstGeom prst="rect">
             <a:avLst/>
@@ -15035,7 +17610,7 @@
               <a:buNone/>
             </a:pPr>
             <a:r>
-              <a:rPr lang="en-US" sz="3400" b="1" dirty="0">
+              <a:rPr lang="en-US" sz="3000" b="1" dirty="0">
                 <a:solidFill>
                   <a:srgbClr val="161616"/>
                 </a:solidFill>
@@ -15043,9 +17618,9 @@
                 <a:ea typeface="Arial" pitchFamily="34" charset="-122"/>
                 <a:cs typeface="Arial" pitchFamily="34" charset="-120"/>
               </a:rPr>
-              <a:t>OUR </a:t>
-            </a:r>
-            <a:endParaRPr lang="en-US" sz="3400" dirty="0"/>
+              <a:t>NODE </a:t>
+            </a:r>
+            <a:endParaRPr lang="en-US" sz="3000" dirty="0"/>
           </a:p>
         </p:txBody>
       </p:sp>
@@ -15057,8 +17632,790 @@
         </p:nvSpPr>
         <p:spPr>
           <a:xfrm>
-            <a:off x="2103120" y="411480"/>
-            <a:ext cx="2377440" cy="777240"/>
+            <a:off x="2377440" y="530352"/>
+            <a:ext cx="3520440" cy="457200"/>
+          </a:xfrm>
+          <a:prstGeom prst="rect">
+            <a:avLst/>
+          </a:prstGeom>
+          <a:solidFill>
+            <a:srgbClr val="C9E93A"/>
+          </a:solidFill>
+          <a:ln/>
+        </p:spPr>
+      </p:sp>
+      <p:sp>
+        <p:nvSpPr>
+          <p:cNvPr id="4" name="Text 2"/>
+          <p:cNvSpPr txBox="1"/>
+          <p:nvPr/>
+        </p:nvSpPr>
+        <p:spPr>
+          <a:xfrm>
+            <a:off x="2423160" y="457200"/>
+            <a:ext cx="3520440" cy="594360"/>
+          </a:xfrm>
+          <a:prstGeom prst="rect">
+            <a:avLst/>
+          </a:prstGeom>
+          <a:noFill/>
+          <a:ln/>
+        </p:spPr>
+        <p:txBody>
+          <a:bodyPr wrap="none" lIns="0" tIns="0" rIns="0" bIns="0" rtlCol="0" anchor="ctr"/>
+          <a:lstStyle/>
+          <a:p>
+            <a:pPr indent="0" marL="0">
+              <a:buNone/>
+            </a:pPr>
+            <a:r>
+              <a:rPr lang="en-US" sz="3000" b="1" dirty="0">
+                <a:solidFill>
+                  <a:srgbClr val="161616"/>
+                </a:solidFill>
+                <a:latin typeface="Arial" pitchFamily="34" charset="0"/>
+                <a:ea typeface="Arial" pitchFamily="34" charset="-122"/>
+                <a:cs typeface="Arial" pitchFamily="34" charset="-120"/>
+              </a:rPr>
+              <a:t>CENTRALITY</a:t>
+            </a:r>
+            <a:endParaRPr lang="en-US" sz="3000" dirty="0"/>
+          </a:p>
+        </p:txBody>
+      </p:sp>
+      <p:sp>
+        <p:nvSpPr>
+          <p:cNvPr id="5" name="Text 3"/>
+          <p:cNvSpPr txBox="1"/>
+          <p:nvPr/>
+        </p:nvSpPr>
+        <p:spPr>
+          <a:xfrm>
+            <a:off x="822960" y="1078992"/>
+            <a:ext cx="10515600" cy="292608"/>
+          </a:xfrm>
+          <a:prstGeom prst="rect">
+            <a:avLst/>
+          </a:prstGeom>
+          <a:noFill/>
+          <a:ln/>
+        </p:spPr>
+        <p:txBody>
+          <a:bodyPr wrap="square" lIns="0" tIns="0" rIns="0" bIns="0" rtlCol="0" anchor="ctr"/>
+          <a:lstStyle/>
+          <a:p>
+            <a:pPr indent="0" marL="0">
+              <a:buNone/>
+            </a:pPr>
+            <a:r>
+              <a:rPr lang="en-US" sz="1200" i="1" dirty="0">
+                <a:solidFill>
+                  <a:srgbClr val="6B6B6B"/>
+                </a:solidFill>
+                <a:latin typeface="Calibri" pitchFamily="34" charset="0"/>
+                <a:ea typeface="Calibri" pitchFamily="34" charset="-122"/>
+                <a:cs typeface="Calibri" pitchFamily="34" charset="-120"/>
+              </a:rPr>
+              <a:t>Four ways to rank which tweets matter most — computed on real block 5.</a:t>
+            </a:r>
+            <a:endParaRPr lang="en-US" sz="1200" dirty="0"/>
+          </a:p>
+        </p:txBody>
+      </p:sp>
+      <p:sp>
+        <p:nvSpPr>
+          <p:cNvPr id="6" name="Shape 4"/>
+          <p:cNvSpPr/>
+          <p:nvPr/>
+        </p:nvSpPr>
+        <p:spPr>
+          <a:xfrm>
+            <a:off x="822960" y="1508760"/>
+            <a:ext cx="2542032" cy="3108960"/>
+          </a:xfrm>
+          <a:prstGeom prst="roundRect">
+            <a:avLst>
+              <a:gd name="adj" fmla="val 3597"/>
+            </a:avLst>
+          </a:prstGeom>
+          <a:solidFill>
+            <a:srgbClr val="FFFFFF"/>
+          </a:solidFill>
+          <a:ln/>
+          <a:effectLst>
+            <a:outerShdw sx="100000" sy="100000" kx="0" ky="0" algn="bl" rotWithShape="0" blurRad="76200" dist="38100" dir="5400000">
+              <a:srgbClr val="000000">
+                <a:alpha val="18000"/>
+              </a:srgbClr>
+            </a:outerShdw>
+          </a:effectLst>
+        </p:spPr>
+      </p:sp>
+      <p:sp>
+        <p:nvSpPr>
+          <p:cNvPr id="7" name="Shape 5"/>
+          <p:cNvSpPr/>
+          <p:nvPr/>
+        </p:nvSpPr>
+        <p:spPr>
+          <a:xfrm>
+            <a:off x="1005840" y="1691640"/>
+            <a:ext cx="2176272" cy="457200"/>
+          </a:xfrm>
+          <a:prstGeom prst="roundRect">
+            <a:avLst>
+              <a:gd name="adj" fmla="val 16000"/>
+            </a:avLst>
+          </a:prstGeom>
+          <a:solidFill>
+            <a:srgbClr val="3FD6D1"/>
+          </a:solidFill>
+          <a:ln/>
+        </p:spPr>
+      </p:sp>
+      <p:sp>
+        <p:nvSpPr>
+          <p:cNvPr id="8" name="Text 6"/>
+          <p:cNvSpPr txBox="1"/>
+          <p:nvPr/>
+        </p:nvSpPr>
+        <p:spPr>
+          <a:xfrm>
+            <a:off x="1005840" y="1691640"/>
+            <a:ext cx="2176272" cy="457200"/>
+          </a:xfrm>
+          <a:prstGeom prst="rect">
+            <a:avLst/>
+          </a:prstGeom>
+          <a:noFill/>
+          <a:ln/>
+        </p:spPr>
+        <p:txBody>
+          <a:bodyPr wrap="square" lIns="0" tIns="0" rIns="0" bIns="0" rtlCol="0" anchor="ctr"/>
+          <a:lstStyle/>
+          <a:p>
+            <a:pPr algn="ctr" indent="0" marL="0">
+              <a:buNone/>
+            </a:pPr>
+            <a:r>
+              <a:rPr lang="en-US" sz="1250" b="1" spc="50" kern="0" dirty="0">
+                <a:solidFill>
+                  <a:srgbClr val="161616"/>
+                </a:solidFill>
+                <a:latin typeface="Arial" pitchFamily="34" charset="0"/>
+                <a:ea typeface="Arial" pitchFamily="34" charset="-122"/>
+                <a:cs typeface="Arial" pitchFamily="34" charset="-120"/>
+              </a:rPr>
+              <a:t>DEGREE</a:t>
+            </a:r>
+            <a:endParaRPr lang="en-US" sz="1250" dirty="0"/>
+          </a:p>
+        </p:txBody>
+      </p:sp>
+      <p:sp>
+        <p:nvSpPr>
+          <p:cNvPr id="9" name="Text 7"/>
+          <p:cNvSpPr txBox="1"/>
+          <p:nvPr/>
+        </p:nvSpPr>
+        <p:spPr>
+          <a:xfrm>
+            <a:off x="1051560" y="2286000"/>
+            <a:ext cx="2084832" cy="365760"/>
+          </a:xfrm>
+          <a:prstGeom prst="rect">
+            <a:avLst/>
+          </a:prstGeom>
+          <a:noFill/>
+          <a:ln/>
+        </p:spPr>
+        <p:txBody>
+          <a:bodyPr wrap="square" lIns="0" tIns="0" rIns="0" bIns="0" rtlCol="0" anchor="ctr"/>
+          <a:lstStyle/>
+          <a:p>
+            <a:pPr indent="0" marL="0">
+              <a:buNone/>
+            </a:pPr>
+            <a:r>
+              <a:rPr lang="en-US" sz="1100" b="1" dirty="0">
+                <a:solidFill>
+                  <a:srgbClr val="1A9E99"/>
+                </a:solidFill>
+                <a:latin typeface="Calibri" pitchFamily="34" charset="0"/>
+                <a:ea typeface="Calibri" pitchFamily="34" charset="-122"/>
+                <a:cs typeface="Calibri" pitchFamily="34" charset="-120"/>
+              </a:rPr>
+              <a:t>top: #12, #30, #83</a:t>
+            </a:r>
+            <a:endParaRPr lang="en-US" sz="1100" dirty="0"/>
+          </a:p>
+        </p:txBody>
+      </p:sp>
+      <p:sp>
+        <p:nvSpPr>
+          <p:cNvPr id="10" name="Text 8"/>
+          <p:cNvSpPr txBox="1"/>
+          <p:nvPr/>
+        </p:nvSpPr>
+        <p:spPr>
+          <a:xfrm>
+            <a:off x="1051560" y="2697480"/>
+            <a:ext cx="2084832" cy="1783080"/>
+          </a:xfrm>
+          <a:prstGeom prst="rect">
+            <a:avLst/>
+          </a:prstGeom>
+          <a:noFill/>
+          <a:ln/>
+        </p:spPr>
+        <p:txBody>
+          <a:bodyPr wrap="square" lIns="0" tIns="0" rIns="0" bIns="0" rtlCol="0" anchor="t"/>
+          <a:lstStyle/>
+          <a:p>
+            <a:pPr indent="0" marL="0">
+              <a:lnSpc>
+                <a:spcPct val="115000"/>
+              </a:lnSpc>
+              <a:buNone/>
+            </a:pPr>
+            <a:r>
+              <a:rPr lang="en-US" sz="1050" dirty="0">
+                <a:solidFill>
+                  <a:srgbClr val="3A3A3A"/>
+                </a:solidFill>
+                <a:latin typeface="Calibri" pitchFamily="34" charset="0"/>
+                <a:ea typeface="Calibri" pitchFamily="34" charset="-122"/>
+                <a:cs typeface="Calibri" pitchFamily="34" charset="-120"/>
+              </a:rPr>
+              <a:t>Most direct connections. The raw hubs — tweets sharing attributes with many others.</a:t>
+            </a:r>
+            <a:endParaRPr lang="en-US" sz="1050" dirty="0"/>
+          </a:p>
+        </p:txBody>
+      </p:sp>
+      <p:sp>
+        <p:nvSpPr>
+          <p:cNvPr id="11" name="Shape 9"/>
+          <p:cNvSpPr/>
+          <p:nvPr/>
+        </p:nvSpPr>
+        <p:spPr>
+          <a:xfrm>
+            <a:off x="3547872" y="1508760"/>
+            <a:ext cx="2542032" cy="3108960"/>
+          </a:xfrm>
+          <a:prstGeom prst="roundRect">
+            <a:avLst>
+              <a:gd name="adj" fmla="val 3597"/>
+            </a:avLst>
+          </a:prstGeom>
+          <a:solidFill>
+            <a:srgbClr val="FFFFFF"/>
+          </a:solidFill>
+          <a:ln/>
+          <a:effectLst>
+            <a:outerShdw sx="100000" sy="100000" kx="0" ky="0" algn="bl" rotWithShape="0" blurRad="76200" dist="38100" dir="5400000">
+              <a:srgbClr val="000000">
+                <a:alpha val="18000"/>
+              </a:srgbClr>
+            </a:outerShdw>
+          </a:effectLst>
+        </p:spPr>
+      </p:sp>
+      <p:sp>
+        <p:nvSpPr>
+          <p:cNvPr id="12" name="Shape 10"/>
+          <p:cNvSpPr/>
+          <p:nvPr/>
+        </p:nvSpPr>
+        <p:spPr>
+          <a:xfrm>
+            <a:off x="3730752" y="1691640"/>
+            <a:ext cx="2176272" cy="457200"/>
+          </a:xfrm>
+          <a:prstGeom prst="roundRect">
+            <a:avLst>
+              <a:gd name="adj" fmla="val 16000"/>
+            </a:avLst>
+          </a:prstGeom>
+          <a:solidFill>
+            <a:srgbClr val="C9E93A"/>
+          </a:solidFill>
+          <a:ln/>
+        </p:spPr>
+      </p:sp>
+      <p:sp>
+        <p:nvSpPr>
+          <p:cNvPr id="13" name="Text 11"/>
+          <p:cNvSpPr txBox="1"/>
+          <p:nvPr/>
+        </p:nvSpPr>
+        <p:spPr>
+          <a:xfrm>
+            <a:off x="3730752" y="1691640"/>
+            <a:ext cx="2176272" cy="457200"/>
+          </a:xfrm>
+          <a:prstGeom prst="rect">
+            <a:avLst/>
+          </a:prstGeom>
+          <a:noFill/>
+          <a:ln/>
+        </p:spPr>
+        <p:txBody>
+          <a:bodyPr wrap="square" lIns="0" tIns="0" rIns="0" bIns="0" rtlCol="0" anchor="ctr"/>
+          <a:lstStyle/>
+          <a:p>
+            <a:pPr algn="ctr" indent="0" marL="0">
+              <a:buNone/>
+            </a:pPr>
+            <a:r>
+              <a:rPr lang="en-US" sz="1250" b="1" spc="50" kern="0" dirty="0">
+                <a:solidFill>
+                  <a:srgbClr val="161616"/>
+                </a:solidFill>
+                <a:latin typeface="Arial" pitchFamily="34" charset="0"/>
+                <a:ea typeface="Arial" pitchFamily="34" charset="-122"/>
+                <a:cs typeface="Arial" pitchFamily="34" charset="-120"/>
+              </a:rPr>
+              <a:t>BETWEENNESS</a:t>
+            </a:r>
+            <a:endParaRPr lang="en-US" sz="1250" dirty="0"/>
+          </a:p>
+        </p:txBody>
+      </p:sp>
+      <p:sp>
+        <p:nvSpPr>
+          <p:cNvPr id="14" name="Text 12"/>
+          <p:cNvSpPr txBox="1"/>
+          <p:nvPr/>
+        </p:nvSpPr>
+        <p:spPr>
+          <a:xfrm>
+            <a:off x="3776472" y="2286000"/>
+            <a:ext cx="2084832" cy="365760"/>
+          </a:xfrm>
+          <a:prstGeom prst="rect">
+            <a:avLst/>
+          </a:prstGeom>
+          <a:noFill/>
+          <a:ln/>
+        </p:spPr>
+        <p:txBody>
+          <a:bodyPr wrap="square" lIns="0" tIns="0" rIns="0" bIns="0" rtlCol="0" anchor="ctr"/>
+          <a:lstStyle/>
+          <a:p>
+            <a:pPr indent="0" marL="0">
+              <a:buNone/>
+            </a:pPr>
+            <a:r>
+              <a:rPr lang="en-US" sz="1100" b="1" dirty="0">
+                <a:solidFill>
+                  <a:srgbClr val="1A9E99"/>
+                </a:solidFill>
+                <a:latin typeface="Calibri" pitchFamily="34" charset="0"/>
+                <a:ea typeface="Calibri" pitchFamily="34" charset="-122"/>
+                <a:cs typeface="Calibri" pitchFamily="34" charset="-120"/>
+              </a:rPr>
+              <a:t>top: #12, #30, #32</a:t>
+            </a:r>
+            <a:endParaRPr lang="en-US" sz="1100" dirty="0"/>
+          </a:p>
+        </p:txBody>
+      </p:sp>
+      <p:sp>
+        <p:nvSpPr>
+          <p:cNvPr id="15" name="Text 13"/>
+          <p:cNvSpPr txBox="1"/>
+          <p:nvPr/>
+        </p:nvSpPr>
+        <p:spPr>
+          <a:xfrm>
+            <a:off x="3776472" y="2697480"/>
+            <a:ext cx="2084832" cy="1783080"/>
+          </a:xfrm>
+          <a:prstGeom prst="rect">
+            <a:avLst/>
+          </a:prstGeom>
+          <a:noFill/>
+          <a:ln/>
+        </p:spPr>
+        <p:txBody>
+          <a:bodyPr wrap="square" lIns="0" tIns="0" rIns="0" bIns="0" rtlCol="0" anchor="t"/>
+          <a:lstStyle/>
+          <a:p>
+            <a:pPr indent="0" marL="0">
+              <a:lnSpc>
+                <a:spcPct val="115000"/>
+              </a:lnSpc>
+              <a:buNone/>
+            </a:pPr>
+            <a:r>
+              <a:rPr lang="en-US" sz="1050" dirty="0">
+                <a:solidFill>
+                  <a:srgbClr val="3A3A3A"/>
+                </a:solidFill>
+                <a:latin typeface="Calibri" pitchFamily="34" charset="0"/>
+                <a:ea typeface="Calibri" pitchFamily="34" charset="-122"/>
+                <a:cs typeface="Calibri" pitchFamily="34" charset="-120"/>
+              </a:rPr>
+              <a:t>Sit on the most shortest-paths — bridges between communities. Remove them and the graph fragments.</a:t>
+            </a:r>
+            <a:endParaRPr lang="en-US" sz="1050" dirty="0"/>
+          </a:p>
+        </p:txBody>
+      </p:sp>
+      <p:sp>
+        <p:nvSpPr>
+          <p:cNvPr id="16" name="Shape 14"/>
+          <p:cNvSpPr/>
+          <p:nvPr/>
+        </p:nvSpPr>
+        <p:spPr>
+          <a:xfrm>
+            <a:off x="6272784" y="1508760"/>
+            <a:ext cx="2542032" cy="3108960"/>
+          </a:xfrm>
+          <a:prstGeom prst="roundRect">
+            <a:avLst>
+              <a:gd name="adj" fmla="val 3597"/>
+            </a:avLst>
+          </a:prstGeom>
+          <a:solidFill>
+            <a:srgbClr val="FFFFFF"/>
+          </a:solidFill>
+          <a:ln/>
+          <a:effectLst>
+            <a:outerShdw sx="100000" sy="100000" kx="0" ky="0" algn="bl" rotWithShape="0" blurRad="76200" dist="38100" dir="5400000">
+              <a:srgbClr val="000000">
+                <a:alpha val="18000"/>
+              </a:srgbClr>
+            </a:outerShdw>
+          </a:effectLst>
+        </p:spPr>
+      </p:sp>
+      <p:sp>
+        <p:nvSpPr>
+          <p:cNvPr id="17" name="Shape 15"/>
+          <p:cNvSpPr/>
+          <p:nvPr/>
+        </p:nvSpPr>
+        <p:spPr>
+          <a:xfrm>
+            <a:off x="6455664" y="1691640"/>
+            <a:ext cx="2176272" cy="457200"/>
+          </a:xfrm>
+          <a:prstGeom prst="roundRect">
+            <a:avLst>
+              <a:gd name="adj" fmla="val 16000"/>
+            </a:avLst>
+          </a:prstGeom>
+          <a:solidFill>
+            <a:srgbClr val="3FD6D1"/>
+          </a:solidFill>
+          <a:ln/>
+        </p:spPr>
+      </p:sp>
+      <p:sp>
+        <p:nvSpPr>
+          <p:cNvPr id="18" name="Text 16"/>
+          <p:cNvSpPr txBox="1"/>
+          <p:nvPr/>
+        </p:nvSpPr>
+        <p:spPr>
+          <a:xfrm>
+            <a:off x="6455664" y="1691640"/>
+            <a:ext cx="2176272" cy="457200"/>
+          </a:xfrm>
+          <a:prstGeom prst="rect">
+            <a:avLst/>
+          </a:prstGeom>
+          <a:noFill/>
+          <a:ln/>
+        </p:spPr>
+        <p:txBody>
+          <a:bodyPr wrap="square" lIns="0" tIns="0" rIns="0" bIns="0" rtlCol="0" anchor="ctr"/>
+          <a:lstStyle/>
+          <a:p>
+            <a:pPr algn="ctr" indent="0" marL="0">
+              <a:buNone/>
+            </a:pPr>
+            <a:r>
+              <a:rPr lang="en-US" sz="1250" b="1" spc="50" kern="0" dirty="0">
+                <a:solidFill>
+                  <a:srgbClr val="161616"/>
+                </a:solidFill>
+                <a:latin typeface="Arial" pitchFamily="34" charset="0"/>
+                <a:ea typeface="Arial" pitchFamily="34" charset="-122"/>
+                <a:cs typeface="Arial" pitchFamily="34" charset="-120"/>
+              </a:rPr>
+              <a:t>EIGENVECTOR</a:t>
+            </a:r>
+            <a:endParaRPr lang="en-US" sz="1250" dirty="0"/>
+          </a:p>
+        </p:txBody>
+      </p:sp>
+      <p:sp>
+        <p:nvSpPr>
+          <p:cNvPr id="19" name="Text 17"/>
+          <p:cNvSpPr txBox="1"/>
+          <p:nvPr/>
+        </p:nvSpPr>
+        <p:spPr>
+          <a:xfrm>
+            <a:off x="6501384" y="2286000"/>
+            <a:ext cx="2084832" cy="365760"/>
+          </a:xfrm>
+          <a:prstGeom prst="rect">
+            <a:avLst/>
+          </a:prstGeom>
+          <a:noFill/>
+          <a:ln/>
+        </p:spPr>
+        <p:txBody>
+          <a:bodyPr wrap="square" lIns="0" tIns="0" rIns="0" bIns="0" rtlCol="0" anchor="ctr"/>
+          <a:lstStyle/>
+          <a:p>
+            <a:pPr indent="0" marL="0">
+              <a:buNone/>
+            </a:pPr>
+            <a:r>
+              <a:rPr lang="en-US" sz="1100" b="1" dirty="0">
+                <a:solidFill>
+                  <a:srgbClr val="1A9E99"/>
+                </a:solidFill>
+                <a:latin typeface="Calibri" pitchFamily="34" charset="0"/>
+                <a:ea typeface="Calibri" pitchFamily="34" charset="-122"/>
+                <a:cs typeface="Calibri" pitchFamily="34" charset="-120"/>
+              </a:rPr>
+              <a:t>top: #2, #25, #37…</a:t>
+            </a:r>
+            <a:endParaRPr lang="en-US" sz="1100" dirty="0"/>
+          </a:p>
+        </p:txBody>
+      </p:sp>
+      <p:sp>
+        <p:nvSpPr>
+          <p:cNvPr id="20" name="Text 18"/>
+          <p:cNvSpPr txBox="1"/>
+          <p:nvPr/>
+        </p:nvSpPr>
+        <p:spPr>
+          <a:xfrm>
+            <a:off x="6501384" y="2697480"/>
+            <a:ext cx="2084832" cy="1783080"/>
+          </a:xfrm>
+          <a:prstGeom prst="rect">
+            <a:avLst/>
+          </a:prstGeom>
+          <a:noFill/>
+          <a:ln/>
+        </p:spPr>
+        <p:txBody>
+          <a:bodyPr wrap="square" lIns="0" tIns="0" rIns="0" bIns="0" rtlCol="0" anchor="t"/>
+          <a:lstStyle/>
+          <a:p>
+            <a:pPr indent="0" marL="0">
+              <a:lnSpc>
+                <a:spcPct val="115000"/>
+              </a:lnSpc>
+              <a:buNone/>
+            </a:pPr>
+            <a:r>
+              <a:rPr lang="en-US" sz="1050" dirty="0">
+                <a:solidFill>
+                  <a:srgbClr val="3A3A3A"/>
+                </a:solidFill>
+                <a:latin typeface="Calibri" pitchFamily="34" charset="0"/>
+                <a:ea typeface="Calibri" pitchFamily="34" charset="-122"/>
+                <a:cs typeface="Calibri" pitchFamily="34" charset="-120"/>
+              </a:rPr>
+              <a:t>Connected to other important nodes. Here a tight clique all score 0.26 — a dense event core.</a:t>
+            </a:r>
+            <a:endParaRPr lang="en-US" sz="1050" dirty="0"/>
+          </a:p>
+        </p:txBody>
+      </p:sp>
+      <p:sp>
+        <p:nvSpPr>
+          <p:cNvPr id="21" name="Shape 19"/>
+          <p:cNvSpPr/>
+          <p:nvPr/>
+        </p:nvSpPr>
+        <p:spPr>
+          <a:xfrm>
+            <a:off x="8997696" y="1508760"/>
+            <a:ext cx="2542032" cy="3108960"/>
+          </a:xfrm>
+          <a:prstGeom prst="roundRect">
+            <a:avLst>
+              <a:gd name="adj" fmla="val 3597"/>
+            </a:avLst>
+          </a:prstGeom>
+          <a:solidFill>
+            <a:srgbClr val="FFFFFF"/>
+          </a:solidFill>
+          <a:ln/>
+          <a:effectLst>
+            <a:outerShdw sx="100000" sy="100000" kx="0" ky="0" algn="bl" rotWithShape="0" blurRad="76200" dist="38100" dir="5400000">
+              <a:srgbClr val="000000">
+                <a:alpha val="18000"/>
+              </a:srgbClr>
+            </a:outerShdw>
+          </a:effectLst>
+        </p:spPr>
+      </p:sp>
+      <p:sp>
+        <p:nvSpPr>
+          <p:cNvPr id="22" name="Shape 20"/>
+          <p:cNvSpPr/>
+          <p:nvPr/>
+        </p:nvSpPr>
+        <p:spPr>
+          <a:xfrm>
+            <a:off x="9180576" y="1691640"/>
+            <a:ext cx="2176272" cy="457200"/>
+          </a:xfrm>
+          <a:prstGeom prst="roundRect">
+            <a:avLst>
+              <a:gd name="adj" fmla="val 16000"/>
+            </a:avLst>
+          </a:prstGeom>
+          <a:solidFill>
+            <a:srgbClr val="C9E93A"/>
+          </a:solidFill>
+          <a:ln/>
+        </p:spPr>
+      </p:sp>
+      <p:sp>
+        <p:nvSpPr>
+          <p:cNvPr id="23" name="Text 21"/>
+          <p:cNvSpPr txBox="1"/>
+          <p:nvPr/>
+        </p:nvSpPr>
+        <p:spPr>
+          <a:xfrm>
+            <a:off x="9180576" y="1691640"/>
+            <a:ext cx="2176272" cy="457200"/>
+          </a:xfrm>
+          <a:prstGeom prst="rect">
+            <a:avLst/>
+          </a:prstGeom>
+          <a:noFill/>
+          <a:ln/>
+        </p:spPr>
+        <p:txBody>
+          <a:bodyPr wrap="square" lIns="0" tIns="0" rIns="0" bIns="0" rtlCol="0" anchor="ctr"/>
+          <a:lstStyle/>
+          <a:p>
+            <a:pPr algn="ctr" indent="0" marL="0">
+              <a:buNone/>
+            </a:pPr>
+            <a:r>
+              <a:rPr lang="en-US" sz="1250" b="1" spc="50" kern="0" dirty="0">
+                <a:solidFill>
+                  <a:srgbClr val="161616"/>
+                </a:solidFill>
+                <a:latin typeface="Arial" pitchFamily="34" charset="0"/>
+                <a:ea typeface="Arial" pitchFamily="34" charset="-122"/>
+                <a:cs typeface="Arial" pitchFamily="34" charset="-120"/>
+              </a:rPr>
+              <a:t>PAGERANK</a:t>
+            </a:r>
+            <a:endParaRPr lang="en-US" sz="1250" dirty="0"/>
+          </a:p>
+        </p:txBody>
+      </p:sp>
+      <p:sp>
+        <p:nvSpPr>
+          <p:cNvPr id="24" name="Text 22"/>
+          <p:cNvSpPr txBox="1"/>
+          <p:nvPr/>
+        </p:nvSpPr>
+        <p:spPr>
+          <a:xfrm>
+            <a:off x="9226296" y="2286000"/>
+            <a:ext cx="2084832" cy="365760"/>
+          </a:xfrm>
+          <a:prstGeom prst="rect">
+            <a:avLst/>
+          </a:prstGeom>
+          <a:noFill/>
+          <a:ln/>
+        </p:spPr>
+        <p:txBody>
+          <a:bodyPr wrap="square" lIns="0" tIns="0" rIns="0" bIns="0" rtlCol="0" anchor="ctr"/>
+          <a:lstStyle/>
+          <a:p>
+            <a:pPr indent="0" marL="0">
+              <a:buNone/>
+            </a:pPr>
+            <a:r>
+              <a:rPr lang="en-US" sz="1100" b="1" dirty="0">
+                <a:solidFill>
+                  <a:srgbClr val="1A9E99"/>
+                </a:solidFill>
+                <a:latin typeface="Calibri" pitchFamily="34" charset="0"/>
+                <a:ea typeface="Calibri" pitchFamily="34" charset="-122"/>
+                <a:cs typeface="Calibri" pitchFamily="34" charset="-120"/>
+              </a:rPr>
+              <a:t>top: #12, #30, #83</a:t>
+            </a:r>
+            <a:endParaRPr lang="en-US" sz="1100" dirty="0"/>
+          </a:p>
+        </p:txBody>
+      </p:sp>
+      <p:sp>
+        <p:nvSpPr>
+          <p:cNvPr id="25" name="Text 23"/>
+          <p:cNvSpPr txBox="1"/>
+          <p:nvPr/>
+        </p:nvSpPr>
+        <p:spPr>
+          <a:xfrm>
+            <a:off x="9226296" y="2697480"/>
+            <a:ext cx="2084832" cy="1783080"/>
+          </a:xfrm>
+          <a:prstGeom prst="rect">
+            <a:avLst/>
+          </a:prstGeom>
+          <a:noFill/>
+          <a:ln/>
+        </p:spPr>
+        <p:txBody>
+          <a:bodyPr wrap="square" lIns="0" tIns="0" rIns="0" bIns="0" rtlCol="0" anchor="t"/>
+          <a:lstStyle/>
+          <a:p>
+            <a:pPr indent="0" marL="0">
+              <a:lnSpc>
+                <a:spcPct val="115000"/>
+              </a:lnSpc>
+              <a:buNone/>
+            </a:pPr>
+            <a:r>
+              <a:rPr lang="en-US" sz="1050" dirty="0">
+                <a:solidFill>
+                  <a:srgbClr val="3A3A3A"/>
+                </a:solidFill>
+                <a:latin typeface="Calibri" pitchFamily="34" charset="0"/>
+                <a:ea typeface="Calibri" pitchFamily="34" charset="-122"/>
+                <a:cs typeface="Calibri" pitchFamily="34" charset="-120"/>
+              </a:rPr>
+              <a:t>Random-walk importance (the link-analysis measure). Agrees with degree on the top hub, #12.</a:t>
+            </a:r>
+            <a:endParaRPr lang="en-US" sz="1050" dirty="0"/>
+          </a:p>
+        </p:txBody>
+      </p:sp>
+      <p:sp>
+        <p:nvSpPr>
+          <p:cNvPr id="26" name="Shape 24"/>
+          <p:cNvSpPr/>
+          <p:nvPr/>
+        </p:nvSpPr>
+        <p:spPr>
+          <a:xfrm>
+            <a:off x="822960" y="4892040"/>
+            <a:ext cx="10515600" cy="1097280"/>
           </a:xfrm>
           <a:prstGeom prst="rect">
             <a:avLst/>
@@ -15073,97 +18430,14 @@
       </p:sp>
       <p:sp>
         <p:nvSpPr>
-          <p:cNvPr id="4" name="Text 2"/>
-          <p:cNvSpPr txBox="1"/>
-          <p:nvPr/>
-        </p:nvSpPr>
-        <p:spPr>
-          <a:xfrm>
-            <a:off x="2194560" y="502920"/>
-            <a:ext cx="2286000" cy="640080"/>
-          </a:xfrm>
-          <a:prstGeom prst="rect">
-            <a:avLst/>
-          </a:prstGeom>
-          <a:noFill/>
-          <a:ln/>
-        </p:spPr>
-        <p:txBody>
-          <a:bodyPr wrap="none" lIns="0" tIns="0" rIns="0" bIns="0" rtlCol="0" anchor="ctr"/>
-          <a:lstStyle/>
-          <a:p>
-            <a:pPr indent="0" marL="0">
-              <a:buNone/>
-            </a:pPr>
-            <a:r>
-              <a:rPr lang="en-US" sz="3400" b="1" dirty="0">
-                <a:solidFill>
-                  <a:srgbClr val="161616"/>
-                </a:solidFill>
-                <a:latin typeface="Arial" pitchFamily="34" charset="0"/>
-                <a:ea typeface="Arial" pitchFamily="34" charset="-122"/>
-                <a:cs typeface="Arial" pitchFamily="34" charset="-120"/>
-              </a:rPr>
-              <a:t>TOOLING</a:t>
-            </a:r>
-            <a:endParaRPr lang="en-US" sz="3400" dirty="0"/>
-          </a:p>
-        </p:txBody>
-      </p:sp>
-      <p:sp>
-        <p:nvSpPr>
-          <p:cNvPr id="5" name="Shape 3"/>
-          <p:cNvSpPr/>
-          <p:nvPr/>
-        </p:nvSpPr>
-        <p:spPr>
-          <a:xfrm>
-            <a:off x="822960" y="1554480"/>
-            <a:ext cx="3456432" cy="4389120"/>
-          </a:xfrm>
-          <a:prstGeom prst="roundRect">
-            <a:avLst>
-              <a:gd name="adj" fmla="val 3175"/>
-            </a:avLst>
-          </a:prstGeom>
-          <a:solidFill>
-            <a:srgbClr val="F3F3EF"/>
-          </a:solidFill>
-          <a:ln/>
-        </p:spPr>
-      </p:sp>
-      <p:sp>
-        <p:nvSpPr>
-          <p:cNvPr id="6" name="Shape 4"/>
-          <p:cNvSpPr/>
-          <p:nvPr/>
-        </p:nvSpPr>
-        <p:spPr>
-          <a:xfrm>
-            <a:off x="1051560" y="1783080"/>
-            <a:ext cx="2999232" cy="502920"/>
-          </a:xfrm>
-          <a:prstGeom prst="roundRect">
-            <a:avLst>
-              <a:gd name="adj" fmla="val 18182"/>
-            </a:avLst>
-          </a:prstGeom>
-          <a:solidFill>
-            <a:srgbClr val="3FD6D1"/>
-          </a:solidFill>
-          <a:ln/>
-        </p:spPr>
-      </p:sp>
-      <p:sp>
-        <p:nvSpPr>
-          <p:cNvPr id="7" name="Text 5"/>
-          <p:cNvSpPr txBox="1"/>
-          <p:nvPr/>
-        </p:nvSpPr>
-        <p:spPr>
-          <a:xfrm>
-            <a:off x="1051560" y="1783080"/>
-            <a:ext cx="2999232" cy="502920"/>
+          <p:cNvPr id="27" name="Text 25"/>
+          <p:cNvSpPr txBox="1"/>
+          <p:nvPr/>
+        </p:nvSpPr>
+        <p:spPr>
+          <a:xfrm>
+            <a:off x="1097280" y="4983480"/>
+            <a:ext cx="9966960" cy="914400"/>
           </a:xfrm>
           <a:prstGeom prst="rect">
             <a:avLst/>
@@ -15175,81 +18449,31 @@
           <a:bodyPr wrap="square" lIns="0" tIns="0" rIns="0" bIns="0" rtlCol="0" anchor="ctr"/>
           <a:lstStyle/>
           <a:p>
-            <a:pPr algn="ctr" indent="0" marL="0">
-              <a:buNone/>
-            </a:pPr>
-            <a:r>
-              <a:rPr lang="en-US" sz="1400" b="1" spc="100" kern="0" dirty="0">
-                <a:solidFill>
-                  <a:srgbClr val="161616"/>
-                </a:solidFill>
-                <a:latin typeface="Arial" pitchFamily="34" charset="0"/>
-                <a:ea typeface="Arial" pitchFamily="34" charset="-122"/>
-                <a:cs typeface="Arial" pitchFamily="34" charset="-120"/>
-              </a:rPr>
-              <a:t>NETWORKX</a:t>
-            </a:r>
-            <a:endParaRPr lang="en-US" sz="1400" dirty="0"/>
-          </a:p>
-        </p:txBody>
-      </p:sp>
-      <p:sp>
-        <p:nvSpPr>
-          <p:cNvPr id="8" name="Text 6"/>
-          <p:cNvSpPr txBox="1"/>
-          <p:nvPr/>
-        </p:nvSpPr>
-        <p:spPr>
-          <a:xfrm>
-            <a:off x="1097280" y="2468880"/>
-            <a:ext cx="2907792" cy="3246120"/>
-          </a:xfrm>
-          <a:prstGeom prst="rect">
-            <a:avLst/>
-          </a:prstGeom>
-          <a:noFill/>
-          <a:ln/>
-        </p:spPr>
-        <p:txBody>
-          <a:bodyPr wrap="square" lIns="0" tIns="0" rIns="0" bIns="0" rtlCol="0" anchor="t"/>
-          <a:lstStyle/>
-          <a:p>
-            <a:pPr marL="342900" indent="-342900">
+            <a:pPr algn="l" indent="0" marL="0">
               <a:lnSpc>
-                <a:spcPct val="115000"/>
+                <a:spcPct val="120000"/>
               </a:lnSpc>
-              <a:spcAft>
-                <a:spcPts val="1000"/>
-              </a:spcAft>
-              <a:buSzPct val="100000"/>
-              <a:buChar char="●"/>
-            </a:pPr>
-            <a:r>
-              <a:rPr lang="en-US" sz="1030" dirty="0">
-                <a:solidFill>
-                  <a:srgbClr val="161616"/>
+              <a:buNone/>
+            </a:pPr>
+            <a:r>
+              <a:rPr lang="en-US" sz="1250" b="1" dirty="0">
+                <a:solidFill>
+                  <a:srgbClr val="1A9E99"/>
                 </a:solidFill>
                 <a:latin typeface="Calibri" pitchFamily="34" charset="0"/>
                 <a:ea typeface="Calibri" pitchFamily="34" charset="-122"/>
                 <a:cs typeface="Calibri" pitchFamily="34" charset="-120"/>
               </a:rPr>
-              <a:t>Louvain community detection (modularity-maximizing, no learning)</a:t>
-            </a:r>
-            <a:endParaRPr lang="en-US" sz="1030" dirty="0"/>
-          </a:p>
-          <a:p>
-            <a:pPr marL="342900" indent="-342900">
+              <a:t>Why it matters:  </a:t>
+            </a:r>
+            <a:pPr algn="l" indent="0" marL="0">
               <a:lnSpc>
-                <a:spcPct val="115000"/>
+                <a:spcPct val="120000"/>
               </a:lnSpc>
-              <a:spcAft>
-                <a:spcPts val="1000"/>
-              </a:spcAft>
-              <a:buSzPct val="100000"/>
-              <a:buChar char="●"/>
-            </a:pPr>
-            <a:r>
-              <a:rPr lang="en-US" sz="1030" dirty="0">
+              <a:buNone/>
+            </a:pPr>
+            <a:r>
+              <a:rPr lang="en-US" sz="1250" dirty="0">
                 <a:solidFill>
                   <a:srgbClr val="161616"/>
                 </a:solidFill>
@@ -15257,417 +18481,15 @@
                 <a:ea typeface="Calibri" pitchFamily="34" charset="-122"/>
                 <a:cs typeface="Calibri" pitchFamily="34" charset="-120"/>
               </a:rPr>
-              <a:t>Degree / closeness / betweenness centrality</a:t>
-            </a:r>
-            <a:endParaRPr lang="en-US" sz="1030" dirty="0"/>
-          </a:p>
-          <a:p>
-            <a:pPr marL="342900" indent="-342900">
-              <a:lnSpc>
-                <a:spcPct val="115000"/>
-              </a:lnSpc>
-              <a:spcAft>
-                <a:spcPts val="1000"/>
-              </a:spcAft>
-              <a:buSzPct val="100000"/>
-              <a:buChar char="●"/>
-            </a:pPr>
-            <a:r>
-              <a:rPr lang="en-US" sz="1030" dirty="0">
-                <a:solidFill>
-                  <a:srgbClr val="161616"/>
-                </a:solidFill>
-                <a:latin typeface="Calibri" pitchFamily="34" charset="0"/>
-                <a:ea typeface="Calibri" pitchFamily="34" charset="-122"/>
-                <a:cs typeface="Calibri" pitchFamily="34" charset="-120"/>
-              </a:rPr>
-              <a:t>Modularity + NMI/AMI/ARI scored vs. ground-truth events, per block</a:t>
-            </a:r>
-            <a:endParaRPr lang="en-US" sz="1030" dirty="0"/>
-          </a:p>
-        </p:txBody>
-      </p:sp>
-      <p:sp>
-        <p:nvSpPr>
-          <p:cNvPr id="9" name="Shape 7"/>
-          <p:cNvSpPr/>
-          <p:nvPr/>
-        </p:nvSpPr>
-        <p:spPr>
-          <a:xfrm>
-            <a:off x="4480560" y="1554480"/>
-            <a:ext cx="3456432" cy="4389120"/>
-          </a:xfrm>
-          <a:prstGeom prst="roundRect">
-            <a:avLst>
-              <a:gd name="adj" fmla="val 3175"/>
-            </a:avLst>
-          </a:prstGeom>
-          <a:solidFill>
-            <a:srgbClr val="F3F3EF"/>
-          </a:solidFill>
-          <a:ln/>
-        </p:spPr>
-      </p:sp>
-      <p:sp>
-        <p:nvSpPr>
-          <p:cNvPr id="10" name="Shape 8"/>
-          <p:cNvSpPr/>
-          <p:nvPr/>
-        </p:nvSpPr>
-        <p:spPr>
-          <a:xfrm>
-            <a:off x="4709160" y="1783080"/>
-            <a:ext cx="2999232" cy="502920"/>
-          </a:xfrm>
-          <a:prstGeom prst="roundRect">
-            <a:avLst>
-              <a:gd name="adj" fmla="val 18182"/>
-            </a:avLst>
-          </a:prstGeom>
-          <a:solidFill>
-            <a:srgbClr val="C9E93A"/>
-          </a:solidFill>
-          <a:ln/>
-        </p:spPr>
-      </p:sp>
-      <p:sp>
-        <p:nvSpPr>
-          <p:cNvPr id="11" name="Text 9"/>
-          <p:cNvSpPr txBox="1"/>
-          <p:nvPr/>
-        </p:nvSpPr>
-        <p:spPr>
-          <a:xfrm>
-            <a:off x="4709160" y="1783080"/>
-            <a:ext cx="2999232" cy="502920"/>
-          </a:xfrm>
-          <a:prstGeom prst="rect">
-            <a:avLst/>
-          </a:prstGeom>
-          <a:noFill/>
-          <a:ln/>
-        </p:spPr>
-        <p:txBody>
-          <a:bodyPr wrap="square" lIns="0" tIns="0" rIns="0" bIns="0" rtlCol="0" anchor="ctr"/>
-          <a:lstStyle/>
-          <a:p>
-            <a:pPr algn="ctr" indent="0" marL="0">
-              <a:buNone/>
-            </a:pPr>
-            <a:r>
-              <a:rPr lang="en-US" sz="1400" b="1" spc="100" kern="0" dirty="0">
-                <a:solidFill>
-                  <a:srgbClr val="161616"/>
-                </a:solidFill>
-                <a:latin typeface="Arial" pitchFamily="34" charset="0"/>
-                <a:ea typeface="Arial" pitchFamily="34" charset="-122"/>
-                <a:cs typeface="Arial" pitchFamily="34" charset="-120"/>
-              </a:rPr>
-              <a:t>GEPHI</a:t>
-            </a:r>
-            <a:endParaRPr lang="en-US" sz="1400" dirty="0"/>
-          </a:p>
-        </p:txBody>
-      </p:sp>
-      <p:sp>
-        <p:nvSpPr>
-          <p:cNvPr id="12" name="Text 10"/>
-          <p:cNvSpPr txBox="1"/>
-          <p:nvPr/>
-        </p:nvSpPr>
-        <p:spPr>
-          <a:xfrm>
-            <a:off x="4754880" y="2468880"/>
-            <a:ext cx="2907792" cy="3246120"/>
-          </a:xfrm>
-          <a:prstGeom prst="rect">
-            <a:avLst/>
-          </a:prstGeom>
-          <a:noFill/>
-          <a:ln/>
-        </p:spPr>
-        <p:txBody>
-          <a:bodyPr wrap="square" lIns="0" tIns="0" rIns="0" bIns="0" rtlCol="0" anchor="t"/>
-          <a:lstStyle/>
-          <a:p>
-            <a:pPr marL="342900" indent="-342900">
-              <a:lnSpc>
-                <a:spcPct val="115000"/>
-              </a:lnSpc>
-              <a:spcAft>
-                <a:spcPts val="1000"/>
-              </a:spcAft>
-              <a:buSzPct val="100000"/>
-              <a:buChar char="●"/>
-            </a:pPr>
-            <a:r>
-              <a:rPr lang="en-US" sz="1030" dirty="0">
-                <a:solidFill>
-                  <a:srgbClr val="161616"/>
-                </a:solidFill>
-                <a:latin typeface="Calibri" pitchFamily="34" charset="0"/>
-                <a:ea typeface="Calibri" pitchFamily="34" charset="-122"/>
-                <a:cs typeface="Calibri" pitchFamily="34" charset="-120"/>
-              </a:rPr>
-              <a:t>Driven live via the AI Server HTTP API (:8081) — no manual clicking</a:t>
-            </a:r>
-            <a:endParaRPr lang="en-US" sz="1030" dirty="0"/>
-          </a:p>
-          <a:p>
-            <a:pPr marL="342900" indent="-342900">
-              <a:lnSpc>
-                <a:spcPct val="115000"/>
-              </a:lnSpc>
-              <a:spcAft>
-                <a:spcPts val="1000"/>
-              </a:spcAft>
-              <a:buSzPct val="100000"/>
-              <a:buChar char="●"/>
-            </a:pPr>
-            <a:r>
-              <a:rPr lang="en-US" sz="1030" dirty="0">
-                <a:solidFill>
-                  <a:srgbClr val="161616"/>
-                </a:solidFill>
-                <a:latin typeface="Calibri" pitchFamily="34" charset="0"/>
-                <a:ea typeface="Calibri" pitchFamily="34" charset="-122"/>
-                <a:cs typeface="Calibri" pitchFamily="34" charset="-120"/>
-              </a:rPr>
-              <a:t>ForceAtlas2 layout, size by degree, color by partition</a:t>
-            </a:r>
-            <a:endParaRPr lang="en-US" sz="1030" dirty="0"/>
-          </a:p>
-          <a:p>
-            <a:pPr marL="342900" indent="-342900">
-              <a:lnSpc>
-                <a:spcPct val="115000"/>
-              </a:lnSpc>
-              <a:spcAft>
-                <a:spcPts val="1000"/>
-              </a:spcAft>
-              <a:buSzPct val="100000"/>
-              <a:buChar char="●"/>
-            </a:pPr>
-            <a:r>
-              <a:rPr lang="en-US" sz="1030" dirty="0">
-                <a:solidFill>
-                  <a:srgbClr val="161616"/>
-                </a:solidFill>
-                <a:latin typeface="Calibri" pitchFamily="34" charset="0"/>
-                <a:ea typeface="Calibri" pitchFamily="34" charset="-122"/>
-                <a:cs typeface="Calibri" pitchFamily="34" charset="-120"/>
-              </a:rPr>
-              <a:t>Exported publication-quality PNGs of the real blocks</a:t>
-            </a:r>
-            <a:endParaRPr lang="en-US" sz="1030" dirty="0"/>
-          </a:p>
-        </p:txBody>
-      </p:sp>
-      <p:sp>
-        <p:nvSpPr>
-          <p:cNvPr id="13" name="Shape 11"/>
-          <p:cNvSpPr/>
-          <p:nvPr/>
-        </p:nvSpPr>
-        <p:spPr>
-          <a:xfrm>
-            <a:off x="8138160" y="1554480"/>
-            <a:ext cx="3456432" cy="4389120"/>
-          </a:xfrm>
-          <a:prstGeom prst="roundRect">
-            <a:avLst>
-              <a:gd name="adj" fmla="val 3175"/>
-            </a:avLst>
-          </a:prstGeom>
-          <a:solidFill>
-            <a:srgbClr val="F3F3EF"/>
-          </a:solidFill>
-          <a:ln/>
-        </p:spPr>
-      </p:sp>
-      <p:sp>
-        <p:nvSpPr>
-          <p:cNvPr id="14" name="Shape 12"/>
-          <p:cNvSpPr/>
-          <p:nvPr/>
-        </p:nvSpPr>
-        <p:spPr>
-          <a:xfrm>
-            <a:off x="8366760" y="1783080"/>
-            <a:ext cx="2999232" cy="502920"/>
-          </a:xfrm>
-          <a:prstGeom prst="roundRect">
-            <a:avLst>
-              <a:gd name="adj" fmla="val 18182"/>
-            </a:avLst>
-          </a:prstGeom>
-          <a:solidFill>
-            <a:srgbClr val="3FD6D1"/>
-          </a:solidFill>
-          <a:ln/>
-        </p:spPr>
-      </p:sp>
-      <p:sp>
-        <p:nvSpPr>
-          <p:cNvPr id="15" name="Text 13"/>
-          <p:cNvSpPr txBox="1"/>
-          <p:nvPr/>
-        </p:nvSpPr>
-        <p:spPr>
-          <a:xfrm>
-            <a:off x="8366760" y="1783080"/>
-            <a:ext cx="2999232" cy="502920"/>
-          </a:xfrm>
-          <a:prstGeom prst="rect">
-            <a:avLst/>
-          </a:prstGeom>
-          <a:noFill/>
-          <a:ln/>
-        </p:spPr>
-        <p:txBody>
-          <a:bodyPr wrap="square" lIns="0" tIns="0" rIns="0" bIns="0" rtlCol="0" anchor="ctr"/>
-          <a:lstStyle/>
-          <a:p>
-            <a:pPr algn="ctr" indent="0" marL="0">
-              <a:buNone/>
-            </a:pPr>
-            <a:r>
-              <a:rPr lang="en-US" sz="1400" b="1" spc="100" kern="0" dirty="0">
-                <a:solidFill>
-                  <a:srgbClr val="161616"/>
-                </a:solidFill>
-                <a:latin typeface="Arial" pitchFamily="34" charset="0"/>
-                <a:ea typeface="Arial" pitchFamily="34" charset="-122"/>
-                <a:cs typeface="Arial" pitchFamily="34" charset="-120"/>
-              </a:rPr>
-              <a:t>NEW SCRIPTS (RAN)</a:t>
-            </a:r>
-            <a:endParaRPr lang="en-US" sz="1400" dirty="0"/>
-          </a:p>
-        </p:txBody>
-      </p:sp>
-      <p:sp>
-        <p:nvSpPr>
-          <p:cNvPr id="16" name="Text 14"/>
-          <p:cNvSpPr txBox="1"/>
-          <p:nvPr/>
-        </p:nvSpPr>
-        <p:spPr>
-          <a:xfrm>
-            <a:off x="8412480" y="2468880"/>
-            <a:ext cx="2907792" cy="3246120"/>
-          </a:xfrm>
-          <a:prstGeom prst="rect">
-            <a:avLst/>
-          </a:prstGeom>
-          <a:noFill/>
-          <a:ln/>
-        </p:spPr>
-        <p:txBody>
-          <a:bodyPr wrap="square" lIns="0" tIns="0" rIns="0" bIns="0" rtlCol="0" anchor="t"/>
-          <a:lstStyle/>
-          <a:p>
-            <a:pPr marL="342900" indent="-342900">
-              <a:lnSpc>
-                <a:spcPct val="115000"/>
-              </a:lnSpc>
-              <a:spcAft>
-                <a:spcPts val="1000"/>
-              </a:spcAft>
-              <a:buSzPct val="100000"/>
-              <a:buChar char="●"/>
-            </a:pPr>
-            <a:r>
-              <a:rPr lang="en-US" sz="1030" dirty="0">
-                <a:solidFill>
-                  <a:srgbClr val="161616"/>
-                </a:solidFill>
-                <a:latin typeface="Calibri" pitchFamily="34" charset="0"/>
-                <a:ea typeface="Calibri" pitchFamily="34" charset="-122"/>
-                <a:cs typeface="Calibri" pitchFamily="34" charset="-120"/>
-              </a:rPr>
-              <a:t>export_gephi.py — block → .gexf + Louvain scores</a:t>
-            </a:r>
-            <a:endParaRPr lang="en-US" sz="1030" dirty="0"/>
-          </a:p>
-          <a:p>
-            <a:pPr marL="342900" indent="-342900">
-              <a:lnSpc>
-                <a:spcPct val="115000"/>
-              </a:lnSpc>
-              <a:spcAft>
-                <a:spcPts val="1000"/>
-              </a:spcAft>
-              <a:buSzPct val="100000"/>
-              <a:buChar char="●"/>
-            </a:pPr>
-            <a:r>
-              <a:rPr lang="en-US" sz="1030" dirty="0">
-                <a:solidFill>
-                  <a:srgbClr val="161616"/>
-                </a:solidFill>
-                <a:latin typeface="Calibri" pitchFamily="34" charset="0"/>
-                <a:ea typeface="Calibri" pitchFamily="34" charset="-122"/>
-                <a:cs typeface="Calibri" pitchFamily="34" charset="-120"/>
-              </a:rPr>
-              <a:t>analyze_real.py — structure vs. content baselines + chart</a:t>
-            </a:r>
-            <a:endParaRPr lang="en-US" sz="1030" dirty="0"/>
-          </a:p>
-          <a:p>
-            <a:pPr marL="342900" indent="-342900">
-              <a:lnSpc>
-                <a:spcPct val="115000"/>
-              </a:lnSpc>
-              <a:spcAft>
-                <a:spcPts val="1000"/>
-              </a:spcAft>
-              <a:buSzPct val="100000"/>
-              <a:buChar char="●"/>
-            </a:pPr>
-            <a:r>
-              <a:rPr lang="en-US" sz="1030" dirty="0">
-                <a:solidFill>
-                  <a:srgbClr val="161616"/>
-                </a:solidFill>
-                <a:latin typeface="Calibri" pitchFamily="34" charset="0"/>
-                <a:ea typeface="Calibri" pitchFamily="34" charset="-122"/>
-                <a:cs typeface="Calibri" pitchFamily="34" charset="-120"/>
-              </a:rPr>
-              <a:t>gephi_render.py — drives Gephi end to end</a:t>
-            </a:r>
-            <a:endParaRPr lang="en-US" sz="1030" dirty="0"/>
-          </a:p>
-          <a:p>
-            <a:pPr marL="342900" indent="-342900">
-              <a:lnSpc>
-                <a:spcPct val="115000"/>
-              </a:lnSpc>
-              <a:spcAft>
-                <a:spcPts val="1000"/>
-              </a:spcAft>
-              <a:buSzPct val="100000"/>
-              <a:buChar char="●"/>
-            </a:pPr>
-            <a:r>
-              <a:rPr lang="en-US" sz="1030" dirty="0">
-                <a:solidFill>
-                  <a:srgbClr val="161616"/>
-                </a:solidFill>
-                <a:latin typeface="Calibri" pitchFamily="34" charset="0"/>
-                <a:ea typeface="Calibri" pitchFamily="34" charset="-122"/>
-                <a:cs typeface="Calibri" pitchFamily="34" charset="-120"/>
-              </a:rPr>
-              <a:t>build_dashboard_run.py — feeds the Streamlit dashboard real data</a:t>
-            </a:r>
-            <a:endParaRPr lang="en-US" sz="1030" dirty="0"/>
-          </a:p>
-        </p:txBody>
-      </p:sp>
-      <p:sp>
-        <p:nvSpPr>
-          <p:cNvPr id="17" name="Text 15"/>
+              <a:t>the paper's alternative node filter keeps only high-centrality tweets (degree + closeness + betweenness) before training — a purely structural way to drop noise. Centrality is also how link-analysis (PageRank) ranks influence, and it tells us which tweets, if removed, would break the event's community apart.</a:t>
+            </a:r>
+            <a:endParaRPr lang="en-US" sz="1250" dirty="0"/>
+          </a:p>
+        </p:txBody>
+      </p:sp>
+      <p:sp>
+        <p:nvSpPr>
+          <p:cNvPr id="28" name="Text 26"/>
           <p:cNvSpPr txBox="1"/>
           <p:nvPr/>
         </p:nvSpPr>
@@ -15737,8 +18559,8 @@
         </p:nvSpPr>
         <p:spPr>
           <a:xfrm>
-            <a:off x="822960" y="502920"/>
-            <a:ext cx="4206240" cy="640080"/>
+            <a:off x="822960" y="411480"/>
+            <a:ext cx="2834640" cy="594360"/>
           </a:xfrm>
           <a:prstGeom prst="rect">
             <a:avLst/>
@@ -15762,7 +18584,7 @@
                 <a:ea typeface="Arial" pitchFamily="34" charset="-122"/>
                 <a:cs typeface="Arial" pitchFamily="34" charset="-120"/>
               </a:rPr>
-              <a:t>DISCUSSION &amp; </a:t>
+              <a:t>THE LIVE </a:t>
             </a:r>
             <a:endParaRPr lang="en-US" sz="3000" dirty="0"/>
           </a:p>
@@ -15776,14 +18598,14 @@
         </p:nvSpPr>
         <p:spPr>
           <a:xfrm>
-            <a:off x="4892040" y="576072"/>
-            <a:ext cx="4151376" cy="457200"/>
+            <a:off x="3337560" y="484632"/>
+            <a:ext cx="3204972" cy="457200"/>
           </a:xfrm>
           <a:prstGeom prst="rect">
             <a:avLst/>
           </a:prstGeom>
           <a:solidFill>
-            <a:srgbClr val="C9E93A"/>
+            <a:srgbClr val="3FD6D1"/>
           </a:solidFill>
           <a:ln/>
         </p:spPr>
@@ -15796,8 +18618,8 @@
         </p:nvSpPr>
         <p:spPr>
           <a:xfrm>
-            <a:off x="4937760" y="502920"/>
-            <a:ext cx="4151376" cy="640080"/>
+            <a:off x="3383280" y="411480"/>
+            <a:ext cx="3204972" cy="594360"/>
           </a:xfrm>
           <a:prstGeom prst="rect">
             <a:avLst/>
@@ -15821,7 +18643,7 @@
                 <a:ea typeface="Arial" pitchFamily="34" charset="-122"/>
                 <a:cs typeface="Arial" pitchFamily="34" charset="-120"/>
               </a:rPr>
-              <a:t>IMPLICATIONS</a:t>
+              <a:t>DASHBOARD</a:t>
             </a:r>
             <a:endParaRPr lang="en-US" sz="3000" dirty="0"/>
           </a:p>
@@ -15829,18 +18651,372 @@
       </p:sp>
       <p:sp>
         <p:nvSpPr>
-          <p:cNvPr id="5" name="Shape 3"/>
+          <p:cNvPr id="5" name="Text 3"/>
+          <p:cNvSpPr txBox="1"/>
+          <p:nvPr/>
+        </p:nvSpPr>
+        <p:spPr>
+          <a:xfrm>
+            <a:off x="822960" y="1024128"/>
+            <a:ext cx="10515600" cy="292608"/>
+          </a:xfrm>
+          <a:prstGeom prst="rect">
+            <a:avLst/>
+          </a:prstGeom>
+          <a:noFill/>
+          <a:ln/>
+        </p:spPr>
+        <p:txBody>
+          <a:bodyPr wrap="square" lIns="0" tIns="0" rIns="0" bIns="0" rtlCol="0" anchor="ctr"/>
+          <a:lstStyle/>
+          <a:p>
+            <a:pPr indent="0" marL="0">
+              <a:buNone/>
+            </a:pPr>
+            <a:r>
+              <a:rPr lang="en-US" sz="1150" i="1" dirty="0">
+                <a:solidFill>
+                  <a:srgbClr val="6B6B6B"/>
+                </a:solidFill>
+                <a:latin typeface="Calibri" pitchFamily="34" charset="0"/>
+                <a:ea typeface="Calibri" pitchFamily="34" charset="-122"/>
+                <a:cs typeface="Calibri" pitchFamily="34" charset="-120"/>
+              </a:rPr>
+              <a:t>Streamlit, running on the real data — five linked views (localhost:8501).</a:t>
+            </a:r>
+            <a:endParaRPr lang="en-US" sz="1150" dirty="0"/>
+          </a:p>
+        </p:txBody>
+      </p:sp>
+      <p:pic>
+        <p:nvPicPr>
+          <p:cNvPr id="6" name="Image 0" descr="D:/Chrona/real_analysis_outputs/dashboard/tab1_metrics.png">    </p:cNvPr>
+          <p:cNvPicPr>
+            <a:picLocks noChangeAspect="1"/>
+          </p:cNvPicPr>
+          <p:nvPr/>
+        </p:nvPicPr>
+        <p:blipFill>
+          <a:blip r:embed="rId1"/>
+          <a:stretch>
+            <a:fillRect/>
+          </a:stretch>
+        </p:blipFill>
+        <p:spPr>
+          <a:xfrm>
+            <a:off x="822960" y="1371600"/>
+            <a:ext cx="3310128" cy="2068830"/>
+          </a:xfrm>
+          <a:prstGeom prst="rect">
+            <a:avLst/>
+          </a:prstGeom>
+        </p:spPr>
+      </p:pic>
+      <p:sp>
+        <p:nvSpPr>
+          <p:cNvPr id="7" name="Text 4"/>
+          <p:cNvSpPr txBox="1"/>
+          <p:nvPr/>
+        </p:nvSpPr>
+        <p:spPr>
+          <a:xfrm>
+            <a:off x="822960" y="3477006"/>
+            <a:ext cx="3310128" cy="274320"/>
+          </a:xfrm>
+          <a:prstGeom prst="rect">
+            <a:avLst/>
+          </a:prstGeom>
+          <a:noFill/>
+          <a:ln/>
+        </p:spPr>
+        <p:txBody>
+          <a:bodyPr wrap="square" lIns="0" tIns="0" rIns="0" bIns="0" rtlCol="0" anchor="ctr"/>
+          <a:lstStyle/>
+          <a:p>
+            <a:pPr algn="ctr" indent="0" marL="0">
+              <a:buNone/>
+            </a:pPr>
+            <a:r>
+              <a:rPr lang="en-US" sz="950" b="1" dirty="0">
+                <a:solidFill>
+                  <a:srgbClr val="161616"/>
+                </a:solidFill>
+                <a:latin typeface="Calibri" pitchFamily="34" charset="0"/>
+                <a:ea typeface="Calibri" pitchFamily="34" charset="-122"/>
+                <a:cs typeface="Calibri" pitchFamily="34" charset="-120"/>
+              </a:rPr>
+              <a:t>1 · Metrics over 22 blocks</a:t>
+            </a:r>
+            <a:endParaRPr lang="en-US" sz="950" dirty="0"/>
+          </a:p>
+        </p:txBody>
+      </p:sp>
+      <p:pic>
+        <p:nvPicPr>
+          <p:cNvPr id="8" name="Image 1" descr="D:/Chrona/real_analysis_outputs/dashboard/tab2_embeddings.png">    </p:cNvPr>
+          <p:cNvPicPr>
+            <a:picLocks noChangeAspect="1"/>
+          </p:cNvPicPr>
+          <p:nvPr/>
+        </p:nvPicPr>
+        <p:blipFill>
+          <a:blip r:embed="rId2"/>
+          <a:stretch>
+            <a:fillRect/>
+          </a:stretch>
+        </p:blipFill>
+        <p:spPr>
+          <a:xfrm>
+            <a:off x="4288536" y="1371600"/>
+            <a:ext cx="3310128" cy="2068830"/>
+          </a:xfrm>
+          <a:prstGeom prst="rect">
+            <a:avLst/>
+          </a:prstGeom>
+        </p:spPr>
+      </p:pic>
+      <p:sp>
+        <p:nvSpPr>
+          <p:cNvPr id="9" name="Text 5"/>
+          <p:cNvSpPr txBox="1"/>
+          <p:nvPr/>
+        </p:nvSpPr>
+        <p:spPr>
+          <a:xfrm>
+            <a:off x="4288536" y="3477006"/>
+            <a:ext cx="3310128" cy="274320"/>
+          </a:xfrm>
+          <a:prstGeom prst="rect">
+            <a:avLst/>
+          </a:prstGeom>
+          <a:noFill/>
+          <a:ln/>
+        </p:spPr>
+        <p:txBody>
+          <a:bodyPr wrap="square" lIns="0" tIns="0" rIns="0" bIns="0" rtlCol="0" anchor="ctr"/>
+          <a:lstStyle/>
+          <a:p>
+            <a:pPr algn="ctr" indent="0" marL="0">
+              <a:buNone/>
+            </a:pPr>
+            <a:r>
+              <a:rPr lang="en-US" sz="950" b="1" dirty="0">
+                <a:solidFill>
+                  <a:srgbClr val="161616"/>
+                </a:solidFill>
+                <a:latin typeface="Calibri" pitchFamily="34" charset="0"/>
+                <a:ea typeface="Calibri" pitchFamily="34" charset="-122"/>
+                <a:cs typeface="Calibri" pitchFamily="34" charset="-120"/>
+              </a:rPr>
+              <a:t>2 · 3D DistilBERT embedding space</a:t>
+            </a:r>
+            <a:endParaRPr lang="en-US" sz="950" dirty="0"/>
+          </a:p>
+        </p:txBody>
+      </p:sp>
+      <p:pic>
+        <p:nvPicPr>
+          <p:cNvPr id="10" name="Image 2" descr="D:/Chrona/real_analysis_outputs/dashboard/tab3_topology.png">    </p:cNvPr>
+          <p:cNvPicPr>
+            <a:picLocks noChangeAspect="1"/>
+          </p:cNvPicPr>
+          <p:nvPr/>
+        </p:nvPicPr>
+        <p:blipFill>
+          <a:blip r:embed="rId3"/>
+          <a:stretch>
+            <a:fillRect/>
+          </a:stretch>
+        </p:blipFill>
+        <p:spPr>
+          <a:xfrm>
+            <a:off x="7754112" y="1371600"/>
+            <a:ext cx="3310128" cy="2068830"/>
+          </a:xfrm>
+          <a:prstGeom prst="rect">
+            <a:avLst/>
+          </a:prstGeom>
+        </p:spPr>
+      </p:pic>
+      <p:sp>
+        <p:nvSpPr>
+          <p:cNvPr id="11" name="Text 6"/>
+          <p:cNvSpPr txBox="1"/>
+          <p:nvPr/>
+        </p:nvSpPr>
+        <p:spPr>
+          <a:xfrm>
+            <a:off x="7754112" y="3477006"/>
+            <a:ext cx="3310128" cy="274320"/>
+          </a:xfrm>
+          <a:prstGeom prst="rect">
+            <a:avLst/>
+          </a:prstGeom>
+          <a:noFill/>
+          <a:ln/>
+        </p:spPr>
+        <p:txBody>
+          <a:bodyPr wrap="square" lIns="0" tIns="0" rIns="0" bIns="0" rtlCol="0" anchor="ctr"/>
+          <a:lstStyle/>
+          <a:p>
+            <a:pPr algn="ctr" indent="0" marL="0">
+              <a:buNone/>
+            </a:pPr>
+            <a:r>
+              <a:rPr lang="en-US" sz="950" b="1" dirty="0">
+                <a:solidFill>
+                  <a:srgbClr val="161616"/>
+                </a:solidFill>
+                <a:latin typeface="Calibri" pitchFamily="34" charset="0"/>
+                <a:ea typeface="Calibri" pitchFamily="34" charset="-122"/>
+                <a:cs typeface="Calibri" pitchFamily="34" charset="-120"/>
+              </a:rPr>
+              <a:t>3 · Message topology map</a:t>
+            </a:r>
+            <a:endParaRPr lang="en-US" sz="950" dirty="0"/>
+          </a:p>
+        </p:txBody>
+      </p:sp>
+      <p:pic>
+        <p:nvPicPr>
+          <p:cNvPr id="12" name="Image 3" descr="D:/Chrona/real_analysis_outputs/dashboard/tab4_lifecycle.png">    </p:cNvPr>
+          <p:cNvPicPr>
+            <a:picLocks noChangeAspect="1"/>
+          </p:cNvPicPr>
+          <p:nvPr/>
+        </p:nvPicPr>
+        <p:blipFill>
+          <a:blip r:embed="rId4"/>
+          <a:stretch>
+            <a:fillRect/>
+          </a:stretch>
+        </p:blipFill>
+        <p:spPr>
+          <a:xfrm>
+            <a:off x="822960" y="3977640"/>
+            <a:ext cx="3310128" cy="2068830"/>
+          </a:xfrm>
+          <a:prstGeom prst="rect">
+            <a:avLst/>
+          </a:prstGeom>
+        </p:spPr>
+      </p:pic>
+      <p:sp>
+        <p:nvSpPr>
+          <p:cNvPr id="13" name="Text 7"/>
+          <p:cNvSpPr txBox="1"/>
+          <p:nvPr/>
+        </p:nvSpPr>
+        <p:spPr>
+          <a:xfrm>
+            <a:off x="822960" y="6083046"/>
+            <a:ext cx="3310128" cy="274320"/>
+          </a:xfrm>
+          <a:prstGeom prst="rect">
+            <a:avLst/>
+          </a:prstGeom>
+          <a:noFill/>
+          <a:ln/>
+        </p:spPr>
+        <p:txBody>
+          <a:bodyPr wrap="square" lIns="0" tIns="0" rIns="0" bIns="0" rtlCol="0" anchor="ctr"/>
+          <a:lstStyle/>
+          <a:p>
+            <a:pPr algn="ctr" indent="0" marL="0">
+              <a:buNone/>
+            </a:pPr>
+            <a:r>
+              <a:rPr lang="en-US" sz="950" b="1" dirty="0">
+                <a:solidFill>
+                  <a:srgbClr val="161616"/>
+                </a:solidFill>
+                <a:latin typeface="Calibri" pitchFamily="34" charset="0"/>
+                <a:ea typeface="Calibri" pitchFamily="34" charset="-122"/>
+                <a:cs typeface="Calibri" pitchFamily="34" charset="-120"/>
+              </a:rPr>
+              <a:t>4 · Event emergence &amp; decay</a:t>
+            </a:r>
+            <a:endParaRPr lang="en-US" sz="950" dirty="0"/>
+          </a:p>
+        </p:txBody>
+      </p:sp>
+      <p:pic>
+        <p:nvPicPr>
+          <p:cNvPr id="14" name="Image 4" descr="D:/Chrona/real_analysis_outputs/dashboard/tab5_nodefilter.png">    </p:cNvPr>
+          <p:cNvPicPr>
+            <a:picLocks noChangeAspect="1"/>
+          </p:cNvPicPr>
+          <p:nvPr/>
+        </p:nvPicPr>
+        <p:blipFill>
+          <a:blip r:embed="rId5"/>
+          <a:stretch>
+            <a:fillRect/>
+          </a:stretch>
+        </p:blipFill>
+        <p:spPr>
+          <a:xfrm>
+            <a:off x="4288536" y="3977640"/>
+            <a:ext cx="3310128" cy="2068830"/>
+          </a:xfrm>
+          <a:prstGeom prst="rect">
+            <a:avLst/>
+          </a:prstGeom>
+        </p:spPr>
+      </p:pic>
+      <p:sp>
+        <p:nvSpPr>
+          <p:cNvPr id="15" name="Text 8"/>
+          <p:cNvSpPr txBox="1"/>
+          <p:nvPr/>
+        </p:nvSpPr>
+        <p:spPr>
+          <a:xfrm>
+            <a:off x="4288536" y="6083046"/>
+            <a:ext cx="3310128" cy="274320"/>
+          </a:xfrm>
+          <a:prstGeom prst="rect">
+            <a:avLst/>
+          </a:prstGeom>
+          <a:noFill/>
+          <a:ln/>
+        </p:spPr>
+        <p:txBody>
+          <a:bodyPr wrap="square" lIns="0" tIns="0" rIns="0" bIns="0" rtlCol="0" anchor="ctr"/>
+          <a:lstStyle/>
+          <a:p>
+            <a:pPr algn="ctr" indent="0" marL="0">
+              <a:buNone/>
+            </a:pPr>
+            <a:r>
+              <a:rPr lang="en-US" sz="950" b="1" dirty="0">
+                <a:solidFill>
+                  <a:srgbClr val="161616"/>
+                </a:solidFill>
+                <a:latin typeface="Calibri" pitchFamily="34" charset="0"/>
+                <a:ea typeface="Calibri" pitchFamily="34" charset="-122"/>
+                <a:cs typeface="Calibri" pitchFamily="34" charset="-120"/>
+              </a:rPr>
+              <a:t>5 · Node-filter &amp; degree inspector</a:t>
+            </a:r>
+            <a:endParaRPr lang="en-US" sz="950" dirty="0"/>
+          </a:p>
+        </p:txBody>
+      </p:sp>
+      <p:sp>
+        <p:nvSpPr>
+          <p:cNvPr id="16" name="Shape 9"/>
           <p:cNvSpPr/>
           <p:nvPr/>
         </p:nvSpPr>
         <p:spPr>
           <a:xfrm>
-            <a:off x="822960" y="1463040"/>
-            <a:ext cx="5120640" cy="2148840"/>
+            <a:off x="7754112" y="3977640"/>
+            <a:ext cx="3310128" cy="2068830"/>
           </a:xfrm>
           <a:prstGeom prst="roundRect">
             <a:avLst>
-              <a:gd name="adj" fmla="val 5106"/>
+              <a:gd name="adj" fmla="val 4420"/>
             </a:avLst>
           </a:prstGeom>
           <a:solidFill>
@@ -15851,30 +19027,30 @@
       </p:sp>
       <p:sp>
         <p:nvSpPr>
-          <p:cNvPr id="6" name="Text 4"/>
-          <p:cNvSpPr txBox="1"/>
-          <p:nvPr/>
-        </p:nvSpPr>
-        <p:spPr>
-          <a:xfrm>
-            <a:off x="1024128" y="1603858"/>
-            <a:ext cx="4718304" cy="859536"/>
-          </a:xfrm>
-          <a:prstGeom prst="rect">
-            <a:avLst/>
-          </a:prstGeom>
-          <a:noFill/>
-          <a:ln/>
-        </p:spPr>
-        <p:txBody>
-          <a:bodyPr wrap="square" lIns="0" tIns="0" rIns="0" bIns="0" rtlCol="0" anchor="t"/>
-          <a:lstStyle/>
-          <a:p>
-            <a:pPr algn="l" indent="0" marL="0">
-              <a:buNone/>
-            </a:pPr>
-            <a:r>
-              <a:rPr lang="en-US" sz="1400" b="1" dirty="0">
+          <p:cNvPr id="17" name="Text 10"/>
+          <p:cNvSpPr txBox="1"/>
+          <p:nvPr/>
+        </p:nvSpPr>
+        <p:spPr>
+          <a:xfrm>
+            <a:off x="7955280" y="4142232"/>
+            <a:ext cx="2907792" cy="365760"/>
+          </a:xfrm>
+          <a:prstGeom prst="rect">
+            <a:avLst/>
+          </a:prstGeom>
+          <a:noFill/>
+          <a:ln/>
+        </p:spPr>
+        <p:txBody>
+          <a:bodyPr wrap="square" lIns="0" tIns="0" rIns="0" bIns="0" rtlCol="0" anchor="ctr"/>
+          <a:lstStyle/>
+          <a:p>
+            <a:pPr indent="0" marL="0">
+              <a:buNone/>
+            </a:pPr>
+            <a:r>
+              <a:rPr lang="en-US" sz="1300" b="1" dirty="0">
                 <a:solidFill>
                   <a:srgbClr val="161616"/>
                 </a:solidFill>
@@ -15882,366 +19058,57 @@
                 <a:ea typeface="Arial" pitchFamily="34" charset="-122"/>
                 <a:cs typeface="Arial" pitchFamily="34" charset="-120"/>
               </a:rPr>
-              <a:t>REAL-WORLD RELEVANCE</a:t>
-            </a:r>
-            <a:endParaRPr lang="en-US" sz="1400" dirty="0"/>
-          </a:p>
-        </p:txBody>
-      </p:sp>
-      <p:sp>
-        <p:nvSpPr>
-          <p:cNvPr id="7" name="Text 5"/>
-          <p:cNvSpPr txBox="1"/>
-          <p:nvPr/>
-        </p:nvSpPr>
-        <p:spPr>
-          <a:xfrm>
-            <a:off x="1024128" y="2365553"/>
-            <a:ext cx="4718304" cy="1125626"/>
-          </a:xfrm>
-          <a:prstGeom prst="rect">
-            <a:avLst/>
-          </a:prstGeom>
-          <a:noFill/>
-          <a:ln/>
-        </p:spPr>
-        <p:txBody>
-          <a:bodyPr wrap="square" lIns="0" tIns="0" rIns="0" bIns="0" rtlCol="0" anchor="t"/>
-          <a:lstStyle/>
-          <a:p>
-            <a:pPr algn="l" indent="0" marL="0">
+              <a:t>Every tab is real</a:t>
+            </a:r>
+            <a:endParaRPr lang="en-US" sz="1300" dirty="0"/>
+          </a:p>
+        </p:txBody>
+      </p:sp>
+      <p:sp>
+        <p:nvSpPr>
+          <p:cNvPr id="18" name="Text 11"/>
+          <p:cNvSpPr txBox="1"/>
+          <p:nvPr/>
+        </p:nvSpPr>
+        <p:spPr>
+          <a:xfrm>
+            <a:off x="7955280" y="4544568"/>
+            <a:ext cx="2907792" cy="1383030"/>
+          </a:xfrm>
+          <a:prstGeom prst="rect">
+            <a:avLst/>
+          </a:prstGeom>
+          <a:noFill/>
+          <a:ln/>
+        </p:spPr>
+        <p:txBody>
+          <a:bodyPr wrap="square" lIns="0" tIns="0" rIns="0" bIns="0" rtlCol="0" anchor="ctr"/>
+          <a:lstStyle/>
+          <a:p>
+            <a:pPr indent="0" marL="0">
               <a:lnSpc>
                 <a:spcPct val="112000"/>
               </a:lnSpc>
               <a:buNone/>
             </a:pPr>
             <a:r>
-              <a:rPr lang="en-US" sz="1150" dirty="0">
-                <a:solidFill>
-                  <a:srgbClr val="6B6B6B"/>
+              <a:rPr lang="en-US" sz="980" dirty="0">
+                <a:solidFill>
+                  <a:srgbClr val="3A3A3A"/>
                 </a:solidFill>
                 <a:latin typeface="Calibri" pitchFamily="34" charset="0"/>
                 <a:ea typeface="Calibri" pitchFamily="34" charset="-122"/>
                 <a:cs typeface="Calibri" pitchFamily="34" charset="-120"/>
               </a:rPr>
-              <a:t>Clustering messages into events as they arrive is an early-warning layer — disasters, outbreaks, breaking news — flagged before any single report confirms them. Keep-latest maintenance keeps it cheap to run live.</a:t>
-            </a:r>
-            <a:endParaRPr lang="en-US" sz="1150" dirty="0"/>
-          </a:p>
-        </p:txBody>
-      </p:sp>
-      <p:sp>
-        <p:nvSpPr>
-          <p:cNvPr id="8" name="Shape 6"/>
-          <p:cNvSpPr/>
-          <p:nvPr/>
-        </p:nvSpPr>
-        <p:spPr>
-          <a:xfrm>
-            <a:off x="6217920" y="1463040"/>
-            <a:ext cx="5120640" cy="2148840"/>
-          </a:xfrm>
-          <a:prstGeom prst="roundRect">
-            <a:avLst>
-              <a:gd name="adj" fmla="val 5106"/>
-            </a:avLst>
-          </a:prstGeom>
-          <a:solidFill>
-            <a:srgbClr val="F3F3EF"/>
-          </a:solidFill>
-          <a:ln/>
-        </p:spPr>
-      </p:sp>
-      <p:sp>
-        <p:nvSpPr>
-          <p:cNvPr id="9" name="Text 7"/>
-          <p:cNvSpPr txBox="1"/>
-          <p:nvPr/>
-        </p:nvSpPr>
-        <p:spPr>
-          <a:xfrm>
-            <a:off x="6419088" y="1603858"/>
-            <a:ext cx="4718304" cy="859536"/>
-          </a:xfrm>
-          <a:prstGeom prst="rect">
-            <a:avLst/>
-          </a:prstGeom>
-          <a:noFill/>
-          <a:ln/>
-        </p:spPr>
-        <p:txBody>
-          <a:bodyPr wrap="square" lIns="0" tIns="0" rIns="0" bIns="0" rtlCol="0" anchor="t"/>
-          <a:lstStyle/>
-          <a:p>
-            <a:pPr algn="l" indent="0" marL="0">
-              <a:buNone/>
-            </a:pPr>
-            <a:r>
-              <a:rPr lang="en-US" sz="1400" b="1" dirty="0">
-                <a:solidFill>
-                  <a:srgbClr val="161616"/>
-                </a:solidFill>
-                <a:latin typeface="Arial" pitchFamily="34" charset="0"/>
-                <a:ea typeface="Arial" pitchFamily="34" charset="-122"/>
-                <a:cs typeface="Arial" pitchFamily="34" charset="-120"/>
-              </a:rPr>
-              <a:t>WHY SNA + NLP TOGETHER</a:t>
-            </a:r>
-            <a:endParaRPr lang="en-US" sz="1400" dirty="0"/>
-          </a:p>
-        </p:txBody>
-      </p:sp>
-      <p:sp>
-        <p:nvSpPr>
-          <p:cNvPr id="10" name="Text 8"/>
-          <p:cNvSpPr txBox="1"/>
-          <p:nvPr/>
-        </p:nvSpPr>
-        <p:spPr>
-          <a:xfrm>
-            <a:off x="6419088" y="2365553"/>
-            <a:ext cx="4718304" cy="1125626"/>
-          </a:xfrm>
-          <a:prstGeom prst="rect">
-            <a:avLst/>
-          </a:prstGeom>
-          <a:noFill/>
-          <a:ln/>
-        </p:spPr>
-        <p:txBody>
-          <a:bodyPr wrap="square" lIns="0" tIns="0" rIns="0" bIns="0" rtlCol="0" anchor="t"/>
-          <a:lstStyle/>
-          <a:p>
-            <a:pPr algn="l" indent="0" marL="0">
-              <a:lnSpc>
-                <a:spcPct val="112000"/>
-              </a:lnSpc>
-              <a:buNone/>
-            </a:pPr>
-            <a:r>
-              <a:rPr lang="en-US" sz="1150" dirty="0">
-                <a:solidFill>
-                  <a:srgbClr val="6B6B6B"/>
-                </a:solidFill>
-                <a:latin typeface="Calibri" pitchFamily="34" charset="0"/>
-                <a:ea typeface="Calibri" pitchFamily="34" charset="-122"/>
-                <a:cs typeface="Calibri" pitchFamily="34" charset="-120"/>
-              </a:rPr>
-              <a:t>Relational metadata (who posted, shared entities, shared hashtags) carries event signal the language model misses. On real data the two are complementary — the biggest gains come from combining them, not either alone.</a:t>
-            </a:r>
-            <a:endParaRPr lang="en-US" sz="1150" dirty="0"/>
-          </a:p>
-        </p:txBody>
-      </p:sp>
-      <p:sp>
-        <p:nvSpPr>
-          <p:cNvPr id="11" name="Shape 9"/>
-          <p:cNvSpPr/>
-          <p:nvPr/>
-        </p:nvSpPr>
-        <p:spPr>
-          <a:xfrm>
-            <a:off x="822960" y="3840480"/>
-            <a:ext cx="5120640" cy="2148840"/>
-          </a:xfrm>
-          <a:prstGeom prst="roundRect">
-            <a:avLst>
-              <a:gd name="adj" fmla="val 5106"/>
-            </a:avLst>
-          </a:prstGeom>
-          <a:solidFill>
-            <a:srgbClr val="F3F3EF"/>
-          </a:solidFill>
-          <a:ln/>
-        </p:spPr>
-      </p:sp>
-      <p:sp>
-        <p:nvSpPr>
-          <p:cNvPr id="12" name="Text 10"/>
-          <p:cNvSpPr txBox="1"/>
-          <p:nvPr/>
-        </p:nvSpPr>
-        <p:spPr>
-          <a:xfrm>
-            <a:off x="1024128" y="3981298"/>
-            <a:ext cx="4718304" cy="859536"/>
-          </a:xfrm>
-          <a:prstGeom prst="rect">
-            <a:avLst/>
-          </a:prstGeom>
-          <a:noFill/>
-          <a:ln/>
-        </p:spPr>
-        <p:txBody>
-          <a:bodyPr wrap="square" lIns="0" tIns="0" rIns="0" bIns="0" rtlCol="0" anchor="t"/>
-          <a:lstStyle/>
-          <a:p>
-            <a:pPr algn="l" indent="0" marL="0">
-              <a:buNone/>
-            </a:pPr>
-            <a:r>
-              <a:rPr lang="en-US" sz="1400" b="1" dirty="0">
-                <a:solidFill>
-                  <a:srgbClr val="161616"/>
-                </a:solidFill>
-                <a:latin typeface="Arial" pitchFamily="34" charset="0"/>
-                <a:ea typeface="Arial" pitchFamily="34" charset="-122"/>
-                <a:cs typeface="Arial" pitchFamily="34" charset="-120"/>
-              </a:rPr>
-              <a:t>WHAT OUR RESULT IMPLIES</a:t>
-            </a:r>
-            <a:endParaRPr lang="en-US" sz="1400" dirty="0"/>
-          </a:p>
-        </p:txBody>
-      </p:sp>
-      <p:sp>
-        <p:nvSpPr>
-          <p:cNvPr id="13" name="Text 11"/>
-          <p:cNvSpPr txBox="1"/>
-          <p:nvPr/>
-        </p:nvSpPr>
-        <p:spPr>
-          <a:xfrm>
-            <a:off x="1024128" y="4742993"/>
-            <a:ext cx="4718304" cy="1125626"/>
-          </a:xfrm>
-          <a:prstGeom prst="rect">
-            <a:avLst/>
-          </a:prstGeom>
-          <a:noFill/>
-          <a:ln/>
-        </p:spPr>
-        <p:txBody>
-          <a:bodyPr wrap="square" lIns="0" tIns="0" rIns="0" bIns="0" rtlCol="0" anchor="t"/>
-          <a:lstStyle/>
-          <a:p>
-            <a:pPr algn="l" indent="0" marL="0">
-              <a:lnSpc>
-                <a:spcPct val="112000"/>
-              </a:lnSpc>
-              <a:buNone/>
-            </a:pPr>
-            <a:r>
-              <a:rPr lang="en-US" sz="1150" dirty="0">
-                <a:solidFill>
-                  <a:srgbClr val="6B6B6B"/>
-                </a:solidFill>
-                <a:latin typeface="Calibri" pitchFamily="34" charset="0"/>
-                <a:ea typeface="Calibri" pitchFamily="34" charset="-122"/>
-                <a:cs typeface="Calibri" pitchFamily="34" charset="-120"/>
-              </a:rPr>
-              <a:t>Because the better signal flips block to block, a system that re-weights structure vs. content per window should beat any fixed blend — a concrete design lead the GNN's attention already points toward.</a:t>
-            </a:r>
-            <a:endParaRPr lang="en-US" sz="1150" dirty="0"/>
-          </a:p>
-        </p:txBody>
-      </p:sp>
-      <p:sp>
-        <p:nvSpPr>
-          <p:cNvPr id="14" name="Shape 12"/>
-          <p:cNvSpPr/>
-          <p:nvPr/>
-        </p:nvSpPr>
-        <p:spPr>
-          <a:xfrm>
-            <a:off x="6217920" y="3840480"/>
-            <a:ext cx="5120640" cy="2148840"/>
-          </a:xfrm>
-          <a:prstGeom prst="roundRect">
-            <a:avLst>
-              <a:gd name="adj" fmla="val 5106"/>
-            </a:avLst>
-          </a:prstGeom>
-          <a:solidFill>
-            <a:srgbClr val="E9F4AE"/>
-          </a:solidFill>
-          <a:ln/>
-        </p:spPr>
-      </p:sp>
-      <p:sp>
-        <p:nvSpPr>
-          <p:cNvPr id="15" name="Text 13"/>
-          <p:cNvSpPr txBox="1"/>
-          <p:nvPr/>
-        </p:nvSpPr>
-        <p:spPr>
-          <a:xfrm>
-            <a:off x="6419088" y="3981298"/>
-            <a:ext cx="4718304" cy="859536"/>
-          </a:xfrm>
-          <a:prstGeom prst="rect">
-            <a:avLst/>
-          </a:prstGeom>
-          <a:noFill/>
-          <a:ln/>
-        </p:spPr>
-        <p:txBody>
-          <a:bodyPr wrap="square" lIns="0" tIns="0" rIns="0" bIns="0" rtlCol="0" anchor="t"/>
-          <a:lstStyle/>
-          <a:p>
-            <a:pPr algn="l" indent="0" marL="0">
-              <a:buNone/>
-            </a:pPr>
-            <a:r>
-              <a:rPr lang="en-US" sz="1400" b="1" dirty="0">
-                <a:solidFill>
-                  <a:srgbClr val="161616"/>
-                </a:solidFill>
-                <a:latin typeface="Arial" pitchFamily="34" charset="0"/>
-                <a:ea typeface="Arial" pitchFamily="34" charset="-122"/>
-                <a:cs typeface="Arial" pitchFamily="34" charset="-120"/>
-              </a:rPr>
-              <a:t>LIMITATIONS</a:t>
-            </a:r>
-            <a:endParaRPr lang="en-US" sz="1400" dirty="0"/>
-          </a:p>
-        </p:txBody>
-      </p:sp>
-      <p:sp>
-        <p:nvSpPr>
-          <p:cNvPr id="16" name="Text 14"/>
-          <p:cNvSpPr txBox="1"/>
-          <p:nvPr/>
-        </p:nvSpPr>
-        <p:spPr>
-          <a:xfrm>
-            <a:off x="6419088" y="4742993"/>
-            <a:ext cx="4718304" cy="1125626"/>
-          </a:xfrm>
-          <a:prstGeom prst="rect">
-            <a:avLst/>
-          </a:prstGeom>
-          <a:noFill/>
-          <a:ln/>
-        </p:spPr>
-        <p:txBody>
-          <a:bodyPr wrap="square" lIns="0" tIns="0" rIns="0" bIns="0" rtlCol="0" anchor="t"/>
-          <a:lstStyle/>
-          <a:p>
-            <a:pPr algn="l" indent="0" marL="0">
-              <a:lnSpc>
-                <a:spcPct val="112000"/>
-              </a:lnSpc>
-              <a:buNone/>
-            </a:pPr>
-            <a:r>
-              <a:rPr lang="en-US" sz="1150" dirty="0">
-                <a:solidFill>
-                  <a:srgbClr val="6B6B6B"/>
-                </a:solidFill>
-                <a:latin typeface="Calibri" pitchFamily="34" charset="0"/>
-                <a:ea typeface="Calibri" pitchFamily="34" charset="-122"/>
-                <a:cs typeface="Calibri" pitchFamily="34" charset="-120"/>
-              </a:rPr>
-              <a:t>One platform and one 28-day window; test-mode caps (100 msgs/block); 503 pre-labeled events; and full GNN metrics still pending the pinned torch 2.2 / dgl 2.2 environment.</a:t>
-            </a:r>
-            <a:endParaRPr lang="en-US" sz="1150" dirty="0"/>
-          </a:p>
-        </p:txBody>
-      </p:sp>
-      <p:sp>
-        <p:nvSpPr>
-          <p:cNvPr id="17" name="Text 15"/>
+              <a:t>real metric curve · real embeddings · real topology · real lifecycle · real degrees. Only the headline KPI tiles are the paper's static reference numbers.</a:t>
+            </a:r>
+            <a:endParaRPr lang="en-US" sz="980" dirty="0"/>
+          </a:p>
+        </p:txBody>
+      </p:sp>
+      <p:sp>
+        <p:nvSpPr>
+          <p:cNvPr id="19" name="Text 12"/>
           <p:cNvSpPr txBox="1"/>
           <p:nvPr/>
         </p:nvSpPr>
@@ -16311,8 +19178,8 @@
         </p:nvSpPr>
         <p:spPr>
           <a:xfrm>
-            <a:off x="822960" y="594360"/>
-            <a:ext cx="1788566" cy="640080"/>
+            <a:off x="822960" y="502920"/>
+            <a:ext cx="1371600" cy="640080"/>
           </a:xfrm>
           <a:prstGeom prst="rect">
             <a:avLst/>
@@ -16328,7 +19195,7 @@
               <a:buNone/>
             </a:pPr>
             <a:r>
-              <a:rPr lang="en-US" sz="3600" b="1" dirty="0">
+              <a:rPr lang="en-US" sz="3400" b="1" dirty="0">
                 <a:solidFill>
                   <a:srgbClr val="161616"/>
                 </a:solidFill>
@@ -16338,7 +19205,7 @@
               </a:rPr>
               <a:t>OUR </a:t>
             </a:r>
-            <a:endParaRPr lang="en-US" sz="3600" dirty="0"/>
+            <a:endParaRPr lang="en-US" sz="3400" dirty="0"/>
           </a:p>
         </p:txBody>
       </p:sp>
@@ -16350,8 +19217,8 @@
         </p:nvSpPr>
         <p:spPr>
           <a:xfrm>
-            <a:off x="2657246" y="502920"/>
-            <a:ext cx="4242816" cy="777240"/>
+            <a:off x="2103120" y="411480"/>
+            <a:ext cx="2377440" cy="777240"/>
           </a:xfrm>
           <a:prstGeom prst="rect">
             <a:avLst/>
@@ -16372,8 +19239,8 @@
         </p:nvSpPr>
         <p:spPr>
           <a:xfrm>
-            <a:off x="2794406" y="594360"/>
-            <a:ext cx="4242816" cy="640080"/>
+            <a:off x="2194560" y="502920"/>
+            <a:ext cx="2286000" cy="640080"/>
           </a:xfrm>
           <a:prstGeom prst="rect">
             <a:avLst/>
@@ -16389,7 +19256,7 @@
               <a:buNone/>
             </a:pPr>
             <a:r>
-              <a:rPr lang="en-US" sz="3600" b="1" dirty="0">
+              <a:rPr lang="en-US" sz="3400" b="1" dirty="0">
                 <a:solidFill>
                   <a:srgbClr val="161616"/>
                 </a:solidFill>
@@ -16397,22 +19264,66 @@
                 <a:ea typeface="Arial" pitchFamily="34" charset="-122"/>
                 <a:cs typeface="Arial" pitchFamily="34" charset="-120"/>
               </a:rPr>
-              <a:t>CONCLUSION</a:t>
-            </a:r>
-            <a:endParaRPr lang="en-US" sz="3600" dirty="0"/>
-          </a:p>
-        </p:txBody>
-      </p:sp>
-      <p:sp>
-        <p:nvSpPr>
-          <p:cNvPr id="5" name="Text 3"/>
-          <p:cNvSpPr txBox="1"/>
-          <p:nvPr/>
-        </p:nvSpPr>
-        <p:spPr>
-          <a:xfrm>
-            <a:off x="822960" y="1691640"/>
-            <a:ext cx="10515600" cy="1828800"/>
+              <a:t>TOOLING</a:t>
+            </a:r>
+            <a:endParaRPr lang="en-US" sz="3400" dirty="0"/>
+          </a:p>
+        </p:txBody>
+      </p:sp>
+      <p:sp>
+        <p:nvSpPr>
+          <p:cNvPr id="5" name="Shape 3"/>
+          <p:cNvSpPr/>
+          <p:nvPr/>
+        </p:nvSpPr>
+        <p:spPr>
+          <a:xfrm>
+            <a:off x="822960" y="1554480"/>
+            <a:ext cx="3456432" cy="4389120"/>
+          </a:xfrm>
+          <a:prstGeom prst="roundRect">
+            <a:avLst>
+              <a:gd name="adj" fmla="val 3175"/>
+            </a:avLst>
+          </a:prstGeom>
+          <a:solidFill>
+            <a:srgbClr val="F3F3EF"/>
+          </a:solidFill>
+          <a:ln/>
+        </p:spPr>
+      </p:sp>
+      <p:sp>
+        <p:nvSpPr>
+          <p:cNvPr id="6" name="Shape 4"/>
+          <p:cNvSpPr/>
+          <p:nvPr/>
+        </p:nvSpPr>
+        <p:spPr>
+          <a:xfrm>
+            <a:off x="1051560" y="1783080"/>
+            <a:ext cx="2999232" cy="502920"/>
+          </a:xfrm>
+          <a:prstGeom prst="roundRect">
+            <a:avLst>
+              <a:gd name="adj" fmla="val 18182"/>
+            </a:avLst>
+          </a:prstGeom>
+          <a:solidFill>
+            <a:srgbClr val="3FD6D1"/>
+          </a:solidFill>
+          <a:ln/>
+        </p:spPr>
+      </p:sp>
+      <p:sp>
+        <p:nvSpPr>
+          <p:cNvPr id="7" name="Text 5"/>
+          <p:cNvSpPr txBox="1"/>
+          <p:nvPr/>
+        </p:nvSpPr>
+        <p:spPr>
+          <a:xfrm>
+            <a:off x="1051560" y="1783080"/>
+            <a:ext cx="2999232" cy="502920"/>
           </a:xfrm>
           <a:prstGeom prst="rect">
             <a:avLst/>
@@ -16424,14 +19335,57 @@
           <a:bodyPr wrap="square" lIns="0" tIns="0" rIns="0" bIns="0" rtlCol="0" anchor="ctr"/>
           <a:lstStyle/>
           <a:p>
-            <a:pPr indent="0" marL="0">
+            <a:pPr algn="ctr" indent="0" marL="0">
+              <a:buNone/>
+            </a:pPr>
+            <a:r>
+              <a:rPr lang="en-US" sz="1400" b="1" spc="100" kern="0" dirty="0">
+                <a:solidFill>
+                  <a:srgbClr val="161616"/>
+                </a:solidFill>
+                <a:latin typeface="Arial" pitchFamily="34" charset="0"/>
+                <a:ea typeface="Arial" pitchFamily="34" charset="-122"/>
+                <a:cs typeface="Arial" pitchFamily="34" charset="-120"/>
+              </a:rPr>
+              <a:t>NETWORKX</a:t>
+            </a:r>
+            <a:endParaRPr lang="en-US" sz="1400" dirty="0"/>
+          </a:p>
+        </p:txBody>
+      </p:sp>
+      <p:sp>
+        <p:nvSpPr>
+          <p:cNvPr id="8" name="Text 6"/>
+          <p:cNvSpPr txBox="1"/>
+          <p:nvPr/>
+        </p:nvSpPr>
+        <p:spPr>
+          <a:xfrm>
+            <a:off x="1097280" y="2468880"/>
+            <a:ext cx="2907792" cy="3246120"/>
+          </a:xfrm>
+          <a:prstGeom prst="rect">
+            <a:avLst/>
+          </a:prstGeom>
+          <a:noFill/>
+          <a:ln/>
+        </p:spPr>
+        <p:txBody>
+          <a:bodyPr wrap="square" lIns="0" tIns="0" rIns="0" bIns="0" rtlCol="0" anchor="t"/>
+          <a:lstStyle/>
+          <a:p>
+            <a:pPr marL="342900" indent="-342900">
               <a:lnSpc>
-                <a:spcPct val="130000"/>
+                <a:spcPct val="115000"/>
               </a:lnSpc>
-              <a:buNone/>
-            </a:pPr>
-            <a:r>
-              <a:rPr lang="en-US" sz="1600" dirty="0">
+              <a:spcAft>
+                <a:spcPts val="1000"/>
+              </a:spcAft>
+              <a:buSzPct val="100000"/>
+              <a:buChar char="●"/>
+            </a:pPr>
+            <a:r>
+              <a:rPr lang="en-US" sz="1030" dirty="0">
                 <a:solidFill>
                   <a:srgbClr val="161616"/>
                 </a:solidFill>
@@ -16439,44 +19393,114 @@
                 <a:ea typeface="Calibri" pitchFamily="34" charset="-122"/>
                 <a:cs typeface="Calibri" pitchFamily="34" charset="-120"/>
               </a:rPr>
-              <a:t>We measured the two classical baselines the model is meant to beat, on the real benchmark. Structure (Louvain) and content (DistilBERT) land within 0.01 NMI of each other — yet the winner flips block to block. Neither signal is sufficient alone, and they are complementary exactly where it matters: on the same incoming messages. That gap — fusing structure and content per node — is precisely what DistilBERT-GNN's attention + contrastive objective is built to close.</a:t>
-            </a:r>
-            <a:endParaRPr lang="en-US" sz="1600" dirty="0"/>
-          </a:p>
-        </p:txBody>
-      </p:sp>
-      <p:sp>
-        <p:nvSpPr>
-          <p:cNvPr id="6" name="Shape 4"/>
+              <a:t>Louvain community detection (modularity-maximizing, no learning)</a:t>
+            </a:r>
+            <a:endParaRPr lang="en-US" sz="1030" dirty="0"/>
+          </a:p>
+          <a:p>
+            <a:pPr marL="342900" indent="-342900">
+              <a:lnSpc>
+                <a:spcPct val="115000"/>
+              </a:lnSpc>
+              <a:spcAft>
+                <a:spcPts val="1000"/>
+              </a:spcAft>
+              <a:buSzPct val="100000"/>
+              <a:buChar char="●"/>
+            </a:pPr>
+            <a:r>
+              <a:rPr lang="en-US" sz="1030" dirty="0">
+                <a:solidFill>
+                  <a:srgbClr val="161616"/>
+                </a:solidFill>
+                <a:latin typeface="Calibri" pitchFamily="34" charset="0"/>
+                <a:ea typeface="Calibri" pitchFamily="34" charset="-122"/>
+                <a:cs typeface="Calibri" pitchFamily="34" charset="-120"/>
+              </a:rPr>
+              <a:t>Degree / closeness / betweenness centrality</a:t>
+            </a:r>
+            <a:endParaRPr lang="en-US" sz="1030" dirty="0"/>
+          </a:p>
+          <a:p>
+            <a:pPr marL="342900" indent="-342900">
+              <a:lnSpc>
+                <a:spcPct val="115000"/>
+              </a:lnSpc>
+              <a:spcAft>
+                <a:spcPts val="1000"/>
+              </a:spcAft>
+              <a:buSzPct val="100000"/>
+              <a:buChar char="●"/>
+            </a:pPr>
+            <a:r>
+              <a:rPr lang="en-US" sz="1030" dirty="0">
+                <a:solidFill>
+                  <a:srgbClr val="161616"/>
+                </a:solidFill>
+                <a:latin typeface="Calibri" pitchFamily="34" charset="0"/>
+                <a:ea typeface="Calibri" pitchFamily="34" charset="-122"/>
+                <a:cs typeface="Calibri" pitchFamily="34" charset="-120"/>
+              </a:rPr>
+              <a:t>Modularity + NMI/AMI/ARI scored vs. ground-truth events, per block</a:t>
+            </a:r>
+            <a:endParaRPr lang="en-US" sz="1030" dirty="0"/>
+          </a:p>
+        </p:txBody>
+      </p:sp>
+      <p:sp>
+        <p:nvSpPr>
+          <p:cNvPr id="9" name="Shape 7"/>
           <p:cNvSpPr/>
           <p:nvPr/>
         </p:nvSpPr>
         <p:spPr>
           <a:xfrm>
-            <a:off x="822960" y="3931920"/>
-            <a:ext cx="10515600" cy="1508760"/>
-          </a:xfrm>
-          <a:prstGeom prst="rect">
-            <a:avLst/>
-          </a:prstGeom>
-          <a:ln w="19050">
-            <a:solidFill>
-              <a:srgbClr val="161616"/>
-            </a:solidFill>
-            <a:prstDash val="dash"/>
-          </a:ln>
-        </p:spPr>
-      </p:sp>
-      <p:sp>
-        <p:nvSpPr>
-          <p:cNvPr id="7" name="Text 5"/>
-          <p:cNvSpPr txBox="1"/>
-          <p:nvPr/>
-        </p:nvSpPr>
-        <p:spPr>
-          <a:xfrm>
-            <a:off x="1097280" y="4114800"/>
-            <a:ext cx="9966960" cy="365760"/>
+            <a:off x="4480560" y="1554480"/>
+            <a:ext cx="3456432" cy="4389120"/>
+          </a:xfrm>
+          <a:prstGeom prst="roundRect">
+            <a:avLst>
+              <a:gd name="adj" fmla="val 3175"/>
+            </a:avLst>
+          </a:prstGeom>
+          <a:solidFill>
+            <a:srgbClr val="F3F3EF"/>
+          </a:solidFill>
+          <a:ln/>
+        </p:spPr>
+      </p:sp>
+      <p:sp>
+        <p:nvSpPr>
+          <p:cNvPr id="10" name="Shape 8"/>
+          <p:cNvSpPr/>
+          <p:nvPr/>
+        </p:nvSpPr>
+        <p:spPr>
+          <a:xfrm>
+            <a:off x="4709160" y="1783080"/>
+            <a:ext cx="2999232" cy="502920"/>
+          </a:xfrm>
+          <a:prstGeom prst="roundRect">
+            <a:avLst>
+              <a:gd name="adj" fmla="val 18182"/>
+            </a:avLst>
+          </a:prstGeom>
+          <a:solidFill>
+            <a:srgbClr val="C9E93A"/>
+          </a:solidFill>
+          <a:ln/>
+        </p:spPr>
+      </p:sp>
+      <p:sp>
+        <p:nvSpPr>
+          <p:cNvPr id="11" name="Text 9"/>
+          <p:cNvSpPr txBox="1"/>
+          <p:nvPr/>
+        </p:nvSpPr>
+        <p:spPr>
+          <a:xfrm>
+            <a:off x="4709160" y="1783080"/>
+            <a:ext cx="2999232" cy="502920"/>
           </a:xfrm>
           <a:prstGeom prst="rect">
             <a:avLst/>
@@ -16492,49 +19516,53 @@
               <a:buNone/>
             </a:pPr>
             <a:r>
-              <a:rPr lang="en-US" sz="1500" b="1" dirty="0">
-                <a:solidFill>
-                  <a:srgbClr val="1A9E99"/>
+              <a:rPr lang="en-US" sz="1400" b="1" spc="100" kern="0" dirty="0">
+                <a:solidFill>
+                  <a:srgbClr val="161616"/>
                 </a:solidFill>
                 <a:latin typeface="Arial" pitchFamily="34" charset="0"/>
                 <a:ea typeface="Arial" pitchFamily="34" charset="-122"/>
                 <a:cs typeface="Arial" pitchFamily="34" charset="-120"/>
               </a:rPr>
-              <a:t>THE TAKEAWAY</a:t>
-            </a:r>
-            <a:endParaRPr lang="en-US" sz="1500" dirty="0"/>
-          </a:p>
-        </p:txBody>
-      </p:sp>
-      <p:sp>
-        <p:nvSpPr>
-          <p:cNvPr id="8" name="Text 6"/>
-          <p:cNvSpPr txBox="1"/>
-          <p:nvPr/>
-        </p:nvSpPr>
-        <p:spPr>
-          <a:xfrm>
-            <a:off x="1188720" y="4526280"/>
-            <a:ext cx="9784080" cy="822960"/>
-          </a:xfrm>
-          <a:prstGeom prst="rect">
-            <a:avLst/>
-          </a:prstGeom>
-          <a:noFill/>
-          <a:ln/>
-        </p:spPr>
-        <p:txBody>
-          <a:bodyPr wrap="square" lIns="0" tIns="0" rIns="0" bIns="0" rtlCol="0" anchor="ctr"/>
-          <a:lstStyle/>
-          <a:p>
-            <a:pPr algn="ctr" indent="0" marL="0">
+              <a:t>GEPHI</a:t>
+            </a:r>
+            <a:endParaRPr lang="en-US" sz="1400" dirty="0"/>
+          </a:p>
+        </p:txBody>
+      </p:sp>
+      <p:sp>
+        <p:nvSpPr>
+          <p:cNvPr id="12" name="Text 10"/>
+          <p:cNvSpPr txBox="1"/>
+          <p:nvPr/>
+        </p:nvSpPr>
+        <p:spPr>
+          <a:xfrm>
+            <a:off x="4754880" y="2468880"/>
+            <a:ext cx="2907792" cy="3246120"/>
+          </a:xfrm>
+          <a:prstGeom prst="rect">
+            <a:avLst/>
+          </a:prstGeom>
+          <a:noFill/>
+          <a:ln/>
+        </p:spPr>
+        <p:txBody>
+          <a:bodyPr wrap="square" lIns="0" tIns="0" rIns="0" bIns="0" rtlCol="0" anchor="t"/>
+          <a:lstStyle/>
+          <a:p>
+            <a:pPr marL="342900" indent="-342900">
               <a:lnSpc>
-                <a:spcPct val="120000"/>
+                <a:spcPct val="115000"/>
               </a:lnSpc>
-              <a:buNone/>
-            </a:pPr>
-            <a:r>
-              <a:rPr lang="en-US" sz="1500" b="1" dirty="0">
+              <a:spcAft>
+                <a:spcPts val="1000"/>
+              </a:spcAft>
+              <a:buSzPct val="100000"/>
+              <a:buChar char="●"/>
+            </a:pPr>
+            <a:r>
+              <a:rPr lang="en-US" sz="1030" dirty="0">
                 <a:solidFill>
                   <a:srgbClr val="161616"/>
                 </a:solidFill>
@@ -16542,15 +19570,264 @@
                 <a:ea typeface="Calibri" pitchFamily="34" charset="-122"/>
                 <a:cs typeface="Calibri" pitchFamily="34" charset="-120"/>
               </a:rPr>
-              <a:t>ON REAL DATA, STRUCTURE AND CONTENT ARE A TIE THAT DISAGREES PER BLOCK — WHICH IS THE STRONGEST CASE FOR A MODEL THAT FUSES BOTH</a:t>
-            </a:r>
-            <a:endParaRPr lang="en-US" sz="1500" dirty="0"/>
-          </a:p>
-        </p:txBody>
-      </p:sp>
-      <p:sp>
-        <p:nvSpPr>
-          <p:cNvPr id="9" name="Text 7"/>
+              <a:t>Driven live via the AI Server HTTP API (:8081) — no manual clicking</a:t>
+            </a:r>
+            <a:endParaRPr lang="en-US" sz="1030" dirty="0"/>
+          </a:p>
+          <a:p>
+            <a:pPr marL="342900" indent="-342900">
+              <a:lnSpc>
+                <a:spcPct val="115000"/>
+              </a:lnSpc>
+              <a:spcAft>
+                <a:spcPts val="1000"/>
+              </a:spcAft>
+              <a:buSzPct val="100000"/>
+              <a:buChar char="●"/>
+            </a:pPr>
+            <a:r>
+              <a:rPr lang="en-US" sz="1030" dirty="0">
+                <a:solidFill>
+                  <a:srgbClr val="161616"/>
+                </a:solidFill>
+                <a:latin typeface="Calibri" pitchFamily="34" charset="0"/>
+                <a:ea typeface="Calibri" pitchFamily="34" charset="-122"/>
+                <a:cs typeface="Calibri" pitchFamily="34" charset="-120"/>
+              </a:rPr>
+              <a:t>ForceAtlas2 layout, size by degree, color by partition</a:t>
+            </a:r>
+            <a:endParaRPr lang="en-US" sz="1030" dirty="0"/>
+          </a:p>
+          <a:p>
+            <a:pPr marL="342900" indent="-342900">
+              <a:lnSpc>
+                <a:spcPct val="115000"/>
+              </a:lnSpc>
+              <a:spcAft>
+                <a:spcPts val="1000"/>
+              </a:spcAft>
+              <a:buSzPct val="100000"/>
+              <a:buChar char="●"/>
+            </a:pPr>
+            <a:r>
+              <a:rPr lang="en-US" sz="1030" dirty="0">
+                <a:solidFill>
+                  <a:srgbClr val="161616"/>
+                </a:solidFill>
+                <a:latin typeface="Calibri" pitchFamily="34" charset="0"/>
+                <a:ea typeface="Calibri" pitchFamily="34" charset="-122"/>
+                <a:cs typeface="Calibri" pitchFamily="34" charset="-120"/>
+              </a:rPr>
+              <a:t>Exported publication-quality PNGs of the real blocks</a:t>
+            </a:r>
+            <a:endParaRPr lang="en-US" sz="1030" dirty="0"/>
+          </a:p>
+        </p:txBody>
+      </p:sp>
+      <p:sp>
+        <p:nvSpPr>
+          <p:cNvPr id="13" name="Shape 11"/>
+          <p:cNvSpPr/>
+          <p:nvPr/>
+        </p:nvSpPr>
+        <p:spPr>
+          <a:xfrm>
+            <a:off x="8138160" y="1554480"/>
+            <a:ext cx="3456432" cy="4389120"/>
+          </a:xfrm>
+          <a:prstGeom prst="roundRect">
+            <a:avLst>
+              <a:gd name="adj" fmla="val 3175"/>
+            </a:avLst>
+          </a:prstGeom>
+          <a:solidFill>
+            <a:srgbClr val="F3F3EF"/>
+          </a:solidFill>
+          <a:ln/>
+        </p:spPr>
+      </p:sp>
+      <p:sp>
+        <p:nvSpPr>
+          <p:cNvPr id="14" name="Shape 12"/>
+          <p:cNvSpPr/>
+          <p:nvPr/>
+        </p:nvSpPr>
+        <p:spPr>
+          <a:xfrm>
+            <a:off x="8366760" y="1783080"/>
+            <a:ext cx="2999232" cy="502920"/>
+          </a:xfrm>
+          <a:prstGeom prst="roundRect">
+            <a:avLst>
+              <a:gd name="adj" fmla="val 18182"/>
+            </a:avLst>
+          </a:prstGeom>
+          <a:solidFill>
+            <a:srgbClr val="3FD6D1"/>
+          </a:solidFill>
+          <a:ln/>
+        </p:spPr>
+      </p:sp>
+      <p:sp>
+        <p:nvSpPr>
+          <p:cNvPr id="15" name="Text 13"/>
+          <p:cNvSpPr txBox="1"/>
+          <p:nvPr/>
+        </p:nvSpPr>
+        <p:spPr>
+          <a:xfrm>
+            <a:off x="8366760" y="1783080"/>
+            <a:ext cx="2999232" cy="502920"/>
+          </a:xfrm>
+          <a:prstGeom prst="rect">
+            <a:avLst/>
+          </a:prstGeom>
+          <a:noFill/>
+          <a:ln/>
+        </p:spPr>
+        <p:txBody>
+          <a:bodyPr wrap="square" lIns="0" tIns="0" rIns="0" bIns="0" rtlCol="0" anchor="ctr"/>
+          <a:lstStyle/>
+          <a:p>
+            <a:pPr algn="ctr" indent="0" marL="0">
+              <a:buNone/>
+            </a:pPr>
+            <a:r>
+              <a:rPr lang="en-US" sz="1400" b="1" spc="100" kern="0" dirty="0">
+                <a:solidFill>
+                  <a:srgbClr val="161616"/>
+                </a:solidFill>
+                <a:latin typeface="Arial" pitchFamily="34" charset="0"/>
+                <a:ea typeface="Arial" pitchFamily="34" charset="-122"/>
+                <a:cs typeface="Arial" pitchFamily="34" charset="-120"/>
+              </a:rPr>
+              <a:t>NEW SCRIPTS (RAN)</a:t>
+            </a:r>
+            <a:endParaRPr lang="en-US" sz="1400" dirty="0"/>
+          </a:p>
+        </p:txBody>
+      </p:sp>
+      <p:sp>
+        <p:nvSpPr>
+          <p:cNvPr id="16" name="Text 14"/>
+          <p:cNvSpPr txBox="1"/>
+          <p:nvPr/>
+        </p:nvSpPr>
+        <p:spPr>
+          <a:xfrm>
+            <a:off x="8412480" y="2468880"/>
+            <a:ext cx="2907792" cy="3246120"/>
+          </a:xfrm>
+          <a:prstGeom prst="rect">
+            <a:avLst/>
+          </a:prstGeom>
+          <a:noFill/>
+          <a:ln/>
+        </p:spPr>
+        <p:txBody>
+          <a:bodyPr wrap="square" lIns="0" tIns="0" rIns="0" bIns="0" rtlCol="0" anchor="t"/>
+          <a:lstStyle/>
+          <a:p>
+            <a:pPr marL="342900" indent="-342900">
+              <a:lnSpc>
+                <a:spcPct val="115000"/>
+              </a:lnSpc>
+              <a:spcAft>
+                <a:spcPts val="1000"/>
+              </a:spcAft>
+              <a:buSzPct val="100000"/>
+              <a:buChar char="●"/>
+            </a:pPr>
+            <a:r>
+              <a:rPr lang="en-US" sz="1030" dirty="0">
+                <a:solidFill>
+                  <a:srgbClr val="161616"/>
+                </a:solidFill>
+                <a:latin typeface="Calibri" pitchFamily="34" charset="0"/>
+                <a:ea typeface="Calibri" pitchFamily="34" charset="-122"/>
+                <a:cs typeface="Calibri" pitchFamily="34" charset="-120"/>
+              </a:rPr>
+              <a:t>export_gephi.py — block → .gexf + Louvain scores</a:t>
+            </a:r>
+            <a:endParaRPr lang="en-US" sz="1030" dirty="0"/>
+          </a:p>
+          <a:p>
+            <a:pPr marL="342900" indent="-342900">
+              <a:lnSpc>
+                <a:spcPct val="115000"/>
+              </a:lnSpc>
+              <a:spcAft>
+                <a:spcPts val="1000"/>
+              </a:spcAft>
+              <a:buSzPct val="100000"/>
+              <a:buChar char="●"/>
+            </a:pPr>
+            <a:r>
+              <a:rPr lang="en-US" sz="1030" dirty="0">
+                <a:solidFill>
+                  <a:srgbClr val="161616"/>
+                </a:solidFill>
+                <a:latin typeface="Calibri" pitchFamily="34" charset="0"/>
+                <a:ea typeface="Calibri" pitchFamily="34" charset="-122"/>
+                <a:cs typeface="Calibri" pitchFamily="34" charset="-120"/>
+              </a:rPr>
+              <a:t>analyze_real.py — structure vs. content baselines + chart</a:t>
+            </a:r>
+            <a:endParaRPr lang="en-US" sz="1030" dirty="0"/>
+          </a:p>
+          <a:p>
+            <a:pPr marL="342900" indent="-342900">
+              <a:lnSpc>
+                <a:spcPct val="115000"/>
+              </a:lnSpc>
+              <a:spcAft>
+                <a:spcPts val="1000"/>
+              </a:spcAft>
+              <a:buSzPct val="100000"/>
+              <a:buChar char="●"/>
+            </a:pPr>
+            <a:r>
+              <a:rPr lang="en-US" sz="1030" dirty="0">
+                <a:solidFill>
+                  <a:srgbClr val="161616"/>
+                </a:solidFill>
+                <a:latin typeface="Calibri" pitchFamily="34" charset="0"/>
+                <a:ea typeface="Calibri" pitchFamily="34" charset="-122"/>
+                <a:cs typeface="Calibri" pitchFamily="34" charset="-120"/>
+              </a:rPr>
+              <a:t>gephi_render.py — drives Gephi end to end</a:t>
+            </a:r>
+            <a:endParaRPr lang="en-US" sz="1030" dirty="0"/>
+          </a:p>
+          <a:p>
+            <a:pPr marL="342900" indent="-342900">
+              <a:lnSpc>
+                <a:spcPct val="115000"/>
+              </a:lnSpc>
+              <a:spcAft>
+                <a:spcPts val="1000"/>
+              </a:spcAft>
+              <a:buSzPct val="100000"/>
+              <a:buChar char="●"/>
+            </a:pPr>
+            <a:r>
+              <a:rPr lang="en-US" sz="1030" dirty="0">
+                <a:solidFill>
+                  <a:srgbClr val="161616"/>
+                </a:solidFill>
+                <a:latin typeface="Calibri" pitchFamily="34" charset="0"/>
+                <a:ea typeface="Calibri" pitchFamily="34" charset="-122"/>
+                <a:cs typeface="Calibri" pitchFamily="34" charset="-120"/>
+              </a:rPr>
+              <a:t>build_dashboard_run.py — feeds the Streamlit dashboard real data</a:t>
+            </a:r>
+            <a:endParaRPr lang="en-US" sz="1030" dirty="0"/>
+          </a:p>
+        </p:txBody>
+      </p:sp>
+      <p:sp>
+        <p:nvSpPr>
+          <p:cNvPr id="17" name="Text 15"/>
           <p:cNvSpPr txBox="1"/>
           <p:nvPr/>
         </p:nvSpPr>
@@ -16621,23 +19898,23 @@
         <p:spPr>
           <a:xfrm>
             <a:off x="822960" y="502920"/>
-            <a:ext cx="4937760" cy="548640"/>
-          </a:xfrm>
-          <a:prstGeom prst="rect">
-            <a:avLst/>
-          </a:prstGeom>
-          <a:noFill/>
-          <a:ln/>
-        </p:spPr>
-        <p:txBody>
-          <a:bodyPr wrap="square" lIns="0" tIns="0" rIns="0" bIns="0" rtlCol="0" anchor="ctr"/>
+            <a:ext cx="4206240" cy="640080"/>
+          </a:xfrm>
+          <a:prstGeom prst="rect">
+            <a:avLst/>
+          </a:prstGeom>
+          <a:noFill/>
+          <a:ln/>
+        </p:spPr>
+        <p:txBody>
+          <a:bodyPr wrap="none" lIns="0" tIns="0" rIns="0" bIns="0" rtlCol="0" anchor="ctr"/>
           <a:lstStyle/>
           <a:p>
             <a:pPr indent="0" marL="0">
               <a:buNone/>
             </a:pPr>
             <a:r>
-              <a:rPr lang="en-US" sz="2600" b="1" dirty="0">
+              <a:rPr lang="en-US" sz="3000" b="1" dirty="0">
                 <a:solidFill>
                   <a:srgbClr val="161616"/>
                 </a:solidFill>
@@ -16645,38 +19922,58 @@
                 <a:ea typeface="Arial" pitchFamily="34" charset="-122"/>
                 <a:cs typeface="Arial" pitchFamily="34" charset="-120"/>
               </a:rPr>
-              <a:t>WHAT WE DID</a:t>
-            </a:r>
-            <a:endParaRPr lang="en-US" sz="2600" dirty="0"/>
-          </a:p>
-        </p:txBody>
-      </p:sp>
-      <p:sp>
-        <p:nvSpPr>
-          <p:cNvPr id="3" name="Text 1"/>
-          <p:cNvSpPr txBox="1"/>
-          <p:nvPr/>
-        </p:nvSpPr>
-        <p:spPr>
-          <a:xfrm>
-            <a:off x="6309360" y="502920"/>
-            <a:ext cx="4937760" cy="548640"/>
-          </a:xfrm>
-          <a:prstGeom prst="rect">
-            <a:avLst/>
-          </a:prstGeom>
-          <a:noFill/>
-          <a:ln/>
-        </p:spPr>
-        <p:txBody>
-          <a:bodyPr wrap="square" lIns="0" tIns="0" rIns="0" bIns="0" rtlCol="0" anchor="ctr"/>
+              <a:t>DISCUSSION &amp; </a:t>
+            </a:r>
+            <a:endParaRPr lang="en-US" sz="3000" dirty="0"/>
+          </a:p>
+        </p:txBody>
+      </p:sp>
+      <p:sp>
+        <p:nvSpPr>
+          <p:cNvPr id="3" name="Shape 1"/>
+          <p:cNvSpPr/>
+          <p:nvPr/>
+        </p:nvSpPr>
+        <p:spPr>
+          <a:xfrm>
+            <a:off x="4892040" y="576072"/>
+            <a:ext cx="4151376" cy="457200"/>
+          </a:xfrm>
+          <a:prstGeom prst="rect">
+            <a:avLst/>
+          </a:prstGeom>
+          <a:solidFill>
+            <a:srgbClr val="C9E93A"/>
+          </a:solidFill>
+          <a:ln/>
+        </p:spPr>
+      </p:sp>
+      <p:sp>
+        <p:nvSpPr>
+          <p:cNvPr id="4" name="Text 2"/>
+          <p:cNvSpPr txBox="1"/>
+          <p:nvPr/>
+        </p:nvSpPr>
+        <p:spPr>
+          <a:xfrm>
+            <a:off x="4937760" y="502920"/>
+            <a:ext cx="4151376" cy="640080"/>
+          </a:xfrm>
+          <a:prstGeom prst="rect">
+            <a:avLst/>
+          </a:prstGeom>
+          <a:noFill/>
+          <a:ln/>
+        </p:spPr>
+        <p:txBody>
+          <a:bodyPr wrap="none" lIns="0" tIns="0" rIns="0" bIns="0" rtlCol="0" anchor="ctr"/>
           <a:lstStyle/>
           <a:p>
             <a:pPr indent="0" marL="0">
               <a:buNone/>
             </a:pPr>
             <a:r>
-              <a:rPr lang="en-US" sz="2600" b="1" dirty="0">
+              <a:rPr lang="en-US" sz="3000" b="1" dirty="0">
                 <a:solidFill>
                   <a:srgbClr val="161616"/>
                 </a:solidFill>
@@ -16684,51 +19981,44 @@
                 <a:ea typeface="Arial" pitchFamily="34" charset="-122"/>
                 <a:cs typeface="Arial" pitchFamily="34" charset="-120"/>
               </a:rPr>
-              <a:t>WHAT COMES NEXT</a:t>
-            </a:r>
-            <a:endParaRPr lang="en-US" sz="2600" dirty="0"/>
-          </a:p>
-        </p:txBody>
-      </p:sp>
-      <p:sp>
-        <p:nvSpPr>
-          <p:cNvPr id="4" name="Shape 2"/>
+              <a:t>IMPLICATIONS</a:t>
+            </a:r>
+            <a:endParaRPr lang="en-US" sz="3000" dirty="0"/>
+          </a:p>
+        </p:txBody>
+      </p:sp>
+      <p:sp>
+        <p:nvSpPr>
+          <p:cNvPr id="5" name="Shape 3"/>
           <p:cNvSpPr/>
           <p:nvPr/>
         </p:nvSpPr>
         <p:spPr>
           <a:xfrm>
-            <a:off x="822960" y="1188720"/>
-            <a:ext cx="4937760" cy="1371600"/>
+            <a:off x="822960" y="1463040"/>
+            <a:ext cx="5120640" cy="2148840"/>
           </a:xfrm>
           <a:prstGeom prst="roundRect">
             <a:avLst>
-              <a:gd name="adj" fmla="val 8000"/>
+              <a:gd name="adj" fmla="val 5106"/>
             </a:avLst>
           </a:prstGeom>
           <a:solidFill>
-            <a:srgbClr val="FFFFFF"/>
+            <a:srgbClr val="E9F4AE"/>
           </a:solidFill>
           <a:ln/>
-          <a:effectLst>
-            <a:outerShdw sx="100000" sy="100000" kx="0" ky="0" algn="bl" rotWithShape="0" blurRad="76200" dist="38100" dir="5400000">
-              <a:srgbClr val="000000">
-                <a:alpha val="18000"/>
-              </a:srgbClr>
-            </a:outerShdw>
-          </a:effectLst>
-        </p:spPr>
-      </p:sp>
-      <p:sp>
-        <p:nvSpPr>
-          <p:cNvPr id="5" name="Text 3"/>
-          <p:cNvSpPr txBox="1"/>
-          <p:nvPr/>
-        </p:nvSpPr>
-        <p:spPr>
-          <a:xfrm>
-            <a:off x="1024128" y="1329538"/>
-            <a:ext cx="4535424" cy="548640"/>
+        </p:spPr>
+      </p:sp>
+      <p:sp>
+        <p:nvSpPr>
+          <p:cNvPr id="6" name="Text 4"/>
+          <p:cNvSpPr txBox="1"/>
+          <p:nvPr/>
+        </p:nvSpPr>
+        <p:spPr>
+          <a:xfrm>
+            <a:off x="1024128" y="1603858"/>
+            <a:ext cx="4718304" cy="859536"/>
           </a:xfrm>
           <a:prstGeom prst="rect">
             <a:avLst/>
@@ -16744,7 +20034,7 @@
               <a:buNone/>
             </a:pPr>
             <a:r>
-              <a:rPr lang="en-US" sz="1250" b="1" dirty="0">
+              <a:rPr lang="en-US" sz="1400" b="1" dirty="0">
                 <a:solidFill>
                   <a:srgbClr val="161616"/>
                 </a:solidFill>
@@ -16752,22 +20042,22 @@
                 <a:ea typeface="Arial" pitchFamily="34" charset="-122"/>
                 <a:cs typeface="Arial" pitchFamily="34" charset="-120"/>
               </a:rPr>
-              <a:t>Ran the real pipeline end to end</a:t>
-            </a:r>
-            <a:endParaRPr lang="en-US" sz="1250" dirty="0"/>
-          </a:p>
-        </p:txBody>
-      </p:sp>
-      <p:sp>
-        <p:nvSpPr>
-          <p:cNvPr id="6" name="Text 4"/>
-          <p:cNvSpPr txBox="1"/>
-          <p:nvPr/>
-        </p:nvSpPr>
-        <p:spPr>
-          <a:xfrm>
-            <a:off x="1024128" y="1764792"/>
-            <a:ext cx="4535424" cy="674827"/>
+              <a:t>REAL-WORLD RELEVANCE</a:t>
+            </a:r>
+            <a:endParaRPr lang="en-US" sz="1400" dirty="0"/>
+          </a:p>
+        </p:txBody>
+      </p:sp>
+      <p:sp>
+        <p:nvSpPr>
+          <p:cNvPr id="7" name="Text 5"/>
+          <p:cNvSpPr txBox="1"/>
+          <p:nvPr/>
+        </p:nvSpPr>
+        <p:spPr>
+          <a:xfrm>
+            <a:off x="1024128" y="2365553"/>
+            <a:ext cx="4718304" cy="1125626"/>
           </a:xfrm>
           <a:prstGeom prst="rect">
             <a:avLst/>
@@ -16786,7 +20076,7 @@
               <a:buNone/>
             </a:pPr>
             <a:r>
-              <a:rPr lang="en-US" sz="1030" dirty="0">
+              <a:rPr lang="en-US" sz="1150" dirty="0">
                 <a:solidFill>
                   <a:srgbClr val="6B6B6B"/>
                 </a:solidFill>
@@ -16794,51 +20084,44 @@
                 <a:ea typeface="Calibri" pitchFamily="34" charset="-122"/>
                 <a:cs typeface="Calibri" pitchFamily="34" charset="-120"/>
               </a:rPr>
-              <a:t>68,841 tweets → real DistilBERT embeddings → 22 real message graphs, ~8 min on CPU.</a:t>
-            </a:r>
-            <a:endParaRPr lang="en-US" sz="1030" dirty="0"/>
-          </a:p>
-        </p:txBody>
-      </p:sp>
-      <p:sp>
-        <p:nvSpPr>
-          <p:cNvPr id="7" name="Shape 5"/>
+              <a:t>Clustering messages into events as they arrive is an early-warning layer — disasters, outbreaks, breaking news — flagged before any single report confirms them. Keep-latest maintenance keeps it cheap to run live.</a:t>
+            </a:r>
+            <a:endParaRPr lang="en-US" sz="1150" dirty="0"/>
+          </a:p>
+        </p:txBody>
+      </p:sp>
+      <p:sp>
+        <p:nvSpPr>
+          <p:cNvPr id="8" name="Shape 6"/>
           <p:cNvSpPr/>
           <p:nvPr/>
         </p:nvSpPr>
         <p:spPr>
           <a:xfrm>
-            <a:off x="822960" y="2724912"/>
-            <a:ext cx="4937760" cy="1371600"/>
+            <a:off x="6217920" y="1463040"/>
+            <a:ext cx="5120640" cy="2148840"/>
           </a:xfrm>
           <a:prstGeom prst="roundRect">
             <a:avLst>
-              <a:gd name="adj" fmla="val 8000"/>
+              <a:gd name="adj" fmla="val 5106"/>
             </a:avLst>
           </a:prstGeom>
           <a:solidFill>
-            <a:srgbClr val="FFFFFF"/>
+            <a:srgbClr val="F3F3EF"/>
           </a:solidFill>
           <a:ln/>
-          <a:effectLst>
-            <a:outerShdw sx="100000" sy="100000" kx="0" ky="0" algn="bl" rotWithShape="0" blurRad="76200" dist="38100" dir="5400000">
-              <a:srgbClr val="000000">
-                <a:alpha val="18000"/>
-              </a:srgbClr>
-            </a:outerShdw>
-          </a:effectLst>
-        </p:spPr>
-      </p:sp>
-      <p:sp>
-        <p:nvSpPr>
-          <p:cNvPr id="8" name="Text 6"/>
-          <p:cNvSpPr txBox="1"/>
-          <p:nvPr/>
-        </p:nvSpPr>
-        <p:spPr>
-          <a:xfrm>
-            <a:off x="1024128" y="2865730"/>
-            <a:ext cx="4535424" cy="548640"/>
+        </p:spPr>
+      </p:sp>
+      <p:sp>
+        <p:nvSpPr>
+          <p:cNvPr id="9" name="Text 7"/>
+          <p:cNvSpPr txBox="1"/>
+          <p:nvPr/>
+        </p:nvSpPr>
+        <p:spPr>
+          <a:xfrm>
+            <a:off x="6419088" y="1603858"/>
+            <a:ext cx="4718304" cy="859536"/>
           </a:xfrm>
           <a:prstGeom prst="rect">
             <a:avLst/>
@@ -16854,7 +20137,7 @@
               <a:buNone/>
             </a:pPr>
             <a:r>
-              <a:rPr lang="en-US" sz="1250" b="1" dirty="0">
+              <a:rPr lang="en-US" sz="1400" b="1" dirty="0">
                 <a:solidFill>
                   <a:srgbClr val="161616"/>
                 </a:solidFill>
@@ -16862,22 +20145,22 @@
                 <a:ea typeface="Arial" pitchFamily="34" charset="-122"/>
                 <a:cs typeface="Arial" pitchFamily="34" charset="-120"/>
               </a:rPr>
-              <a:t>Measured two classical baselines</a:t>
-            </a:r>
-            <a:endParaRPr lang="en-US" sz="1250" dirty="0"/>
-          </a:p>
-        </p:txBody>
-      </p:sp>
-      <p:sp>
-        <p:nvSpPr>
-          <p:cNvPr id="9" name="Text 7"/>
-          <p:cNvSpPr txBox="1"/>
-          <p:nvPr/>
-        </p:nvSpPr>
-        <p:spPr>
-          <a:xfrm>
-            <a:off x="1024128" y="3300984"/>
-            <a:ext cx="4535424" cy="674827"/>
+              <a:t>WHY SNA + NLP TOGETHER</a:t>
+            </a:r>
+            <a:endParaRPr lang="en-US" sz="1400" dirty="0"/>
+          </a:p>
+        </p:txBody>
+      </p:sp>
+      <p:sp>
+        <p:nvSpPr>
+          <p:cNvPr id="10" name="Text 8"/>
+          <p:cNvSpPr txBox="1"/>
+          <p:nvPr/>
+        </p:nvSpPr>
+        <p:spPr>
+          <a:xfrm>
+            <a:off x="6419088" y="2365553"/>
+            <a:ext cx="4718304" cy="1125626"/>
           </a:xfrm>
           <a:prstGeom prst="rect">
             <a:avLst/>
@@ -16896,7 +20179,7 @@
               <a:buNone/>
             </a:pPr>
             <a:r>
-              <a:rPr lang="en-US" sz="1030" dirty="0">
+              <a:rPr lang="en-US" sz="1150" dirty="0">
                 <a:solidFill>
                   <a:srgbClr val="6B6B6B"/>
                 </a:solidFill>
@@ -16904,51 +20187,44 @@
                 <a:ea typeface="Calibri" pitchFamily="34" charset="-122"/>
                 <a:cs typeface="Calibri" pitchFamily="34" charset="-120"/>
               </a:rPr>
-              <a:t>Louvain (structure) and KMeans/DistilBERT (content) scored vs. ground-truth events on every block.</a:t>
-            </a:r>
-            <a:endParaRPr lang="en-US" sz="1030" dirty="0"/>
-          </a:p>
-        </p:txBody>
-      </p:sp>
-      <p:sp>
-        <p:nvSpPr>
-          <p:cNvPr id="10" name="Shape 8"/>
+              <a:t>Relational metadata (who posted, shared entities, shared hashtags) carries event signal the language model misses. On real data the two are complementary — the biggest gains come from combining them, not either alone.</a:t>
+            </a:r>
+            <a:endParaRPr lang="en-US" sz="1150" dirty="0"/>
+          </a:p>
+        </p:txBody>
+      </p:sp>
+      <p:sp>
+        <p:nvSpPr>
+          <p:cNvPr id="11" name="Shape 9"/>
           <p:cNvSpPr/>
           <p:nvPr/>
         </p:nvSpPr>
         <p:spPr>
           <a:xfrm>
-            <a:off x="822960" y="4261104"/>
-            <a:ext cx="4937760" cy="1371600"/>
+            <a:off x="822960" y="3840480"/>
+            <a:ext cx="5120640" cy="2148840"/>
           </a:xfrm>
           <a:prstGeom prst="roundRect">
             <a:avLst>
-              <a:gd name="adj" fmla="val 8000"/>
+              <a:gd name="adj" fmla="val 5106"/>
             </a:avLst>
           </a:prstGeom>
           <a:solidFill>
-            <a:srgbClr val="FFFFFF"/>
+            <a:srgbClr val="F3F3EF"/>
           </a:solidFill>
           <a:ln/>
-          <a:effectLst>
-            <a:outerShdw sx="100000" sy="100000" kx="0" ky="0" algn="bl" rotWithShape="0" blurRad="76200" dist="38100" dir="5400000">
-              <a:srgbClr val="000000">
-                <a:alpha val="18000"/>
-              </a:srgbClr>
-            </a:outerShdw>
-          </a:effectLst>
-        </p:spPr>
-      </p:sp>
-      <p:sp>
-        <p:nvSpPr>
-          <p:cNvPr id="11" name="Text 9"/>
-          <p:cNvSpPr txBox="1"/>
-          <p:nvPr/>
-        </p:nvSpPr>
-        <p:spPr>
-          <a:xfrm>
-            <a:off x="1024128" y="4401922"/>
-            <a:ext cx="4535424" cy="548640"/>
+        </p:spPr>
+      </p:sp>
+      <p:sp>
+        <p:nvSpPr>
+          <p:cNvPr id="12" name="Text 10"/>
+          <p:cNvSpPr txBox="1"/>
+          <p:nvPr/>
+        </p:nvSpPr>
+        <p:spPr>
+          <a:xfrm>
+            <a:off x="1024128" y="3981298"/>
+            <a:ext cx="4718304" cy="859536"/>
           </a:xfrm>
           <a:prstGeom prst="rect">
             <a:avLst/>
@@ -16964,7 +20240,7 @@
               <a:buNone/>
             </a:pPr>
             <a:r>
-              <a:rPr lang="en-US" sz="1250" b="1" dirty="0">
+              <a:rPr lang="en-US" sz="1400" b="1" dirty="0">
                 <a:solidFill>
                   <a:srgbClr val="161616"/>
                 </a:solidFill>
@@ -16972,22 +20248,22 @@
                 <a:ea typeface="Arial" pitchFamily="34" charset="-122"/>
                 <a:cs typeface="Arial" pitchFamily="34" charset="-120"/>
               </a:rPr>
-              <a:t>Visualized it three ways</a:t>
-            </a:r>
-            <a:endParaRPr lang="en-US" sz="1250" dirty="0"/>
-          </a:p>
-        </p:txBody>
-      </p:sp>
-      <p:sp>
-        <p:nvSpPr>
-          <p:cNvPr id="12" name="Text 10"/>
-          <p:cNvSpPr txBox="1"/>
-          <p:nvPr/>
-        </p:nvSpPr>
-        <p:spPr>
-          <a:xfrm>
-            <a:off x="1024128" y="4837176"/>
-            <a:ext cx="4535424" cy="674827"/>
+              <a:t>WHAT OUR RESULT IMPLIES</a:t>
+            </a:r>
+            <a:endParaRPr lang="en-US" sz="1400" dirty="0"/>
+          </a:p>
+        </p:txBody>
+      </p:sp>
+      <p:sp>
+        <p:nvSpPr>
+          <p:cNvPr id="13" name="Text 11"/>
+          <p:cNvSpPr txBox="1"/>
+          <p:nvPr/>
+        </p:nvSpPr>
+        <p:spPr>
+          <a:xfrm>
+            <a:off x="1024128" y="4742993"/>
+            <a:ext cx="4718304" cy="1125626"/>
           </a:xfrm>
           <a:prstGeom prst="rect">
             <a:avLst/>
@@ -17006,7 +20282,7 @@
               <a:buNone/>
             </a:pPr>
             <a:r>
-              <a:rPr lang="en-US" sz="1030" dirty="0">
+              <a:rPr lang="en-US" sz="1150" dirty="0">
                 <a:solidFill>
                   <a:srgbClr val="6B6B6B"/>
                 </a:solidFill>
@@ -17014,51 +20290,44 @@
                 <a:ea typeface="Calibri" pitchFamily="34" charset="-122"/>
                 <a:cs typeface="Calibri" pitchFamily="34" charset="-120"/>
               </a:rPr>
-              <a:t>Live Gephi (AI Server API), NetworkX figures, and the Streamlit dashboard — all on the real data.</a:t>
-            </a:r>
-            <a:endParaRPr lang="en-US" sz="1030" dirty="0"/>
-          </a:p>
-        </p:txBody>
-      </p:sp>
-      <p:sp>
-        <p:nvSpPr>
-          <p:cNvPr id="13" name="Shape 11"/>
+              <a:t>Because the better signal flips block to block, a system that re-weights structure vs. content per window should beat any fixed blend — a concrete design lead the GNN's attention already points toward.</a:t>
+            </a:r>
+            <a:endParaRPr lang="en-US" sz="1150" dirty="0"/>
+          </a:p>
+        </p:txBody>
+      </p:sp>
+      <p:sp>
+        <p:nvSpPr>
+          <p:cNvPr id="14" name="Shape 12"/>
           <p:cNvSpPr/>
           <p:nvPr/>
         </p:nvSpPr>
         <p:spPr>
           <a:xfrm>
-            <a:off x="6309360" y="1188720"/>
-            <a:ext cx="4937760" cy="1371600"/>
+            <a:off x="6217920" y="3840480"/>
+            <a:ext cx="5120640" cy="2148840"/>
           </a:xfrm>
           <a:prstGeom prst="roundRect">
             <a:avLst>
-              <a:gd name="adj" fmla="val 8000"/>
+              <a:gd name="adj" fmla="val 5106"/>
             </a:avLst>
           </a:prstGeom>
           <a:solidFill>
-            <a:srgbClr val="FFFFFF"/>
+            <a:srgbClr val="E9F4AE"/>
           </a:solidFill>
           <a:ln/>
-          <a:effectLst>
-            <a:outerShdw sx="100000" sy="100000" kx="0" ky="0" algn="bl" rotWithShape="0" blurRad="76200" dist="38100" dir="5400000">
-              <a:srgbClr val="000000">
-                <a:alpha val="18000"/>
-              </a:srgbClr>
-            </a:outerShdw>
-          </a:effectLst>
-        </p:spPr>
-      </p:sp>
-      <p:sp>
-        <p:nvSpPr>
-          <p:cNvPr id="14" name="Text 12"/>
-          <p:cNvSpPr txBox="1"/>
-          <p:nvPr/>
-        </p:nvSpPr>
-        <p:spPr>
-          <a:xfrm>
-            <a:off x="6510528" y="1329538"/>
-            <a:ext cx="4535424" cy="548640"/>
+        </p:spPr>
+      </p:sp>
+      <p:sp>
+        <p:nvSpPr>
+          <p:cNvPr id="15" name="Text 13"/>
+          <p:cNvSpPr txBox="1"/>
+          <p:nvPr/>
+        </p:nvSpPr>
+        <p:spPr>
+          <a:xfrm>
+            <a:off x="6419088" y="3981298"/>
+            <a:ext cx="4718304" cy="859536"/>
           </a:xfrm>
           <a:prstGeom prst="rect">
             <a:avLst/>
@@ -17074,7 +20343,7 @@
               <a:buNone/>
             </a:pPr>
             <a:r>
-              <a:rPr lang="en-US" sz="1250" b="1" dirty="0">
+              <a:rPr lang="en-US" sz="1400" b="1" dirty="0">
                 <a:solidFill>
                   <a:srgbClr val="161616"/>
                 </a:solidFill>
@@ -17082,22 +20351,22 @@
                 <a:ea typeface="Arial" pitchFamily="34" charset="-122"/>
                 <a:cs typeface="Arial" pitchFamily="34" charset="-120"/>
               </a:rPr>
-              <a:t>Full GNN run in the pinned env</a:t>
-            </a:r>
-            <a:endParaRPr lang="en-US" sz="1250" dirty="0"/>
-          </a:p>
-        </p:txBody>
-      </p:sp>
-      <p:sp>
-        <p:nvSpPr>
-          <p:cNvPr id="15" name="Text 13"/>
-          <p:cNvSpPr txBox="1"/>
-          <p:nvPr/>
-        </p:nvSpPr>
-        <p:spPr>
-          <a:xfrm>
-            <a:off x="6510528" y="1764792"/>
-            <a:ext cx="4535424" cy="674827"/>
+              <a:t>LIMITATIONS</a:t>
+            </a:r>
+            <a:endParaRPr lang="en-US" sz="1400" dirty="0"/>
+          </a:p>
+        </p:txBody>
+      </p:sp>
+      <p:sp>
+        <p:nvSpPr>
+          <p:cNvPr id="16" name="Text 14"/>
+          <p:cNvSpPr txBox="1"/>
+          <p:nvPr/>
+        </p:nvSpPr>
+        <p:spPr>
+          <a:xfrm>
+            <a:off x="6419088" y="4742993"/>
+            <a:ext cx="4718304" cy="1125626"/>
           </a:xfrm>
           <a:prstGeom prst="rect">
             <a:avLst/>
@@ -17116,7 +20385,7 @@
               <a:buNone/>
             </a:pPr>
             <a:r>
-              <a:rPr lang="en-US" sz="1030" dirty="0">
+              <a:rPr lang="en-US" sz="1150" dirty="0">
                 <a:solidFill>
                   <a:srgbClr val="6B6B6B"/>
                 </a:solidFill>
@@ -17124,235 +20393,15 @@
                 <a:ea typeface="Calibri" pitchFamily="34" charset="-122"/>
                 <a:cs typeface="Calibri" pitchFamily="34" charset="-120"/>
               </a:rPr>
-              <a:t>Train DistilBERT-GNN (torch 2.2 / dgl 2.2) and drop its real NMI/AMI/ARI next to these baselines.</a:t>
-            </a:r>
-            <a:endParaRPr lang="en-US" sz="1030" dirty="0"/>
-          </a:p>
-        </p:txBody>
-      </p:sp>
-      <p:sp>
-        <p:nvSpPr>
-          <p:cNvPr id="16" name="Shape 14"/>
-          <p:cNvSpPr/>
-          <p:nvPr/>
-        </p:nvSpPr>
-        <p:spPr>
-          <a:xfrm>
-            <a:off x="6309360" y="2724912"/>
-            <a:ext cx="4937760" cy="1371600"/>
-          </a:xfrm>
-          <a:prstGeom prst="roundRect">
-            <a:avLst>
-              <a:gd name="adj" fmla="val 8000"/>
-            </a:avLst>
-          </a:prstGeom>
-          <a:solidFill>
-            <a:srgbClr val="FFFFFF"/>
-          </a:solidFill>
-          <a:ln/>
-          <a:effectLst>
-            <a:outerShdw sx="100000" sy="100000" kx="0" ky="0" algn="bl" rotWithShape="0" blurRad="76200" dist="38100" dir="5400000">
-              <a:srgbClr val="000000">
-                <a:alpha val="18000"/>
-              </a:srgbClr>
-            </a:outerShdw>
-          </a:effectLst>
-        </p:spPr>
+              <a:t>One platform and one 28-day window; test-mode caps (100 msgs/block); 503 pre-labeled events; and full GNN metrics still pending the pinned torch 2.2 / dgl 2.2 environment.</a:t>
+            </a:r>
+            <a:endParaRPr lang="en-US" sz="1150" dirty="0"/>
+          </a:p>
+        </p:txBody>
       </p:sp>
       <p:sp>
         <p:nvSpPr>
           <p:cNvPr id="17" name="Text 15"/>
-          <p:cNvSpPr txBox="1"/>
-          <p:nvPr/>
-        </p:nvSpPr>
-        <p:spPr>
-          <a:xfrm>
-            <a:off x="6510528" y="2865730"/>
-            <a:ext cx="4535424" cy="548640"/>
-          </a:xfrm>
-          <a:prstGeom prst="rect">
-            <a:avLst/>
-          </a:prstGeom>
-          <a:noFill/>
-          <a:ln/>
-        </p:spPr>
-        <p:txBody>
-          <a:bodyPr wrap="square" lIns="0" tIns="0" rIns="0" bIns="0" rtlCol="0" anchor="t"/>
-          <a:lstStyle/>
-          <a:p>
-            <a:pPr algn="l" indent="0" marL="0">
-              <a:buNone/>
-            </a:pPr>
-            <a:r>
-              <a:rPr lang="en-US" sz="1250" b="1" dirty="0">
-                <a:solidFill>
-                  <a:srgbClr val="161616"/>
-                </a:solidFill>
-                <a:latin typeface="Arial" pitchFamily="34" charset="0"/>
-                <a:ea typeface="Arial" pitchFamily="34" charset="-122"/>
-                <a:cs typeface="Arial" pitchFamily="34" charset="-120"/>
-              </a:rPr>
-              <a:t>Scale past test mode</a:t>
-            </a:r>
-            <a:endParaRPr lang="en-US" sz="1250" dirty="0"/>
-          </a:p>
-        </p:txBody>
-      </p:sp>
-      <p:sp>
-        <p:nvSpPr>
-          <p:cNvPr id="18" name="Text 16"/>
-          <p:cNvSpPr txBox="1"/>
-          <p:nvPr/>
-        </p:nvSpPr>
-        <p:spPr>
-          <a:xfrm>
-            <a:off x="6510528" y="3300984"/>
-            <a:ext cx="4535424" cy="674827"/>
-          </a:xfrm>
-          <a:prstGeom prst="rect">
-            <a:avLst/>
-          </a:prstGeom>
-          <a:noFill/>
-          <a:ln/>
-        </p:spPr>
-        <p:txBody>
-          <a:bodyPr wrap="square" lIns="0" tIns="0" rIns="0" bIns="0" rtlCol="0" anchor="t"/>
-          <a:lstStyle/>
-          <a:p>
-            <a:pPr algn="l" indent="0" marL="0">
-              <a:lnSpc>
-                <a:spcPct val="112000"/>
-              </a:lnSpc>
-              <a:buNone/>
-            </a:pPr>
-            <a:r>
-              <a:rPr lang="en-US" sz="1030" dirty="0">
-                <a:solidFill>
-                  <a:srgbClr val="6B6B6B"/>
-                </a:solidFill>
-                <a:latin typeface="Calibri" pitchFamily="34" charset="0"/>
-                <a:ea typeface="Calibri" pitchFamily="34" charset="-122"/>
-                <a:cs typeface="Calibri" pitchFamily="34" charset="-120"/>
-              </a:rPr>
-              <a:t>Lift the 100-msg/block cap to the full per-day blocks; cluster the Gephi exports with OpenOrd for 20k-node maps.</a:t>
-            </a:r>
-            <a:endParaRPr lang="en-US" sz="1030" dirty="0"/>
-          </a:p>
-        </p:txBody>
-      </p:sp>
-      <p:sp>
-        <p:nvSpPr>
-          <p:cNvPr id="19" name="Shape 17"/>
-          <p:cNvSpPr/>
-          <p:nvPr/>
-        </p:nvSpPr>
-        <p:spPr>
-          <a:xfrm>
-            <a:off x="6309360" y="4261104"/>
-            <a:ext cx="4937760" cy="1371600"/>
-          </a:xfrm>
-          <a:prstGeom prst="roundRect">
-            <a:avLst>
-              <a:gd name="adj" fmla="val 8000"/>
-            </a:avLst>
-          </a:prstGeom>
-          <a:solidFill>
-            <a:srgbClr val="FFFFFF"/>
-          </a:solidFill>
-          <a:ln/>
-          <a:effectLst>
-            <a:outerShdw sx="100000" sy="100000" kx="0" ky="0" algn="bl" rotWithShape="0" blurRad="76200" dist="38100" dir="5400000">
-              <a:srgbClr val="000000">
-                <a:alpha val="18000"/>
-              </a:srgbClr>
-            </a:outerShdw>
-          </a:effectLst>
-        </p:spPr>
-      </p:sp>
-      <p:sp>
-        <p:nvSpPr>
-          <p:cNvPr id="20" name="Text 18"/>
-          <p:cNvSpPr txBox="1"/>
-          <p:nvPr/>
-        </p:nvSpPr>
-        <p:spPr>
-          <a:xfrm>
-            <a:off x="6510528" y="4401922"/>
-            <a:ext cx="4535424" cy="548640"/>
-          </a:xfrm>
-          <a:prstGeom prst="rect">
-            <a:avLst/>
-          </a:prstGeom>
-          <a:noFill/>
-          <a:ln/>
-        </p:spPr>
-        <p:txBody>
-          <a:bodyPr wrap="square" lIns="0" tIns="0" rIns="0" bIns="0" rtlCol="0" anchor="t"/>
-          <a:lstStyle/>
-          <a:p>
-            <a:pPr algn="l" indent="0" marL="0">
-              <a:buNone/>
-            </a:pPr>
-            <a:r>
-              <a:rPr lang="en-US" sz="1250" b="1" dirty="0">
-                <a:solidFill>
-                  <a:srgbClr val="161616"/>
-                </a:solidFill>
-                <a:latin typeface="Arial" pitchFamily="34" charset="0"/>
-                <a:ea typeface="Arial" pitchFamily="34" charset="-122"/>
-                <a:cs typeface="Arial" pitchFamily="34" charset="-120"/>
-              </a:rPr>
-              <a:t>Write it up</a:t>
-            </a:r>
-            <a:endParaRPr lang="en-US" sz="1250" dirty="0"/>
-          </a:p>
-        </p:txBody>
-      </p:sp>
-      <p:sp>
-        <p:nvSpPr>
-          <p:cNvPr id="21" name="Text 19"/>
-          <p:cNvSpPr txBox="1"/>
-          <p:nvPr/>
-        </p:nvSpPr>
-        <p:spPr>
-          <a:xfrm>
-            <a:off x="6510528" y="4837176"/>
-            <a:ext cx="4535424" cy="674827"/>
-          </a:xfrm>
-          <a:prstGeom prst="rect">
-            <a:avLst/>
-          </a:prstGeom>
-          <a:noFill/>
-          <a:ln/>
-        </p:spPr>
-        <p:txBody>
-          <a:bodyPr wrap="square" lIns="0" tIns="0" rIns="0" bIns="0" rtlCol="0" anchor="t"/>
-          <a:lstStyle/>
-          <a:p>
-            <a:pPr algn="l" indent="0" marL="0">
-              <a:lnSpc>
-                <a:spcPct val="112000"/>
-              </a:lnSpc>
-              <a:buNone/>
-            </a:pPr>
-            <a:r>
-              <a:rPr lang="en-US" sz="1030" dirty="0">
-                <a:solidFill>
-                  <a:srgbClr val="6B6B6B"/>
-                </a:solidFill>
-                <a:latin typeface="Calibri" pitchFamily="34" charset="0"/>
-                <a:ea typeface="Calibri" pitchFamily="34" charset="-122"/>
-                <a:cs typeface="Calibri" pitchFamily="34" charset="-120"/>
-              </a:rPr>
-              <a:t>The per-block complementarity result is the paper's hook: when does structure beat content, and why?</a:t>
-            </a:r>
-            <a:endParaRPr lang="en-US" sz="1030" dirty="0"/>
-          </a:p>
-        </p:txBody>
-      </p:sp>
-      <p:sp>
-        <p:nvSpPr>
-          <p:cNvPr id="22" name="Text 20"/>
           <p:cNvSpPr txBox="1"/>
           <p:nvPr/>
         </p:nvSpPr>
@@ -17416,34 +20465,14 @@
       </p:grpSpPr>
       <p:sp>
         <p:nvSpPr>
-          <p:cNvPr id="2" name="Shape 0"/>
-          <p:cNvSpPr/>
-          <p:nvPr/>
-        </p:nvSpPr>
-        <p:spPr>
-          <a:xfrm>
-            <a:off x="822960" y="548640"/>
-            <a:ext cx="3520440" cy="502920"/>
-          </a:xfrm>
-          <a:prstGeom prst="rect">
-            <a:avLst/>
-          </a:prstGeom>
-          <a:solidFill>
-            <a:srgbClr val="3FD6D1"/>
-          </a:solidFill>
-          <a:ln/>
-        </p:spPr>
-      </p:sp>
-      <p:sp>
-        <p:nvSpPr>
-          <p:cNvPr id="3" name="Text 1"/>
-          <p:cNvSpPr txBox="1"/>
-          <p:nvPr/>
-        </p:nvSpPr>
-        <p:spPr>
-          <a:xfrm>
-            <a:off x="868680" y="566928"/>
-            <a:ext cx="3520440" cy="502920"/>
+          <p:cNvPr id="2" name="Text 0"/>
+          <p:cNvSpPr txBox="1"/>
+          <p:nvPr/>
+        </p:nvSpPr>
+        <p:spPr>
+          <a:xfrm>
+            <a:off x="822960" y="594360"/>
+            <a:ext cx="1788566" cy="640080"/>
           </a:xfrm>
           <a:prstGeom prst="rect">
             <a:avLst/>
@@ -17459,7 +20488,7 @@
               <a:buNone/>
             </a:pPr>
             <a:r>
-              <a:rPr lang="en-US" sz="3000" b="1" dirty="0">
+              <a:rPr lang="en-US" sz="3600" b="1" dirty="0">
                 <a:solidFill>
                   <a:srgbClr val="161616"/>
                 </a:solidFill>
@@ -17467,11 +20496,33 @@
                 <a:ea typeface="Arial" pitchFamily="34" charset="-122"/>
                 <a:cs typeface="Arial" pitchFamily="34" charset="-120"/>
               </a:rPr>
-              <a:t>REFERENCES</a:t>
-            </a:r>
-            <a:endParaRPr lang="en-US" sz="3000" dirty="0"/>
-          </a:p>
-        </p:txBody>
+              <a:t>OUR </a:t>
+            </a:r>
+            <a:endParaRPr lang="en-US" sz="3600" dirty="0"/>
+          </a:p>
+        </p:txBody>
+      </p:sp>
+      <p:sp>
+        <p:nvSpPr>
+          <p:cNvPr id="3" name="Shape 1"/>
+          <p:cNvSpPr/>
+          <p:nvPr/>
+        </p:nvSpPr>
+        <p:spPr>
+          <a:xfrm>
+            <a:off x="2657246" y="502920"/>
+            <a:ext cx="4242816" cy="777240"/>
+          </a:xfrm>
+          <a:prstGeom prst="rect">
+            <a:avLst/>
+          </a:prstGeom>
+          <a:ln w="19050">
+            <a:solidFill>
+              <a:srgbClr val="161616"/>
+            </a:solidFill>
+            <a:prstDash val="dash"/>
+          </a:ln>
+        </p:spPr>
       </p:sp>
       <p:sp>
         <p:nvSpPr>
@@ -17481,30 +20532,169 @@
         </p:nvSpPr>
         <p:spPr>
           <a:xfrm>
-            <a:off x="822960" y="1417320"/>
-            <a:ext cx="5074920" cy="4846320"/>
-          </a:xfrm>
-          <a:prstGeom prst="rect">
-            <a:avLst/>
-          </a:prstGeom>
-          <a:noFill/>
-          <a:ln/>
-        </p:spPr>
-        <p:txBody>
-          <a:bodyPr wrap="square" lIns="0" tIns="0" rIns="0" bIns="0" rtlCol="0" anchor="t"/>
+            <a:off x="2794406" y="594360"/>
+            <a:ext cx="4242816" cy="640080"/>
+          </a:xfrm>
+          <a:prstGeom prst="rect">
+            <a:avLst/>
+          </a:prstGeom>
+          <a:noFill/>
+          <a:ln/>
+        </p:spPr>
+        <p:txBody>
+          <a:bodyPr wrap="none" lIns="0" tIns="0" rIns="0" bIns="0" rtlCol="0" anchor="ctr"/>
           <a:lstStyle/>
           <a:p>
             <a:pPr indent="0" marL="0">
+              <a:buNone/>
+            </a:pPr>
+            <a:r>
+              <a:rPr lang="en-US" sz="3600" b="1" dirty="0">
+                <a:solidFill>
+                  <a:srgbClr val="161616"/>
+                </a:solidFill>
+                <a:latin typeface="Arial" pitchFamily="34" charset="0"/>
+                <a:ea typeface="Arial" pitchFamily="34" charset="-122"/>
+                <a:cs typeface="Arial" pitchFamily="34" charset="-120"/>
+              </a:rPr>
+              <a:t>CONCLUSION</a:t>
+            </a:r>
+            <a:endParaRPr lang="en-US" sz="3600" dirty="0"/>
+          </a:p>
+        </p:txBody>
+      </p:sp>
+      <p:sp>
+        <p:nvSpPr>
+          <p:cNvPr id="5" name="Text 3"/>
+          <p:cNvSpPr txBox="1"/>
+          <p:nvPr/>
+        </p:nvSpPr>
+        <p:spPr>
+          <a:xfrm>
+            <a:off x="822960" y="1691640"/>
+            <a:ext cx="10515600" cy="1828800"/>
+          </a:xfrm>
+          <a:prstGeom prst="rect">
+            <a:avLst/>
+          </a:prstGeom>
+          <a:noFill/>
+          <a:ln/>
+        </p:spPr>
+        <p:txBody>
+          <a:bodyPr wrap="square" lIns="0" tIns="0" rIns="0" bIns="0" rtlCol="0" anchor="ctr"/>
+          <a:lstStyle/>
+          <a:p>
+            <a:pPr indent="0" marL="0">
+              <a:lnSpc>
+                <a:spcPct val="130000"/>
+              </a:lnSpc>
+              <a:buNone/>
+            </a:pPr>
+            <a:r>
+              <a:rPr lang="en-US" sz="1600" dirty="0">
+                <a:solidFill>
+                  <a:srgbClr val="161616"/>
+                </a:solidFill>
+                <a:latin typeface="Calibri" pitchFamily="34" charset="0"/>
+                <a:ea typeface="Calibri" pitchFamily="34" charset="-122"/>
+                <a:cs typeface="Calibri" pitchFamily="34" charset="-120"/>
+              </a:rPr>
+              <a:t>We measured the two classical baselines the model is meant to beat, on the real benchmark. Structure (Louvain) and content (DistilBERT) land within 0.01 NMI of each other — yet the winner flips block to block. Neither signal is sufficient alone, and they are complementary exactly where it matters: on the same incoming messages. That gap — fusing structure and content per node — is precisely what DistilBERT-GNN's attention + contrastive objective is built to close.</a:t>
+            </a:r>
+            <a:endParaRPr lang="en-US" sz="1600" dirty="0"/>
+          </a:p>
+        </p:txBody>
+      </p:sp>
+      <p:sp>
+        <p:nvSpPr>
+          <p:cNvPr id="6" name="Shape 4"/>
+          <p:cNvSpPr/>
+          <p:nvPr/>
+        </p:nvSpPr>
+        <p:spPr>
+          <a:xfrm>
+            <a:off x="822960" y="3931920"/>
+            <a:ext cx="10515600" cy="1508760"/>
+          </a:xfrm>
+          <a:prstGeom prst="rect">
+            <a:avLst/>
+          </a:prstGeom>
+          <a:ln w="19050">
+            <a:solidFill>
+              <a:srgbClr val="161616"/>
+            </a:solidFill>
+            <a:prstDash val="dash"/>
+          </a:ln>
+        </p:spPr>
+      </p:sp>
+      <p:sp>
+        <p:nvSpPr>
+          <p:cNvPr id="7" name="Text 5"/>
+          <p:cNvSpPr txBox="1"/>
+          <p:nvPr/>
+        </p:nvSpPr>
+        <p:spPr>
+          <a:xfrm>
+            <a:off x="1097280" y="4114800"/>
+            <a:ext cx="9966960" cy="365760"/>
+          </a:xfrm>
+          <a:prstGeom prst="rect">
+            <a:avLst/>
+          </a:prstGeom>
+          <a:noFill/>
+          <a:ln/>
+        </p:spPr>
+        <p:txBody>
+          <a:bodyPr wrap="square" lIns="0" tIns="0" rIns="0" bIns="0" rtlCol="0" anchor="ctr"/>
+          <a:lstStyle/>
+          <a:p>
+            <a:pPr algn="ctr" indent="0" marL="0">
+              <a:buNone/>
+            </a:pPr>
+            <a:r>
+              <a:rPr lang="en-US" sz="1500" b="1" dirty="0">
+                <a:solidFill>
+                  <a:srgbClr val="1A9E99"/>
+                </a:solidFill>
+                <a:latin typeface="Arial" pitchFamily="34" charset="0"/>
+                <a:ea typeface="Arial" pitchFamily="34" charset="-122"/>
+                <a:cs typeface="Arial" pitchFamily="34" charset="-120"/>
+              </a:rPr>
+              <a:t>THE TAKEAWAY</a:t>
+            </a:r>
+            <a:endParaRPr lang="en-US" sz="1500" dirty="0"/>
+          </a:p>
+        </p:txBody>
+      </p:sp>
+      <p:sp>
+        <p:nvSpPr>
+          <p:cNvPr id="8" name="Text 6"/>
+          <p:cNvSpPr txBox="1"/>
+          <p:nvPr/>
+        </p:nvSpPr>
+        <p:spPr>
+          <a:xfrm>
+            <a:off x="1188720" y="4526280"/>
+            <a:ext cx="9784080" cy="822960"/>
+          </a:xfrm>
+          <a:prstGeom prst="rect">
+            <a:avLst/>
+          </a:prstGeom>
+          <a:noFill/>
+          <a:ln/>
+        </p:spPr>
+        <p:txBody>
+          <a:bodyPr wrap="square" lIns="0" tIns="0" rIns="0" bIns="0" rtlCol="0" anchor="ctr"/>
+          <a:lstStyle/>
+          <a:p>
+            <a:pPr algn="ctr" indent="0" marL="0">
               <a:lnSpc>
                 <a:spcPct val="120000"/>
               </a:lnSpc>
-              <a:spcAft>
-                <a:spcPts val="1400"/>
-              </a:spcAft>
-              <a:buNone/>
-            </a:pPr>
-            <a:r>
-              <a:rPr lang="en-US" sz="1100" dirty="0">
+              <a:buNone/>
+            </a:pPr>
+            <a:r>
+              <a:rPr lang="en-US" sz="1500" b="1" dirty="0">
                 <a:solidFill>
                   <a:srgbClr val="161616"/>
                 </a:solidFill>
@@ -17512,244 +20702,15 @@
                 <a:ea typeface="Calibri" pitchFamily="34" charset="-122"/>
                 <a:cs typeface="Calibri" pitchFamily="34" charset="-120"/>
               </a:rPr>
-              <a:t>Abagissa, A. T., Saxena, S., &amp; Chandra, J. “DistilBERT-GNN: A Powerful Approach to Social Media Event Detection.” Research Square preprint, 2024.</a:t>
-            </a:r>
-            <a:endParaRPr lang="en-US" sz="1100" dirty="0"/>
-          </a:p>
-          <a:p>
-            <a:pPr indent="0" marL="0">
-              <a:lnSpc>
-                <a:spcPct val="120000"/>
-              </a:lnSpc>
-              <a:spcAft>
-                <a:spcPts val="1400"/>
-              </a:spcAft>
-              <a:buNone/>
-            </a:pPr>
-            <a:r>
-              <a:rPr lang="en-US" sz="1100" dirty="0">
-                <a:solidFill>
-                  <a:srgbClr val="161616"/>
-                </a:solidFill>
-                <a:latin typeface="Calibri" pitchFamily="34" charset="0"/>
-                <a:ea typeface="Calibri" pitchFamily="34" charset="-122"/>
-                <a:cs typeface="Calibri" pitchFamily="34" charset="-120"/>
-              </a:rPr>
-              <a:t>Blondel, V. D., et al. “Fast Unfolding of Communities in Large Networks.” J. Stat. Mech., 2008.</a:t>
-            </a:r>
-            <a:endParaRPr lang="en-US" sz="1100" dirty="0"/>
-          </a:p>
-          <a:p>
-            <a:pPr indent="0" marL="0">
-              <a:lnSpc>
-                <a:spcPct val="120000"/>
-              </a:lnSpc>
-              <a:spcAft>
-                <a:spcPts val="1400"/>
-              </a:spcAft>
-              <a:buNone/>
-            </a:pPr>
-            <a:r>
-              <a:rPr lang="en-US" sz="1100" dirty="0">
-                <a:solidFill>
-                  <a:srgbClr val="161616"/>
-                </a:solidFill>
-                <a:latin typeface="Calibri" pitchFamily="34" charset="0"/>
-                <a:ea typeface="Calibri" pitchFamily="34" charset="-122"/>
-                <a:cs typeface="Calibri" pitchFamily="34" charset="-120"/>
-              </a:rPr>
-              <a:t>Veličković, P., et al. “Graph Attention Networks.” ICLR, 2018.</a:t>
-            </a:r>
-            <a:endParaRPr lang="en-US" sz="1100" dirty="0"/>
-          </a:p>
-          <a:p>
-            <a:pPr indent="0" marL="0">
-              <a:lnSpc>
-                <a:spcPct val="120000"/>
-              </a:lnSpc>
-              <a:spcAft>
-                <a:spcPts val="1400"/>
-              </a:spcAft>
-              <a:buNone/>
-            </a:pPr>
-            <a:r>
-              <a:rPr lang="en-US" sz="1100" dirty="0">
-                <a:solidFill>
-                  <a:srgbClr val="161616"/>
-                </a:solidFill>
-                <a:latin typeface="Calibri" pitchFamily="34" charset="0"/>
-                <a:ea typeface="Calibri" pitchFamily="34" charset="-122"/>
-                <a:cs typeface="Calibri" pitchFamily="34" charset="-120"/>
-              </a:rPr>
-              <a:t>Newman, M. E. J. “Modularity and Community Structure in Networks.” PNAS, 2006.</a:t>
-            </a:r>
-            <a:endParaRPr lang="en-US" sz="1100" dirty="0"/>
-          </a:p>
-          <a:p>
-            <a:pPr indent="0" marL="0">
-              <a:lnSpc>
-                <a:spcPct val="120000"/>
-              </a:lnSpc>
-              <a:spcAft>
-                <a:spcPts val="1400"/>
-              </a:spcAft>
-              <a:buNone/>
-            </a:pPr>
-            <a:r>
-              <a:rPr lang="en-US" sz="1100" dirty="0">
-                <a:solidFill>
-                  <a:srgbClr val="161616"/>
-                </a:solidFill>
-                <a:latin typeface="Calibri" pitchFamily="34" charset="0"/>
-                <a:ea typeface="Calibri" pitchFamily="34" charset="-122"/>
-                <a:cs typeface="Calibri" pitchFamily="34" charset="-120"/>
-              </a:rPr>
-              <a:t>Ren, Y., et al. “Each Encoder Matters: Querying Social-Media Streams via QSGNN.” 2022.</a:t>
-            </a:r>
-            <a:endParaRPr lang="en-US" sz="1100" dirty="0"/>
-          </a:p>
-        </p:txBody>
-      </p:sp>
-      <p:sp>
-        <p:nvSpPr>
-          <p:cNvPr id="5" name="Text 3"/>
-          <p:cNvSpPr txBox="1"/>
-          <p:nvPr/>
-        </p:nvSpPr>
-        <p:spPr>
-          <a:xfrm>
-            <a:off x="6263640" y="1417320"/>
-            <a:ext cx="5074920" cy="4846320"/>
-          </a:xfrm>
-          <a:prstGeom prst="rect">
-            <a:avLst/>
-          </a:prstGeom>
-          <a:noFill/>
-          <a:ln/>
-        </p:spPr>
-        <p:txBody>
-          <a:bodyPr wrap="square" lIns="0" tIns="0" rIns="0" bIns="0" rtlCol="0" anchor="t"/>
-          <a:lstStyle/>
-          <a:p>
-            <a:pPr indent="0" marL="0">
-              <a:lnSpc>
-                <a:spcPct val="120000"/>
-              </a:lnSpc>
-              <a:spcAft>
-                <a:spcPts val="1400"/>
-              </a:spcAft>
-              <a:buNone/>
-            </a:pPr>
-            <a:r>
-              <a:rPr lang="en-US" sz="1100" dirty="0">
-                <a:solidFill>
-                  <a:srgbClr val="161616"/>
-                </a:solidFill>
-                <a:latin typeface="Calibri" pitchFamily="34" charset="0"/>
-                <a:ea typeface="Calibri" pitchFamily="34" charset="-122"/>
-                <a:cs typeface="Calibri" pitchFamily="34" charset="-120"/>
-              </a:rPr>
-              <a:t>Cao, Y., et al. “Knowledge-Preserving Incremental Social Event Detection via GNN (KPGNN).” 2021.</a:t>
-            </a:r>
-            <a:endParaRPr lang="en-US" sz="1100" dirty="0"/>
-          </a:p>
-          <a:p>
-            <a:pPr indent="0" marL="0">
-              <a:lnSpc>
-                <a:spcPct val="120000"/>
-              </a:lnSpc>
-              <a:spcAft>
-                <a:spcPts val="1400"/>
-              </a:spcAft>
-              <a:buNone/>
-            </a:pPr>
-            <a:r>
-              <a:rPr lang="en-US" sz="1100" dirty="0">
-                <a:solidFill>
-                  <a:srgbClr val="161616"/>
-                </a:solidFill>
-                <a:latin typeface="Calibri" pitchFamily="34" charset="0"/>
-                <a:ea typeface="Calibri" pitchFamily="34" charset="-122"/>
-                <a:cs typeface="Calibri" pitchFamily="34" charset="-120"/>
-              </a:rPr>
-              <a:t>Peng, H., et al. “Fine-Grained Event Categorization with Heterogeneous GCN (PP-GCN).” 2019.</a:t>
-            </a:r>
-            <a:endParaRPr lang="en-US" sz="1100" dirty="0"/>
-          </a:p>
-          <a:p>
-            <a:pPr indent="0" marL="0">
-              <a:lnSpc>
-                <a:spcPct val="120000"/>
-              </a:lnSpc>
-              <a:spcAft>
-                <a:spcPts val="1400"/>
-              </a:spcAft>
-              <a:buNone/>
-            </a:pPr>
-            <a:r>
-              <a:rPr lang="en-US" sz="1100" dirty="0">
-                <a:solidFill>
-                  <a:srgbClr val="161616"/>
-                </a:solidFill>
-                <a:latin typeface="Calibri" pitchFamily="34" charset="0"/>
-                <a:ea typeface="Calibri" pitchFamily="34" charset="-122"/>
-                <a:cs typeface="Calibri" pitchFamily="34" charset="-120"/>
-              </a:rPr>
-              <a:t>Liu, B., et al. “EventX: Open-Domain Event Extraction.” 2020.</a:t>
-            </a:r>
-            <a:endParaRPr lang="en-US" sz="1100" dirty="0"/>
-          </a:p>
-          <a:p>
-            <a:pPr indent="0" marL="0">
-              <a:lnSpc>
-                <a:spcPct val="120000"/>
-              </a:lnSpc>
-              <a:spcAft>
-                <a:spcPts val="1400"/>
-              </a:spcAft>
-              <a:buNone/>
-            </a:pPr>
-            <a:r>
-              <a:rPr lang="en-US" sz="1100" dirty="0">
-                <a:solidFill>
-                  <a:srgbClr val="161616"/>
-                </a:solidFill>
-                <a:latin typeface="Calibri" pitchFamily="34" charset="0"/>
-                <a:ea typeface="Calibri" pitchFamily="34" charset="-122"/>
-                <a:cs typeface="Calibri" pitchFamily="34" charset="-120"/>
-              </a:rPr>
-              <a:t>Bastian, M., Heymann, S., &amp; Jacomy, M. “Gephi: An Open Source Software for Exploring and Manipulating Networks.” ICWSM, 2009.</a:t>
-            </a:r>
-            <a:endParaRPr lang="en-US" sz="1100" dirty="0"/>
-          </a:p>
-          <a:p>
-            <a:pPr indent="0" marL="0">
-              <a:lnSpc>
-                <a:spcPct val="120000"/>
-              </a:lnSpc>
-              <a:spcAft>
-                <a:spcPts val="1400"/>
-              </a:spcAft>
-              <a:buNone/>
-            </a:pPr>
-            <a:r>
-              <a:rPr lang="en-US" sz="1100" dirty="0">
-                <a:solidFill>
-                  <a:srgbClr val="161616"/>
-                </a:solidFill>
-                <a:latin typeface="Calibri" pitchFamily="34" charset="0"/>
-                <a:ea typeface="Calibri" pitchFamily="34" charset="-122"/>
-                <a:cs typeface="Calibri" pitchFamily="34" charset="-120"/>
-              </a:rPr>
-              <a:t>Hagberg, A., Schult, D., &amp; Swart, P. “Exploring Network Structure with NetworkX.” SciPy, 2008.</a:t>
-            </a:r>
-            <a:endParaRPr lang="en-US" sz="1100" dirty="0"/>
-          </a:p>
-        </p:txBody>
-      </p:sp>
-      <p:sp>
-        <p:nvSpPr>
-          <p:cNvPr id="6" name="Text 4"/>
+              <a:t>ON REAL DATA, STRUCTURE AND CONTENT ARE A TIE THAT DISAGREES PER BLOCK — WHICH IS THE STRONGEST CASE FOR A MODEL THAT FUSES BOTH</a:t>
+            </a:r>
+            <a:endParaRPr lang="en-US" sz="1500" dirty="0"/>
+          </a:p>
+        </p:txBody>
+      </p:sp>
+      <p:sp>
+        <p:nvSpPr>
+          <p:cNvPr id="9" name="Text 7"/>
           <p:cNvSpPr txBox="1"/>
           <p:nvPr/>
         </p:nvSpPr>
@@ -17819,8 +20780,8 @@
         </p:nvSpPr>
         <p:spPr>
           <a:xfrm>
-            <a:off x="2743200" y="2834640"/>
-            <a:ext cx="3017520" cy="1005840"/>
+            <a:off x="822960" y="502920"/>
+            <a:ext cx="4937760" cy="548640"/>
           </a:xfrm>
           <a:prstGeom prst="rect">
             <a:avLst/>
@@ -17832,11 +20793,11 @@
           <a:bodyPr wrap="square" lIns="0" tIns="0" rIns="0" bIns="0" rtlCol="0" anchor="ctr"/>
           <a:lstStyle/>
           <a:p>
-            <a:pPr algn="r" indent="0" marL="0">
-              <a:buNone/>
-            </a:pPr>
-            <a:r>
-              <a:rPr lang="en-US" sz="5400" b="1" dirty="0">
+            <a:pPr indent="0" marL="0">
+              <a:buNone/>
+            </a:pPr>
+            <a:r>
+              <a:rPr lang="en-US" sz="2600" b="1" dirty="0">
                 <a:solidFill>
                   <a:srgbClr val="161616"/>
                 </a:solidFill>
@@ -17844,6 +20805,1205 @@
                 <a:ea typeface="Arial" pitchFamily="34" charset="-122"/>
                 <a:cs typeface="Arial" pitchFamily="34" charset="-120"/>
               </a:rPr>
+              <a:t>WHAT WE DID</a:t>
+            </a:r>
+            <a:endParaRPr lang="en-US" sz="2600" dirty="0"/>
+          </a:p>
+        </p:txBody>
+      </p:sp>
+      <p:sp>
+        <p:nvSpPr>
+          <p:cNvPr id="3" name="Text 1"/>
+          <p:cNvSpPr txBox="1"/>
+          <p:nvPr/>
+        </p:nvSpPr>
+        <p:spPr>
+          <a:xfrm>
+            <a:off x="6309360" y="502920"/>
+            <a:ext cx="4937760" cy="548640"/>
+          </a:xfrm>
+          <a:prstGeom prst="rect">
+            <a:avLst/>
+          </a:prstGeom>
+          <a:noFill/>
+          <a:ln/>
+        </p:spPr>
+        <p:txBody>
+          <a:bodyPr wrap="square" lIns="0" tIns="0" rIns="0" bIns="0" rtlCol="0" anchor="ctr"/>
+          <a:lstStyle/>
+          <a:p>
+            <a:pPr indent="0" marL="0">
+              <a:buNone/>
+            </a:pPr>
+            <a:r>
+              <a:rPr lang="en-US" sz="2600" b="1" dirty="0">
+                <a:solidFill>
+                  <a:srgbClr val="161616"/>
+                </a:solidFill>
+                <a:latin typeface="Arial" pitchFamily="34" charset="0"/>
+                <a:ea typeface="Arial" pitchFamily="34" charset="-122"/>
+                <a:cs typeface="Arial" pitchFamily="34" charset="-120"/>
+              </a:rPr>
+              <a:t>WHAT COMES NEXT</a:t>
+            </a:r>
+            <a:endParaRPr lang="en-US" sz="2600" dirty="0"/>
+          </a:p>
+        </p:txBody>
+      </p:sp>
+      <p:sp>
+        <p:nvSpPr>
+          <p:cNvPr id="4" name="Shape 2"/>
+          <p:cNvSpPr/>
+          <p:nvPr/>
+        </p:nvSpPr>
+        <p:spPr>
+          <a:xfrm>
+            <a:off x="822960" y="1188720"/>
+            <a:ext cx="4937760" cy="1371600"/>
+          </a:xfrm>
+          <a:prstGeom prst="roundRect">
+            <a:avLst>
+              <a:gd name="adj" fmla="val 8000"/>
+            </a:avLst>
+          </a:prstGeom>
+          <a:solidFill>
+            <a:srgbClr val="FFFFFF"/>
+          </a:solidFill>
+          <a:ln/>
+          <a:effectLst>
+            <a:outerShdw sx="100000" sy="100000" kx="0" ky="0" algn="bl" rotWithShape="0" blurRad="76200" dist="38100" dir="5400000">
+              <a:srgbClr val="000000">
+                <a:alpha val="18000"/>
+              </a:srgbClr>
+            </a:outerShdw>
+          </a:effectLst>
+        </p:spPr>
+      </p:sp>
+      <p:sp>
+        <p:nvSpPr>
+          <p:cNvPr id="5" name="Text 3"/>
+          <p:cNvSpPr txBox="1"/>
+          <p:nvPr/>
+        </p:nvSpPr>
+        <p:spPr>
+          <a:xfrm>
+            <a:off x="1024128" y="1329538"/>
+            <a:ext cx="4535424" cy="548640"/>
+          </a:xfrm>
+          <a:prstGeom prst="rect">
+            <a:avLst/>
+          </a:prstGeom>
+          <a:noFill/>
+          <a:ln/>
+        </p:spPr>
+        <p:txBody>
+          <a:bodyPr wrap="square" lIns="0" tIns="0" rIns="0" bIns="0" rtlCol="0" anchor="t"/>
+          <a:lstStyle/>
+          <a:p>
+            <a:pPr algn="l" indent="0" marL="0">
+              <a:buNone/>
+            </a:pPr>
+            <a:r>
+              <a:rPr lang="en-US" sz="1250" b="1" dirty="0">
+                <a:solidFill>
+                  <a:srgbClr val="161616"/>
+                </a:solidFill>
+                <a:latin typeface="Arial" pitchFamily="34" charset="0"/>
+                <a:ea typeface="Arial" pitchFamily="34" charset="-122"/>
+                <a:cs typeface="Arial" pitchFamily="34" charset="-120"/>
+              </a:rPr>
+              <a:t>Ran the real pipeline end to end</a:t>
+            </a:r>
+            <a:endParaRPr lang="en-US" sz="1250" dirty="0"/>
+          </a:p>
+        </p:txBody>
+      </p:sp>
+      <p:sp>
+        <p:nvSpPr>
+          <p:cNvPr id="6" name="Text 4"/>
+          <p:cNvSpPr txBox="1"/>
+          <p:nvPr/>
+        </p:nvSpPr>
+        <p:spPr>
+          <a:xfrm>
+            <a:off x="1024128" y="1764792"/>
+            <a:ext cx="4535424" cy="674827"/>
+          </a:xfrm>
+          <a:prstGeom prst="rect">
+            <a:avLst/>
+          </a:prstGeom>
+          <a:noFill/>
+          <a:ln/>
+        </p:spPr>
+        <p:txBody>
+          <a:bodyPr wrap="square" lIns="0" tIns="0" rIns="0" bIns="0" rtlCol="0" anchor="t"/>
+          <a:lstStyle/>
+          <a:p>
+            <a:pPr algn="l" indent="0" marL="0">
+              <a:lnSpc>
+                <a:spcPct val="112000"/>
+              </a:lnSpc>
+              <a:buNone/>
+            </a:pPr>
+            <a:r>
+              <a:rPr lang="en-US" sz="1030" dirty="0">
+                <a:solidFill>
+                  <a:srgbClr val="6B6B6B"/>
+                </a:solidFill>
+                <a:latin typeface="Calibri" pitchFamily="34" charset="0"/>
+                <a:ea typeface="Calibri" pitchFamily="34" charset="-122"/>
+                <a:cs typeface="Calibri" pitchFamily="34" charset="-120"/>
+              </a:rPr>
+              <a:t>68,841 tweets → real DistilBERT embeddings → 22 real message graphs, ~8 min on CPU.</a:t>
+            </a:r>
+            <a:endParaRPr lang="en-US" sz="1030" dirty="0"/>
+          </a:p>
+        </p:txBody>
+      </p:sp>
+      <p:sp>
+        <p:nvSpPr>
+          <p:cNvPr id="7" name="Shape 5"/>
+          <p:cNvSpPr/>
+          <p:nvPr/>
+        </p:nvSpPr>
+        <p:spPr>
+          <a:xfrm>
+            <a:off x="822960" y="2724912"/>
+            <a:ext cx="4937760" cy="1371600"/>
+          </a:xfrm>
+          <a:prstGeom prst="roundRect">
+            <a:avLst>
+              <a:gd name="adj" fmla="val 8000"/>
+            </a:avLst>
+          </a:prstGeom>
+          <a:solidFill>
+            <a:srgbClr val="FFFFFF"/>
+          </a:solidFill>
+          <a:ln/>
+          <a:effectLst>
+            <a:outerShdw sx="100000" sy="100000" kx="0" ky="0" algn="bl" rotWithShape="0" blurRad="76200" dist="38100" dir="5400000">
+              <a:srgbClr val="000000">
+                <a:alpha val="18000"/>
+              </a:srgbClr>
+            </a:outerShdw>
+          </a:effectLst>
+        </p:spPr>
+      </p:sp>
+      <p:sp>
+        <p:nvSpPr>
+          <p:cNvPr id="8" name="Text 6"/>
+          <p:cNvSpPr txBox="1"/>
+          <p:nvPr/>
+        </p:nvSpPr>
+        <p:spPr>
+          <a:xfrm>
+            <a:off x="1024128" y="2865730"/>
+            <a:ext cx="4535424" cy="548640"/>
+          </a:xfrm>
+          <a:prstGeom prst="rect">
+            <a:avLst/>
+          </a:prstGeom>
+          <a:noFill/>
+          <a:ln/>
+        </p:spPr>
+        <p:txBody>
+          <a:bodyPr wrap="square" lIns="0" tIns="0" rIns="0" bIns="0" rtlCol="0" anchor="t"/>
+          <a:lstStyle/>
+          <a:p>
+            <a:pPr algn="l" indent="0" marL="0">
+              <a:buNone/>
+            </a:pPr>
+            <a:r>
+              <a:rPr lang="en-US" sz="1250" b="1" dirty="0">
+                <a:solidFill>
+                  <a:srgbClr val="161616"/>
+                </a:solidFill>
+                <a:latin typeface="Arial" pitchFamily="34" charset="0"/>
+                <a:ea typeface="Arial" pitchFamily="34" charset="-122"/>
+                <a:cs typeface="Arial" pitchFamily="34" charset="-120"/>
+              </a:rPr>
+              <a:t>Measured two classical baselines</a:t>
+            </a:r>
+            <a:endParaRPr lang="en-US" sz="1250" dirty="0"/>
+          </a:p>
+        </p:txBody>
+      </p:sp>
+      <p:sp>
+        <p:nvSpPr>
+          <p:cNvPr id="9" name="Text 7"/>
+          <p:cNvSpPr txBox="1"/>
+          <p:nvPr/>
+        </p:nvSpPr>
+        <p:spPr>
+          <a:xfrm>
+            <a:off x="1024128" y="3300984"/>
+            <a:ext cx="4535424" cy="674827"/>
+          </a:xfrm>
+          <a:prstGeom prst="rect">
+            <a:avLst/>
+          </a:prstGeom>
+          <a:noFill/>
+          <a:ln/>
+        </p:spPr>
+        <p:txBody>
+          <a:bodyPr wrap="square" lIns="0" tIns="0" rIns="0" bIns="0" rtlCol="0" anchor="t"/>
+          <a:lstStyle/>
+          <a:p>
+            <a:pPr algn="l" indent="0" marL="0">
+              <a:lnSpc>
+                <a:spcPct val="112000"/>
+              </a:lnSpc>
+              <a:buNone/>
+            </a:pPr>
+            <a:r>
+              <a:rPr lang="en-US" sz="1030" dirty="0">
+                <a:solidFill>
+                  <a:srgbClr val="6B6B6B"/>
+                </a:solidFill>
+                <a:latin typeface="Calibri" pitchFamily="34" charset="0"/>
+                <a:ea typeface="Calibri" pitchFamily="34" charset="-122"/>
+                <a:cs typeface="Calibri" pitchFamily="34" charset="-120"/>
+              </a:rPr>
+              <a:t>Louvain (structure) and KMeans/DistilBERT (content) scored vs. ground-truth events on every block.</a:t>
+            </a:r>
+            <a:endParaRPr lang="en-US" sz="1030" dirty="0"/>
+          </a:p>
+        </p:txBody>
+      </p:sp>
+      <p:sp>
+        <p:nvSpPr>
+          <p:cNvPr id="10" name="Shape 8"/>
+          <p:cNvSpPr/>
+          <p:nvPr/>
+        </p:nvSpPr>
+        <p:spPr>
+          <a:xfrm>
+            <a:off x="822960" y="4261104"/>
+            <a:ext cx="4937760" cy="1371600"/>
+          </a:xfrm>
+          <a:prstGeom prst="roundRect">
+            <a:avLst>
+              <a:gd name="adj" fmla="val 8000"/>
+            </a:avLst>
+          </a:prstGeom>
+          <a:solidFill>
+            <a:srgbClr val="FFFFFF"/>
+          </a:solidFill>
+          <a:ln/>
+          <a:effectLst>
+            <a:outerShdw sx="100000" sy="100000" kx="0" ky="0" algn="bl" rotWithShape="0" blurRad="76200" dist="38100" dir="5400000">
+              <a:srgbClr val="000000">
+                <a:alpha val="18000"/>
+              </a:srgbClr>
+            </a:outerShdw>
+          </a:effectLst>
+        </p:spPr>
+      </p:sp>
+      <p:sp>
+        <p:nvSpPr>
+          <p:cNvPr id="11" name="Text 9"/>
+          <p:cNvSpPr txBox="1"/>
+          <p:nvPr/>
+        </p:nvSpPr>
+        <p:spPr>
+          <a:xfrm>
+            <a:off x="1024128" y="4401922"/>
+            <a:ext cx="4535424" cy="548640"/>
+          </a:xfrm>
+          <a:prstGeom prst="rect">
+            <a:avLst/>
+          </a:prstGeom>
+          <a:noFill/>
+          <a:ln/>
+        </p:spPr>
+        <p:txBody>
+          <a:bodyPr wrap="square" lIns="0" tIns="0" rIns="0" bIns="0" rtlCol="0" anchor="t"/>
+          <a:lstStyle/>
+          <a:p>
+            <a:pPr algn="l" indent="0" marL="0">
+              <a:buNone/>
+            </a:pPr>
+            <a:r>
+              <a:rPr lang="en-US" sz="1250" b="1" dirty="0">
+                <a:solidFill>
+                  <a:srgbClr val="161616"/>
+                </a:solidFill>
+                <a:latin typeface="Arial" pitchFamily="34" charset="0"/>
+                <a:ea typeface="Arial" pitchFamily="34" charset="-122"/>
+                <a:cs typeface="Arial" pitchFamily="34" charset="-120"/>
+              </a:rPr>
+              <a:t>Visualized it three ways</a:t>
+            </a:r>
+            <a:endParaRPr lang="en-US" sz="1250" dirty="0"/>
+          </a:p>
+        </p:txBody>
+      </p:sp>
+      <p:sp>
+        <p:nvSpPr>
+          <p:cNvPr id="12" name="Text 10"/>
+          <p:cNvSpPr txBox="1"/>
+          <p:nvPr/>
+        </p:nvSpPr>
+        <p:spPr>
+          <a:xfrm>
+            <a:off x="1024128" y="4837176"/>
+            <a:ext cx="4535424" cy="674827"/>
+          </a:xfrm>
+          <a:prstGeom prst="rect">
+            <a:avLst/>
+          </a:prstGeom>
+          <a:noFill/>
+          <a:ln/>
+        </p:spPr>
+        <p:txBody>
+          <a:bodyPr wrap="square" lIns="0" tIns="0" rIns="0" bIns="0" rtlCol="0" anchor="t"/>
+          <a:lstStyle/>
+          <a:p>
+            <a:pPr algn="l" indent="0" marL="0">
+              <a:lnSpc>
+                <a:spcPct val="112000"/>
+              </a:lnSpc>
+              <a:buNone/>
+            </a:pPr>
+            <a:r>
+              <a:rPr lang="en-US" sz="1030" dirty="0">
+                <a:solidFill>
+                  <a:srgbClr val="6B6B6B"/>
+                </a:solidFill>
+                <a:latin typeface="Calibri" pitchFamily="34" charset="0"/>
+                <a:ea typeface="Calibri" pitchFamily="34" charset="-122"/>
+                <a:cs typeface="Calibri" pitchFamily="34" charset="-120"/>
+              </a:rPr>
+              <a:t>Live Gephi (AI Server API), NetworkX figures, and the Streamlit dashboard — all on the real data.</a:t>
+            </a:r>
+            <a:endParaRPr lang="en-US" sz="1030" dirty="0"/>
+          </a:p>
+        </p:txBody>
+      </p:sp>
+      <p:sp>
+        <p:nvSpPr>
+          <p:cNvPr id="13" name="Shape 11"/>
+          <p:cNvSpPr/>
+          <p:nvPr/>
+        </p:nvSpPr>
+        <p:spPr>
+          <a:xfrm>
+            <a:off x="6309360" y="1188720"/>
+            <a:ext cx="4937760" cy="1371600"/>
+          </a:xfrm>
+          <a:prstGeom prst="roundRect">
+            <a:avLst>
+              <a:gd name="adj" fmla="val 8000"/>
+            </a:avLst>
+          </a:prstGeom>
+          <a:solidFill>
+            <a:srgbClr val="FFFFFF"/>
+          </a:solidFill>
+          <a:ln/>
+          <a:effectLst>
+            <a:outerShdw sx="100000" sy="100000" kx="0" ky="0" algn="bl" rotWithShape="0" blurRad="76200" dist="38100" dir="5400000">
+              <a:srgbClr val="000000">
+                <a:alpha val="18000"/>
+              </a:srgbClr>
+            </a:outerShdw>
+          </a:effectLst>
+        </p:spPr>
+      </p:sp>
+      <p:sp>
+        <p:nvSpPr>
+          <p:cNvPr id="14" name="Text 12"/>
+          <p:cNvSpPr txBox="1"/>
+          <p:nvPr/>
+        </p:nvSpPr>
+        <p:spPr>
+          <a:xfrm>
+            <a:off x="6510528" y="1329538"/>
+            <a:ext cx="4535424" cy="548640"/>
+          </a:xfrm>
+          <a:prstGeom prst="rect">
+            <a:avLst/>
+          </a:prstGeom>
+          <a:noFill/>
+          <a:ln/>
+        </p:spPr>
+        <p:txBody>
+          <a:bodyPr wrap="square" lIns="0" tIns="0" rIns="0" bIns="0" rtlCol="0" anchor="t"/>
+          <a:lstStyle/>
+          <a:p>
+            <a:pPr algn="l" indent="0" marL="0">
+              <a:buNone/>
+            </a:pPr>
+            <a:r>
+              <a:rPr lang="en-US" sz="1250" b="1" dirty="0">
+                <a:solidFill>
+                  <a:srgbClr val="161616"/>
+                </a:solidFill>
+                <a:latin typeface="Arial" pitchFamily="34" charset="0"/>
+                <a:ea typeface="Arial" pitchFamily="34" charset="-122"/>
+                <a:cs typeface="Arial" pitchFamily="34" charset="-120"/>
+              </a:rPr>
+              <a:t>Full GNN run in the pinned env</a:t>
+            </a:r>
+            <a:endParaRPr lang="en-US" sz="1250" dirty="0"/>
+          </a:p>
+        </p:txBody>
+      </p:sp>
+      <p:sp>
+        <p:nvSpPr>
+          <p:cNvPr id="15" name="Text 13"/>
+          <p:cNvSpPr txBox="1"/>
+          <p:nvPr/>
+        </p:nvSpPr>
+        <p:spPr>
+          <a:xfrm>
+            <a:off x="6510528" y="1764792"/>
+            <a:ext cx="4535424" cy="674827"/>
+          </a:xfrm>
+          <a:prstGeom prst="rect">
+            <a:avLst/>
+          </a:prstGeom>
+          <a:noFill/>
+          <a:ln/>
+        </p:spPr>
+        <p:txBody>
+          <a:bodyPr wrap="square" lIns="0" tIns="0" rIns="0" bIns="0" rtlCol="0" anchor="t"/>
+          <a:lstStyle/>
+          <a:p>
+            <a:pPr algn="l" indent="0" marL="0">
+              <a:lnSpc>
+                <a:spcPct val="112000"/>
+              </a:lnSpc>
+              <a:buNone/>
+            </a:pPr>
+            <a:r>
+              <a:rPr lang="en-US" sz="1030" dirty="0">
+                <a:solidFill>
+                  <a:srgbClr val="6B6B6B"/>
+                </a:solidFill>
+                <a:latin typeface="Calibri" pitchFamily="34" charset="0"/>
+                <a:ea typeface="Calibri" pitchFamily="34" charset="-122"/>
+                <a:cs typeface="Calibri" pitchFamily="34" charset="-120"/>
+              </a:rPr>
+              <a:t>Train DistilBERT-GNN (torch 2.2 / dgl 2.2) and drop its real NMI/AMI/ARI next to these baselines.</a:t>
+            </a:r>
+            <a:endParaRPr lang="en-US" sz="1030" dirty="0"/>
+          </a:p>
+        </p:txBody>
+      </p:sp>
+      <p:sp>
+        <p:nvSpPr>
+          <p:cNvPr id="16" name="Shape 14"/>
+          <p:cNvSpPr/>
+          <p:nvPr/>
+        </p:nvSpPr>
+        <p:spPr>
+          <a:xfrm>
+            <a:off x="6309360" y="2724912"/>
+            <a:ext cx="4937760" cy="1371600"/>
+          </a:xfrm>
+          <a:prstGeom prst="roundRect">
+            <a:avLst>
+              <a:gd name="adj" fmla="val 8000"/>
+            </a:avLst>
+          </a:prstGeom>
+          <a:solidFill>
+            <a:srgbClr val="FFFFFF"/>
+          </a:solidFill>
+          <a:ln/>
+          <a:effectLst>
+            <a:outerShdw sx="100000" sy="100000" kx="0" ky="0" algn="bl" rotWithShape="0" blurRad="76200" dist="38100" dir="5400000">
+              <a:srgbClr val="000000">
+                <a:alpha val="18000"/>
+              </a:srgbClr>
+            </a:outerShdw>
+          </a:effectLst>
+        </p:spPr>
+      </p:sp>
+      <p:sp>
+        <p:nvSpPr>
+          <p:cNvPr id="17" name="Text 15"/>
+          <p:cNvSpPr txBox="1"/>
+          <p:nvPr/>
+        </p:nvSpPr>
+        <p:spPr>
+          <a:xfrm>
+            <a:off x="6510528" y="2865730"/>
+            <a:ext cx="4535424" cy="548640"/>
+          </a:xfrm>
+          <a:prstGeom prst="rect">
+            <a:avLst/>
+          </a:prstGeom>
+          <a:noFill/>
+          <a:ln/>
+        </p:spPr>
+        <p:txBody>
+          <a:bodyPr wrap="square" lIns="0" tIns="0" rIns="0" bIns="0" rtlCol="0" anchor="t"/>
+          <a:lstStyle/>
+          <a:p>
+            <a:pPr algn="l" indent="0" marL="0">
+              <a:buNone/>
+            </a:pPr>
+            <a:r>
+              <a:rPr lang="en-US" sz="1250" b="1" dirty="0">
+                <a:solidFill>
+                  <a:srgbClr val="161616"/>
+                </a:solidFill>
+                <a:latin typeface="Arial" pitchFamily="34" charset="0"/>
+                <a:ea typeface="Arial" pitchFamily="34" charset="-122"/>
+                <a:cs typeface="Arial" pitchFamily="34" charset="-120"/>
+              </a:rPr>
+              <a:t>Scale past test mode</a:t>
+            </a:r>
+            <a:endParaRPr lang="en-US" sz="1250" dirty="0"/>
+          </a:p>
+        </p:txBody>
+      </p:sp>
+      <p:sp>
+        <p:nvSpPr>
+          <p:cNvPr id="18" name="Text 16"/>
+          <p:cNvSpPr txBox="1"/>
+          <p:nvPr/>
+        </p:nvSpPr>
+        <p:spPr>
+          <a:xfrm>
+            <a:off x="6510528" y="3300984"/>
+            <a:ext cx="4535424" cy="674827"/>
+          </a:xfrm>
+          <a:prstGeom prst="rect">
+            <a:avLst/>
+          </a:prstGeom>
+          <a:noFill/>
+          <a:ln/>
+        </p:spPr>
+        <p:txBody>
+          <a:bodyPr wrap="square" lIns="0" tIns="0" rIns="0" bIns="0" rtlCol="0" anchor="t"/>
+          <a:lstStyle/>
+          <a:p>
+            <a:pPr algn="l" indent="0" marL="0">
+              <a:lnSpc>
+                <a:spcPct val="112000"/>
+              </a:lnSpc>
+              <a:buNone/>
+            </a:pPr>
+            <a:r>
+              <a:rPr lang="en-US" sz="1030" dirty="0">
+                <a:solidFill>
+                  <a:srgbClr val="6B6B6B"/>
+                </a:solidFill>
+                <a:latin typeface="Calibri" pitchFamily="34" charset="0"/>
+                <a:ea typeface="Calibri" pitchFamily="34" charset="-122"/>
+                <a:cs typeface="Calibri" pitchFamily="34" charset="-120"/>
+              </a:rPr>
+              <a:t>Lift the 100-msg/block cap to the full per-day blocks; cluster the Gephi exports with OpenOrd for 20k-node maps.</a:t>
+            </a:r>
+            <a:endParaRPr lang="en-US" sz="1030" dirty="0"/>
+          </a:p>
+        </p:txBody>
+      </p:sp>
+      <p:sp>
+        <p:nvSpPr>
+          <p:cNvPr id="19" name="Shape 17"/>
+          <p:cNvSpPr/>
+          <p:nvPr/>
+        </p:nvSpPr>
+        <p:spPr>
+          <a:xfrm>
+            <a:off x="6309360" y="4261104"/>
+            <a:ext cx="4937760" cy="1371600"/>
+          </a:xfrm>
+          <a:prstGeom prst="roundRect">
+            <a:avLst>
+              <a:gd name="adj" fmla="val 8000"/>
+            </a:avLst>
+          </a:prstGeom>
+          <a:solidFill>
+            <a:srgbClr val="FFFFFF"/>
+          </a:solidFill>
+          <a:ln/>
+          <a:effectLst>
+            <a:outerShdw sx="100000" sy="100000" kx="0" ky="0" algn="bl" rotWithShape="0" blurRad="76200" dist="38100" dir="5400000">
+              <a:srgbClr val="000000">
+                <a:alpha val="18000"/>
+              </a:srgbClr>
+            </a:outerShdw>
+          </a:effectLst>
+        </p:spPr>
+      </p:sp>
+      <p:sp>
+        <p:nvSpPr>
+          <p:cNvPr id="20" name="Text 18"/>
+          <p:cNvSpPr txBox="1"/>
+          <p:nvPr/>
+        </p:nvSpPr>
+        <p:spPr>
+          <a:xfrm>
+            <a:off x="6510528" y="4401922"/>
+            <a:ext cx="4535424" cy="548640"/>
+          </a:xfrm>
+          <a:prstGeom prst="rect">
+            <a:avLst/>
+          </a:prstGeom>
+          <a:noFill/>
+          <a:ln/>
+        </p:spPr>
+        <p:txBody>
+          <a:bodyPr wrap="square" lIns="0" tIns="0" rIns="0" bIns="0" rtlCol="0" anchor="t"/>
+          <a:lstStyle/>
+          <a:p>
+            <a:pPr algn="l" indent="0" marL="0">
+              <a:buNone/>
+            </a:pPr>
+            <a:r>
+              <a:rPr lang="en-US" sz="1250" b="1" dirty="0">
+                <a:solidFill>
+                  <a:srgbClr val="161616"/>
+                </a:solidFill>
+                <a:latin typeface="Arial" pitchFamily="34" charset="0"/>
+                <a:ea typeface="Arial" pitchFamily="34" charset="-122"/>
+                <a:cs typeface="Arial" pitchFamily="34" charset="-120"/>
+              </a:rPr>
+              <a:t>Write it up</a:t>
+            </a:r>
+            <a:endParaRPr lang="en-US" sz="1250" dirty="0"/>
+          </a:p>
+        </p:txBody>
+      </p:sp>
+      <p:sp>
+        <p:nvSpPr>
+          <p:cNvPr id="21" name="Text 19"/>
+          <p:cNvSpPr txBox="1"/>
+          <p:nvPr/>
+        </p:nvSpPr>
+        <p:spPr>
+          <a:xfrm>
+            <a:off x="6510528" y="4837176"/>
+            <a:ext cx="4535424" cy="674827"/>
+          </a:xfrm>
+          <a:prstGeom prst="rect">
+            <a:avLst/>
+          </a:prstGeom>
+          <a:noFill/>
+          <a:ln/>
+        </p:spPr>
+        <p:txBody>
+          <a:bodyPr wrap="square" lIns="0" tIns="0" rIns="0" bIns="0" rtlCol="0" anchor="t"/>
+          <a:lstStyle/>
+          <a:p>
+            <a:pPr algn="l" indent="0" marL="0">
+              <a:lnSpc>
+                <a:spcPct val="112000"/>
+              </a:lnSpc>
+              <a:buNone/>
+            </a:pPr>
+            <a:r>
+              <a:rPr lang="en-US" sz="1030" dirty="0">
+                <a:solidFill>
+                  <a:srgbClr val="6B6B6B"/>
+                </a:solidFill>
+                <a:latin typeface="Calibri" pitchFamily="34" charset="0"/>
+                <a:ea typeface="Calibri" pitchFamily="34" charset="-122"/>
+                <a:cs typeface="Calibri" pitchFamily="34" charset="-120"/>
+              </a:rPr>
+              <a:t>The per-block complementarity result is the paper's hook: when does structure beat content, and why?</a:t>
+            </a:r>
+            <a:endParaRPr lang="en-US" sz="1030" dirty="0"/>
+          </a:p>
+        </p:txBody>
+      </p:sp>
+      <p:sp>
+        <p:nvSpPr>
+          <p:cNvPr id="22" name="Text 20"/>
+          <p:cNvSpPr txBox="1"/>
+          <p:nvPr/>
+        </p:nvSpPr>
+        <p:spPr>
+          <a:xfrm>
+            <a:off x="11475720" y="6473952"/>
+            <a:ext cx="548640" cy="274320"/>
+          </a:xfrm>
+          <a:prstGeom prst="rect">
+            <a:avLst/>
+          </a:prstGeom>
+          <a:noFill/>
+          <a:ln/>
+        </p:spPr>
+        <p:txBody>
+          <a:bodyPr wrap="square" lIns="0" tIns="0" rIns="0" bIns="0" rtlCol="0" anchor="ctr"/>
+          <a:lstStyle/>
+          <a:p>
+            <a:pPr algn="r" indent="0" marL="0">
+              <a:buNone/>
+            </a:pPr>
+            <a:r>
+              <a:rPr lang="en-US" sz="900" dirty="0">
+                <a:solidFill>
+                  <a:srgbClr val="B8B8B2"/>
+                </a:solidFill>
+                <a:latin typeface="Calibri" pitchFamily="34" charset="0"/>
+                <a:ea typeface="Calibri" pitchFamily="34" charset="-122"/>
+                <a:cs typeface="Calibri" pitchFamily="34" charset="-120"/>
+              </a:rPr>
+              <a:t>27</a:t>
+            </a:r>
+            <a:endParaRPr lang="en-US" sz="900" dirty="0"/>
+          </a:p>
+        </p:txBody>
+      </p:sp>
+    </p:spTree>
+  </p:cSld>
+  <p:clrMapOvr>
+    <a:masterClrMapping/>
+  </p:clrMapOvr>
+</p:sld>
+</file>
+
+<file path=ppt/slides/slide28.xml><?xml version="1.0" encoding="utf-8"?>
+<p:sld xmlns:a="http://schemas.openxmlformats.org/drawingml/2006/main" xmlns:r="http://schemas.openxmlformats.org/officeDocument/2006/relationships" xmlns:p="http://schemas.openxmlformats.org/presentationml/2006/main">
+  <p:cSld name="Slide 28">
+    <p:spTree>
+      <p:nvGrpSpPr>
+        <p:cNvPr id="1" name=""/>
+        <p:cNvGrpSpPr/>
+        <p:nvPr/>
+      </p:nvGrpSpPr>
+      <p:grpSpPr>
+        <a:xfrm>
+          <a:off x="0" y="0"/>
+          <a:ext cx="0" cy="0"/>
+          <a:chOff x="0" y="0"/>
+          <a:chExt cx="0" cy="0"/>
+        </a:xfrm>
+      </p:grpSpPr>
+      <p:sp>
+        <p:nvSpPr>
+          <p:cNvPr id="2" name="Shape 0"/>
+          <p:cNvSpPr/>
+          <p:nvPr/>
+        </p:nvSpPr>
+        <p:spPr>
+          <a:xfrm>
+            <a:off x="822960" y="548640"/>
+            <a:ext cx="3520440" cy="502920"/>
+          </a:xfrm>
+          <a:prstGeom prst="rect">
+            <a:avLst/>
+          </a:prstGeom>
+          <a:solidFill>
+            <a:srgbClr val="3FD6D1"/>
+          </a:solidFill>
+          <a:ln/>
+        </p:spPr>
+      </p:sp>
+      <p:sp>
+        <p:nvSpPr>
+          <p:cNvPr id="3" name="Text 1"/>
+          <p:cNvSpPr txBox="1"/>
+          <p:nvPr/>
+        </p:nvSpPr>
+        <p:spPr>
+          <a:xfrm>
+            <a:off x="868680" y="566928"/>
+            <a:ext cx="3520440" cy="502920"/>
+          </a:xfrm>
+          <a:prstGeom prst="rect">
+            <a:avLst/>
+          </a:prstGeom>
+          <a:noFill/>
+          <a:ln/>
+        </p:spPr>
+        <p:txBody>
+          <a:bodyPr wrap="none" lIns="0" tIns="0" rIns="0" bIns="0" rtlCol="0" anchor="ctr"/>
+          <a:lstStyle/>
+          <a:p>
+            <a:pPr indent="0" marL="0">
+              <a:buNone/>
+            </a:pPr>
+            <a:r>
+              <a:rPr lang="en-US" sz="3000" b="1" dirty="0">
+                <a:solidFill>
+                  <a:srgbClr val="161616"/>
+                </a:solidFill>
+                <a:latin typeface="Arial" pitchFamily="34" charset="0"/>
+                <a:ea typeface="Arial" pitchFamily="34" charset="-122"/>
+                <a:cs typeface="Arial" pitchFamily="34" charset="-120"/>
+              </a:rPr>
+              <a:t>REFERENCES</a:t>
+            </a:r>
+            <a:endParaRPr lang="en-US" sz="3000" dirty="0"/>
+          </a:p>
+        </p:txBody>
+      </p:sp>
+      <p:sp>
+        <p:nvSpPr>
+          <p:cNvPr id="4" name="Text 2"/>
+          <p:cNvSpPr txBox="1"/>
+          <p:nvPr/>
+        </p:nvSpPr>
+        <p:spPr>
+          <a:xfrm>
+            <a:off x="822960" y="1417320"/>
+            <a:ext cx="5074920" cy="4846320"/>
+          </a:xfrm>
+          <a:prstGeom prst="rect">
+            <a:avLst/>
+          </a:prstGeom>
+          <a:noFill/>
+          <a:ln/>
+        </p:spPr>
+        <p:txBody>
+          <a:bodyPr wrap="square" lIns="0" tIns="0" rIns="0" bIns="0" rtlCol="0" anchor="t"/>
+          <a:lstStyle/>
+          <a:p>
+            <a:pPr indent="0" marL="0">
+              <a:lnSpc>
+                <a:spcPct val="120000"/>
+              </a:lnSpc>
+              <a:spcAft>
+                <a:spcPts val="1400"/>
+              </a:spcAft>
+              <a:buNone/>
+            </a:pPr>
+            <a:r>
+              <a:rPr lang="en-US" sz="1100" dirty="0">
+                <a:solidFill>
+                  <a:srgbClr val="161616"/>
+                </a:solidFill>
+                <a:latin typeface="Calibri" pitchFamily="34" charset="0"/>
+                <a:ea typeface="Calibri" pitchFamily="34" charset="-122"/>
+                <a:cs typeface="Calibri" pitchFamily="34" charset="-120"/>
+              </a:rPr>
+              <a:t>Abagissa, A. T., Saxena, S., &amp; Chandra, J. “DistilBERT-GNN: A Powerful Approach to Social Media Event Detection.” Research Square preprint, 2024.</a:t>
+            </a:r>
+            <a:endParaRPr lang="en-US" sz="1100" dirty="0"/>
+          </a:p>
+          <a:p>
+            <a:pPr indent="0" marL="0">
+              <a:lnSpc>
+                <a:spcPct val="120000"/>
+              </a:lnSpc>
+              <a:spcAft>
+                <a:spcPts val="1400"/>
+              </a:spcAft>
+              <a:buNone/>
+            </a:pPr>
+            <a:r>
+              <a:rPr lang="en-US" sz="1100" dirty="0">
+                <a:solidFill>
+                  <a:srgbClr val="161616"/>
+                </a:solidFill>
+                <a:latin typeface="Calibri" pitchFamily="34" charset="0"/>
+                <a:ea typeface="Calibri" pitchFamily="34" charset="-122"/>
+                <a:cs typeface="Calibri" pitchFamily="34" charset="-120"/>
+              </a:rPr>
+              <a:t>Blondel, V. D., et al. “Fast Unfolding of Communities in Large Networks.” J. Stat. Mech., 2008.</a:t>
+            </a:r>
+            <a:endParaRPr lang="en-US" sz="1100" dirty="0"/>
+          </a:p>
+          <a:p>
+            <a:pPr indent="0" marL="0">
+              <a:lnSpc>
+                <a:spcPct val="120000"/>
+              </a:lnSpc>
+              <a:spcAft>
+                <a:spcPts val="1400"/>
+              </a:spcAft>
+              <a:buNone/>
+            </a:pPr>
+            <a:r>
+              <a:rPr lang="en-US" sz="1100" dirty="0">
+                <a:solidFill>
+                  <a:srgbClr val="161616"/>
+                </a:solidFill>
+                <a:latin typeface="Calibri" pitchFamily="34" charset="0"/>
+                <a:ea typeface="Calibri" pitchFamily="34" charset="-122"/>
+                <a:cs typeface="Calibri" pitchFamily="34" charset="-120"/>
+              </a:rPr>
+              <a:t>Veličković, P., et al. “Graph Attention Networks.” ICLR, 2018.</a:t>
+            </a:r>
+            <a:endParaRPr lang="en-US" sz="1100" dirty="0"/>
+          </a:p>
+          <a:p>
+            <a:pPr indent="0" marL="0">
+              <a:lnSpc>
+                <a:spcPct val="120000"/>
+              </a:lnSpc>
+              <a:spcAft>
+                <a:spcPts val="1400"/>
+              </a:spcAft>
+              <a:buNone/>
+            </a:pPr>
+            <a:r>
+              <a:rPr lang="en-US" sz="1100" dirty="0">
+                <a:solidFill>
+                  <a:srgbClr val="161616"/>
+                </a:solidFill>
+                <a:latin typeface="Calibri" pitchFamily="34" charset="0"/>
+                <a:ea typeface="Calibri" pitchFamily="34" charset="-122"/>
+                <a:cs typeface="Calibri" pitchFamily="34" charset="-120"/>
+              </a:rPr>
+              <a:t>Newman, M. E. J. “Modularity and Community Structure in Networks.” PNAS, 2006.</a:t>
+            </a:r>
+            <a:endParaRPr lang="en-US" sz="1100" dirty="0"/>
+          </a:p>
+          <a:p>
+            <a:pPr indent="0" marL="0">
+              <a:lnSpc>
+                <a:spcPct val="120000"/>
+              </a:lnSpc>
+              <a:spcAft>
+                <a:spcPts val="1400"/>
+              </a:spcAft>
+              <a:buNone/>
+            </a:pPr>
+            <a:r>
+              <a:rPr lang="en-US" sz="1100" dirty="0">
+                <a:solidFill>
+                  <a:srgbClr val="161616"/>
+                </a:solidFill>
+                <a:latin typeface="Calibri" pitchFamily="34" charset="0"/>
+                <a:ea typeface="Calibri" pitchFamily="34" charset="-122"/>
+                <a:cs typeface="Calibri" pitchFamily="34" charset="-120"/>
+              </a:rPr>
+              <a:t>Ren, Y., et al. “Each Encoder Matters: Querying Social-Media Streams via QSGNN.” 2022.</a:t>
+            </a:r>
+            <a:endParaRPr lang="en-US" sz="1100" dirty="0"/>
+          </a:p>
+        </p:txBody>
+      </p:sp>
+      <p:sp>
+        <p:nvSpPr>
+          <p:cNvPr id="5" name="Text 3"/>
+          <p:cNvSpPr txBox="1"/>
+          <p:nvPr/>
+        </p:nvSpPr>
+        <p:spPr>
+          <a:xfrm>
+            <a:off x="6263640" y="1417320"/>
+            <a:ext cx="5074920" cy="4846320"/>
+          </a:xfrm>
+          <a:prstGeom prst="rect">
+            <a:avLst/>
+          </a:prstGeom>
+          <a:noFill/>
+          <a:ln/>
+        </p:spPr>
+        <p:txBody>
+          <a:bodyPr wrap="square" lIns="0" tIns="0" rIns="0" bIns="0" rtlCol="0" anchor="t"/>
+          <a:lstStyle/>
+          <a:p>
+            <a:pPr indent="0" marL="0">
+              <a:lnSpc>
+                <a:spcPct val="120000"/>
+              </a:lnSpc>
+              <a:spcAft>
+                <a:spcPts val="1400"/>
+              </a:spcAft>
+              <a:buNone/>
+            </a:pPr>
+            <a:r>
+              <a:rPr lang="en-US" sz="1100" dirty="0">
+                <a:solidFill>
+                  <a:srgbClr val="161616"/>
+                </a:solidFill>
+                <a:latin typeface="Calibri" pitchFamily="34" charset="0"/>
+                <a:ea typeface="Calibri" pitchFamily="34" charset="-122"/>
+                <a:cs typeface="Calibri" pitchFamily="34" charset="-120"/>
+              </a:rPr>
+              <a:t>Cao, Y., et al. “Knowledge-Preserving Incremental Social Event Detection via GNN (KPGNN).” 2021.</a:t>
+            </a:r>
+            <a:endParaRPr lang="en-US" sz="1100" dirty="0"/>
+          </a:p>
+          <a:p>
+            <a:pPr indent="0" marL="0">
+              <a:lnSpc>
+                <a:spcPct val="120000"/>
+              </a:lnSpc>
+              <a:spcAft>
+                <a:spcPts val="1400"/>
+              </a:spcAft>
+              <a:buNone/>
+            </a:pPr>
+            <a:r>
+              <a:rPr lang="en-US" sz="1100" dirty="0">
+                <a:solidFill>
+                  <a:srgbClr val="161616"/>
+                </a:solidFill>
+                <a:latin typeface="Calibri" pitchFamily="34" charset="0"/>
+                <a:ea typeface="Calibri" pitchFamily="34" charset="-122"/>
+                <a:cs typeface="Calibri" pitchFamily="34" charset="-120"/>
+              </a:rPr>
+              <a:t>Peng, H., et al. “Fine-Grained Event Categorization with Heterogeneous GCN (PP-GCN).” 2019.</a:t>
+            </a:r>
+            <a:endParaRPr lang="en-US" sz="1100" dirty="0"/>
+          </a:p>
+          <a:p>
+            <a:pPr indent="0" marL="0">
+              <a:lnSpc>
+                <a:spcPct val="120000"/>
+              </a:lnSpc>
+              <a:spcAft>
+                <a:spcPts val="1400"/>
+              </a:spcAft>
+              <a:buNone/>
+            </a:pPr>
+            <a:r>
+              <a:rPr lang="en-US" sz="1100" dirty="0">
+                <a:solidFill>
+                  <a:srgbClr val="161616"/>
+                </a:solidFill>
+                <a:latin typeface="Calibri" pitchFamily="34" charset="0"/>
+                <a:ea typeface="Calibri" pitchFamily="34" charset="-122"/>
+                <a:cs typeface="Calibri" pitchFamily="34" charset="-120"/>
+              </a:rPr>
+              <a:t>Liu, B., et al. “EventX: Open-Domain Event Extraction.” 2020.</a:t>
+            </a:r>
+            <a:endParaRPr lang="en-US" sz="1100" dirty="0"/>
+          </a:p>
+          <a:p>
+            <a:pPr indent="0" marL="0">
+              <a:lnSpc>
+                <a:spcPct val="120000"/>
+              </a:lnSpc>
+              <a:spcAft>
+                <a:spcPts val="1400"/>
+              </a:spcAft>
+              <a:buNone/>
+            </a:pPr>
+            <a:r>
+              <a:rPr lang="en-US" sz="1100" dirty="0">
+                <a:solidFill>
+                  <a:srgbClr val="161616"/>
+                </a:solidFill>
+                <a:latin typeface="Calibri" pitchFamily="34" charset="0"/>
+                <a:ea typeface="Calibri" pitchFamily="34" charset="-122"/>
+                <a:cs typeface="Calibri" pitchFamily="34" charset="-120"/>
+              </a:rPr>
+              <a:t>Bastian, M., Heymann, S., &amp; Jacomy, M. “Gephi: An Open Source Software for Exploring and Manipulating Networks.” ICWSM, 2009.</a:t>
+            </a:r>
+            <a:endParaRPr lang="en-US" sz="1100" dirty="0"/>
+          </a:p>
+          <a:p>
+            <a:pPr indent="0" marL="0">
+              <a:lnSpc>
+                <a:spcPct val="120000"/>
+              </a:lnSpc>
+              <a:spcAft>
+                <a:spcPts val="1400"/>
+              </a:spcAft>
+              <a:buNone/>
+            </a:pPr>
+            <a:r>
+              <a:rPr lang="en-US" sz="1100" dirty="0">
+                <a:solidFill>
+                  <a:srgbClr val="161616"/>
+                </a:solidFill>
+                <a:latin typeface="Calibri" pitchFamily="34" charset="0"/>
+                <a:ea typeface="Calibri" pitchFamily="34" charset="-122"/>
+                <a:cs typeface="Calibri" pitchFamily="34" charset="-120"/>
+              </a:rPr>
+              <a:t>Hagberg, A., Schult, D., &amp; Swart, P. “Exploring Network Structure with NetworkX.” SciPy, 2008.</a:t>
+            </a:r>
+            <a:endParaRPr lang="en-US" sz="1100" dirty="0"/>
+          </a:p>
+        </p:txBody>
+      </p:sp>
+      <p:sp>
+        <p:nvSpPr>
+          <p:cNvPr id="6" name="Text 4"/>
+          <p:cNvSpPr txBox="1"/>
+          <p:nvPr/>
+        </p:nvSpPr>
+        <p:spPr>
+          <a:xfrm>
+            <a:off x="11475720" y="6473952"/>
+            <a:ext cx="548640" cy="274320"/>
+          </a:xfrm>
+          <a:prstGeom prst="rect">
+            <a:avLst/>
+          </a:prstGeom>
+          <a:noFill/>
+          <a:ln/>
+        </p:spPr>
+        <p:txBody>
+          <a:bodyPr wrap="square" lIns="0" tIns="0" rIns="0" bIns="0" rtlCol="0" anchor="ctr"/>
+          <a:lstStyle/>
+          <a:p>
+            <a:pPr algn="r" indent="0" marL="0">
+              <a:buNone/>
+            </a:pPr>
+            <a:r>
+              <a:rPr lang="en-US" sz="900" dirty="0">
+                <a:solidFill>
+                  <a:srgbClr val="B8B8B2"/>
+                </a:solidFill>
+                <a:latin typeface="Calibri" pitchFamily="34" charset="0"/>
+                <a:ea typeface="Calibri" pitchFamily="34" charset="-122"/>
+                <a:cs typeface="Calibri" pitchFamily="34" charset="-120"/>
+              </a:rPr>
+              <a:t>28</a:t>
+            </a:r>
+            <a:endParaRPr lang="en-US" sz="900" dirty="0"/>
+          </a:p>
+        </p:txBody>
+      </p:sp>
+    </p:spTree>
+  </p:cSld>
+  <p:clrMapOvr>
+    <a:masterClrMapping/>
+  </p:clrMapOvr>
+</p:sld>
+</file>
+
+<file path=ppt/slides/slide29.xml><?xml version="1.0" encoding="utf-8"?>
+<p:sld xmlns:a="http://schemas.openxmlformats.org/drawingml/2006/main" xmlns:r="http://schemas.openxmlformats.org/officeDocument/2006/relationships" xmlns:p="http://schemas.openxmlformats.org/presentationml/2006/main">
+  <p:cSld name="Slide 29">
+    <p:spTree>
+      <p:nvGrpSpPr>
+        <p:cNvPr id="1" name=""/>
+        <p:cNvGrpSpPr/>
+        <p:nvPr/>
+      </p:nvGrpSpPr>
+      <p:grpSpPr>
+        <a:xfrm>
+          <a:off x="0" y="0"/>
+          <a:ext cx="0" cy="0"/>
+          <a:chOff x="0" y="0"/>
+          <a:chExt cx="0" cy="0"/>
+        </a:xfrm>
+      </p:grpSpPr>
+      <p:sp>
+        <p:nvSpPr>
+          <p:cNvPr id="2" name="Text 0"/>
+          <p:cNvSpPr txBox="1"/>
+          <p:nvPr/>
+        </p:nvSpPr>
+        <p:spPr>
+          <a:xfrm>
+            <a:off x="2743200" y="2834640"/>
+            <a:ext cx="3017520" cy="1005840"/>
+          </a:xfrm>
+          <a:prstGeom prst="rect">
+            <a:avLst/>
+          </a:prstGeom>
+          <a:noFill/>
+          <a:ln/>
+        </p:spPr>
+        <p:txBody>
+          <a:bodyPr wrap="square" lIns="0" tIns="0" rIns="0" bIns="0" rtlCol="0" anchor="ctr"/>
+          <a:lstStyle/>
+          <a:p>
+            <a:pPr algn="r" indent="0" marL="0">
+              <a:buNone/>
+            </a:pPr>
+            <a:r>
+              <a:rPr lang="en-US" sz="5400" b="1" dirty="0">
+                <a:solidFill>
+                  <a:srgbClr val="161616"/>
+                </a:solidFill>
+                <a:latin typeface="Arial" pitchFamily="34" charset="0"/>
+                <a:ea typeface="Arial" pitchFamily="34" charset="-122"/>
+                <a:cs typeface="Arial" pitchFamily="34" charset="-120"/>
+              </a:rPr>
               <a:t>Thank </a:t>
             </a:r>
             <a:endParaRPr lang="en-US" sz="5400" dirty="0"/>
@@ -17981,7 +22141,7 @@
                 <a:ea typeface="Calibri" pitchFamily="34" charset="-122"/>
                 <a:cs typeface="Calibri" pitchFamily="34" charset="-120"/>
               </a:rPr>
-              <a:t>27</a:t>
+              <a:t>29</a:t>
             </a:r>
             <a:endParaRPr lang="en-US" sz="900" dirty="0"/>
           </a:p>
